--- a/public/velora_template.pptx
+++ b/public/velora_template.pptx
@@ -1,48 +1,48 @@
 
 <file path=ppt/presentation.xml><?xml version="1.0" encoding="utf-8"?>
-<p:presentation xmlns:a="http://schemas.openxmlformats.org/drawingml/2006/main" xmlns:r="http://schemas.openxmlformats.org/officeDocument/2006/relationships" xmlns:p="http://schemas.openxmlformats.org/presentationml/2006/main" saveSubsetFonts="1" embedTrueTypeFonts="true">
+<p:presentation xmlns:a="http://schemas.openxmlformats.org/drawingml/2006/main" xmlns:r="http://schemas.openxmlformats.org/officeDocument/2006/relationships" xmlns:p="http://schemas.openxmlformats.org/presentationml/2006/main" embedTrueTypeFonts="1" saveSubsetFonts="1">
   <p:sldMasterIdLst>
     <p:sldMasterId id="2147483648" r:id="rId1"/>
   </p:sldMasterIdLst>
   <p:sldIdLst>
-    <p:sldId id="256" r:id="rId6"/>
-    <p:sldId id="257" r:id="rId7"/>
-    <p:sldId id="258" r:id="rId8"/>
-    <p:sldId id="259" r:id="rId9"/>
-    <p:sldId id="260" r:id="rId10"/>
-    <p:sldId id="261" r:id="rId11"/>
-    <p:sldId id="262" r:id="rId12"/>
+    <p:sldId id="256" r:id="rId2"/>
+    <p:sldId id="257" r:id="rId3"/>
+    <p:sldId id="258" r:id="rId4"/>
+    <p:sldId id="259" r:id="rId5"/>
+    <p:sldId id="260" r:id="rId6"/>
+    <p:sldId id="261" r:id="rId7"/>
+    <p:sldId id="262" r:id="rId8"/>
   </p:sldIdLst>
   <p:sldSz cx="18288000" cy="10287000"/>
   <p:notesSz cx="6858000" cy="9144000"/>
   <p:embeddedFontLst>
     <p:embeddedFont>
-      <p:font typeface="Gagalin" charset="1" panose="00000500000000000000"/>
+      <p:font typeface="Bangers" panose="020B0604020202020204" charset="0"/>
+      <p:regular r:id="rId9"/>
+    </p:embeddedFont>
+    <p:embeddedFont>
+      <p:font typeface="Canva Sans" panose="020B0604020202020204" charset="0"/>
+      <p:regular r:id="rId10"/>
+    </p:embeddedFont>
+    <p:embeddedFont>
+      <p:font typeface="Canva Sans Bold" panose="020B0604020202020204" charset="0"/>
+      <p:regular r:id="rId11"/>
+    </p:embeddedFont>
+    <p:embeddedFont>
+      <p:font typeface="Comic Sans" panose="020B0604020202020204" charset="0"/>
+      <p:regular r:id="rId12"/>
+    </p:embeddedFont>
+    <p:embeddedFont>
+      <p:font typeface="Copperplate Gothic 32 AB Bold" panose="020B0604020202020204" charset="0"/>
       <p:regular r:id="rId13"/>
     </p:embeddedFont>
     <p:embeddedFont>
-      <p:font typeface="Copperplate Gothic 32 AB Bold" charset="1" panose="020E0707020206020404"/>
+      <p:font typeface="Copperplate Gothic 32 BC" panose="020B0604020202020204" charset="0"/>
       <p:regular r:id="rId14"/>
     </p:embeddedFont>
     <p:embeddedFont>
-      <p:font typeface="Copperplate Gothic 32 BC" charset="1" panose="020E0807020206020404"/>
+      <p:font typeface="Gagalin" panose="020B0604020202020204" charset="0"/>
       <p:regular r:id="rId15"/>
-    </p:embeddedFont>
-    <p:embeddedFont>
-      <p:font typeface="Bangers" charset="1" panose="00000500000000000000"/>
-      <p:regular r:id="rId16"/>
-    </p:embeddedFont>
-    <p:embeddedFont>
-      <p:font typeface="Comic Sans" charset="1" panose="03000702030302020204"/>
-      <p:regular r:id="rId17"/>
-    </p:embeddedFont>
-    <p:embeddedFont>
-      <p:font typeface="Canva Sans" charset="1" panose="020B0503030501040103"/>
-      <p:regular r:id="rId18"/>
-    </p:embeddedFont>
-    <p:embeddedFont>
-      <p:font typeface="Canva Sans Bold" charset="1" panose="020B0803030501040103"/>
-      <p:regular r:id="rId19"/>
     </p:embeddedFont>
   </p:embeddedFontLst>
   <p:defaultTextStyle>
@@ -140,6 +140,22 @@
       </a:defRPr>
     </a:lvl9pPr>
   </p:defaultTextStyle>
+  <p:extLst>
+    <p:ext uri="{EFAFB233-063F-42B5-8137-9DF3F51BA10A}">
+      <p15:sldGuideLst xmlns:p15="http://schemas.microsoft.com/office/powerpoint/2012/main">
+        <p15:guide id="1" orient="horz" pos="2160">
+          <p15:clr>
+            <a:srgbClr val="A4A3A4"/>
+          </p15:clr>
+        </p15:guide>
+        <p15:guide id="2" pos="2880">
+          <p15:clr>
+            <a:srgbClr val="A4A3A4"/>
+          </p15:clr>
+        </p15:guide>
+      </p15:sldGuideLst>
+    </p:ext>
+  </p:extLst>
 </p:presentation>
 </file>
 
@@ -181,10 +197,9 @@
           <a:lstStyle/>
           <a:p>
             <a:r>
-              <a:rPr lang="en-US" smtClean="0"/>
+              <a:rPr lang="en-US"/>
               <a:t>Click to edit Master title style</a:t>
             </a:r>
-            <a:endParaRPr lang="en-US"/>
           </a:p>
         </p:txBody>
       </p:sp>
@@ -300,10 +315,9 @@
           </a:lstStyle>
           <a:p>
             <a:r>
-              <a:rPr lang="en-US" smtClean="0"/>
+              <a:rPr lang="en-US"/>
               <a:t>Click to edit Master subtitle style</a:t>
             </a:r>
-            <a:endParaRPr lang="en-US"/>
           </a:p>
         </p:txBody>
       </p:sp>
@@ -325,7 +339,7 @@
             <a:fld id="{1D8BD707-D9CF-40AE-B4C6-C98DA3205C09}" type="datetimeFigureOut">
               <a:rPr lang="en-US" smtClean="0"/>
               <a:pPr/>
-              <a:t>8/1/2011</a:t>
+              <a:t>3/17/2026</a:t>
             </a:fld>
             <a:endParaRPr lang="en-US"/>
           </a:p>
@@ -415,10 +429,9 @@
           <a:lstStyle/>
           <a:p>
             <a:r>
-              <a:rPr lang="en-US" smtClean="0"/>
+              <a:rPr lang="en-US"/>
               <a:t>Click to edit Master title style</a:t>
             </a:r>
-            <a:endParaRPr lang="en-US"/>
           </a:p>
         </p:txBody>
       </p:sp>
@@ -439,38 +452,37 @@
           <a:p>
             <a:pPr lvl="0"/>
             <a:r>
-              <a:rPr lang="en-US" smtClean="0"/>
+              <a:rPr lang="en-US"/>
               <a:t>Click to edit Master text styles</a:t>
             </a:r>
           </a:p>
           <a:p>
             <a:pPr lvl="1"/>
             <a:r>
-              <a:rPr lang="en-US" smtClean="0"/>
+              <a:rPr lang="en-US"/>
               <a:t>Second level</a:t>
             </a:r>
           </a:p>
           <a:p>
             <a:pPr lvl="2"/>
             <a:r>
-              <a:rPr lang="en-US" smtClean="0"/>
+              <a:rPr lang="en-US"/>
               <a:t>Third level</a:t>
             </a:r>
           </a:p>
           <a:p>
             <a:pPr lvl="3"/>
             <a:r>
-              <a:rPr lang="en-US" smtClean="0"/>
+              <a:rPr lang="en-US"/>
               <a:t>Fourth level</a:t>
             </a:r>
           </a:p>
           <a:p>
             <a:pPr lvl="4"/>
             <a:r>
-              <a:rPr lang="en-US" smtClean="0"/>
+              <a:rPr lang="en-US"/>
               <a:t>Fifth level</a:t>
             </a:r>
-            <a:endParaRPr lang="en-US"/>
           </a:p>
         </p:txBody>
       </p:sp>
@@ -492,7 +504,7 @@
             <a:fld id="{1D8BD707-D9CF-40AE-B4C6-C98DA3205C09}" type="datetimeFigureOut">
               <a:rPr lang="en-US" smtClean="0"/>
               <a:pPr/>
-              <a:t>8/1/2011</a:t>
+              <a:t>3/17/2026</a:t>
             </a:fld>
             <a:endParaRPr lang="en-US"/>
           </a:p>
@@ -587,10 +599,9 @@
           <a:lstStyle/>
           <a:p>
             <a:r>
-              <a:rPr lang="en-US" smtClean="0"/>
+              <a:rPr lang="en-US"/>
               <a:t>Click to edit Master title style</a:t>
             </a:r>
-            <a:endParaRPr lang="en-US"/>
           </a:p>
         </p:txBody>
       </p:sp>
@@ -616,38 +627,37 @@
           <a:p>
             <a:pPr lvl="0"/>
             <a:r>
-              <a:rPr lang="en-US" smtClean="0"/>
+              <a:rPr lang="en-US"/>
               <a:t>Click to edit Master text styles</a:t>
             </a:r>
           </a:p>
           <a:p>
             <a:pPr lvl="1"/>
             <a:r>
-              <a:rPr lang="en-US" smtClean="0"/>
+              <a:rPr lang="en-US"/>
               <a:t>Second level</a:t>
             </a:r>
           </a:p>
           <a:p>
             <a:pPr lvl="2"/>
             <a:r>
-              <a:rPr lang="en-US" smtClean="0"/>
+              <a:rPr lang="en-US"/>
               <a:t>Third level</a:t>
             </a:r>
           </a:p>
           <a:p>
             <a:pPr lvl="3"/>
             <a:r>
-              <a:rPr lang="en-US" smtClean="0"/>
+              <a:rPr lang="en-US"/>
               <a:t>Fourth level</a:t>
             </a:r>
           </a:p>
           <a:p>
             <a:pPr lvl="4"/>
             <a:r>
-              <a:rPr lang="en-US" smtClean="0"/>
+              <a:rPr lang="en-US"/>
               <a:t>Fifth level</a:t>
             </a:r>
-            <a:endParaRPr lang="en-US"/>
           </a:p>
         </p:txBody>
       </p:sp>
@@ -669,7 +679,7 @@
             <a:fld id="{1D8BD707-D9CF-40AE-B4C6-C98DA3205C09}" type="datetimeFigureOut">
               <a:rPr lang="en-US" smtClean="0"/>
               <a:pPr/>
-              <a:t>8/1/2011</a:t>
+              <a:t>3/17/2026</a:t>
             </a:fld>
             <a:endParaRPr lang="en-US"/>
           </a:p>
@@ -759,10 +769,9 @@
           <a:lstStyle/>
           <a:p>
             <a:r>
-              <a:rPr lang="en-US" smtClean="0"/>
+              <a:rPr lang="en-US"/>
               <a:t>Click to edit Master title style</a:t>
             </a:r>
-            <a:endParaRPr lang="en-US"/>
           </a:p>
         </p:txBody>
       </p:sp>
@@ -783,38 +792,37 @@
           <a:p>
             <a:pPr lvl="0"/>
             <a:r>
-              <a:rPr lang="en-US" smtClean="0"/>
+              <a:rPr lang="en-US"/>
               <a:t>Click to edit Master text styles</a:t>
             </a:r>
           </a:p>
           <a:p>
             <a:pPr lvl="1"/>
             <a:r>
-              <a:rPr lang="en-US" smtClean="0"/>
+              <a:rPr lang="en-US"/>
               <a:t>Second level</a:t>
             </a:r>
           </a:p>
           <a:p>
             <a:pPr lvl="2"/>
             <a:r>
-              <a:rPr lang="en-US" smtClean="0"/>
+              <a:rPr lang="en-US"/>
               <a:t>Third level</a:t>
             </a:r>
           </a:p>
           <a:p>
             <a:pPr lvl="3"/>
             <a:r>
-              <a:rPr lang="en-US" smtClean="0"/>
+              <a:rPr lang="en-US"/>
               <a:t>Fourth level</a:t>
             </a:r>
           </a:p>
           <a:p>
             <a:pPr lvl="4"/>
             <a:r>
-              <a:rPr lang="en-US" smtClean="0"/>
+              <a:rPr lang="en-US"/>
               <a:t>Fifth level</a:t>
             </a:r>
-            <a:endParaRPr lang="en-US"/>
           </a:p>
         </p:txBody>
       </p:sp>
@@ -836,7 +844,7 @@
             <a:fld id="{1D8BD707-D9CF-40AE-B4C6-C98DA3205C09}" type="datetimeFigureOut">
               <a:rPr lang="en-US" smtClean="0"/>
               <a:pPr/>
-              <a:t>8/1/2011</a:t>
+              <a:t>3/17/2026</a:t>
             </a:fld>
             <a:endParaRPr lang="en-US"/>
           </a:p>
@@ -935,10 +943,9 @@
           </a:lstStyle>
           <a:p>
             <a:r>
-              <a:rPr lang="en-US" smtClean="0"/>
+              <a:rPr lang="en-US"/>
               <a:t>Click to edit Master title style</a:t>
             </a:r>
-            <a:endParaRPr lang="en-US"/>
           </a:p>
         </p:txBody>
       </p:sp>
@@ -1055,7 +1062,7 @@
           <a:p>
             <a:pPr lvl="0"/>
             <a:r>
-              <a:rPr lang="en-US" smtClean="0"/>
+              <a:rPr lang="en-US"/>
               <a:t>Click to edit Master text styles</a:t>
             </a:r>
           </a:p>
@@ -1079,7 +1086,7 @@
             <a:fld id="{1D8BD707-D9CF-40AE-B4C6-C98DA3205C09}" type="datetimeFigureOut">
               <a:rPr lang="en-US" smtClean="0"/>
               <a:pPr/>
-              <a:t>8/1/2011</a:t>
+              <a:t>3/17/2026</a:t>
             </a:fld>
             <a:endParaRPr lang="en-US"/>
           </a:p>
@@ -1169,10 +1176,9 @@
           <a:lstStyle/>
           <a:p>
             <a:r>
-              <a:rPr lang="en-US" smtClean="0"/>
+              <a:rPr lang="en-US"/>
               <a:t>Click to edit Master title style</a:t>
             </a:r>
-            <a:endParaRPr lang="en-US"/>
           </a:p>
         </p:txBody>
       </p:sp>
@@ -1226,38 +1232,37 @@
           <a:p>
             <a:pPr lvl="0"/>
             <a:r>
-              <a:rPr lang="en-US" smtClean="0"/>
+              <a:rPr lang="en-US"/>
               <a:t>Click to edit Master text styles</a:t>
             </a:r>
           </a:p>
           <a:p>
             <a:pPr lvl="1"/>
             <a:r>
-              <a:rPr lang="en-US" smtClean="0"/>
+              <a:rPr lang="en-US"/>
               <a:t>Second level</a:t>
             </a:r>
           </a:p>
           <a:p>
             <a:pPr lvl="2"/>
             <a:r>
-              <a:rPr lang="en-US" smtClean="0"/>
+              <a:rPr lang="en-US"/>
               <a:t>Third level</a:t>
             </a:r>
           </a:p>
           <a:p>
             <a:pPr lvl="3"/>
             <a:r>
-              <a:rPr lang="en-US" smtClean="0"/>
+              <a:rPr lang="en-US"/>
               <a:t>Fourth level</a:t>
             </a:r>
           </a:p>
           <a:p>
             <a:pPr lvl="4"/>
             <a:r>
-              <a:rPr lang="en-US" smtClean="0"/>
+              <a:rPr lang="en-US"/>
               <a:t>Fifth level</a:t>
             </a:r>
-            <a:endParaRPr lang="en-US"/>
           </a:p>
         </p:txBody>
       </p:sp>
@@ -1311,38 +1316,37 @@
           <a:p>
             <a:pPr lvl="0"/>
             <a:r>
-              <a:rPr lang="en-US" smtClean="0"/>
+              <a:rPr lang="en-US"/>
               <a:t>Click to edit Master text styles</a:t>
             </a:r>
           </a:p>
           <a:p>
             <a:pPr lvl="1"/>
             <a:r>
-              <a:rPr lang="en-US" smtClean="0"/>
+              <a:rPr lang="en-US"/>
               <a:t>Second level</a:t>
             </a:r>
           </a:p>
           <a:p>
             <a:pPr lvl="2"/>
             <a:r>
-              <a:rPr lang="en-US" smtClean="0"/>
+              <a:rPr lang="en-US"/>
               <a:t>Third level</a:t>
             </a:r>
           </a:p>
           <a:p>
             <a:pPr lvl="3"/>
             <a:r>
-              <a:rPr lang="en-US" smtClean="0"/>
+              <a:rPr lang="en-US"/>
               <a:t>Fourth level</a:t>
             </a:r>
           </a:p>
           <a:p>
             <a:pPr lvl="4"/>
             <a:r>
-              <a:rPr lang="en-US" smtClean="0"/>
+              <a:rPr lang="en-US"/>
               <a:t>Fifth level</a:t>
             </a:r>
-            <a:endParaRPr lang="en-US"/>
           </a:p>
         </p:txBody>
       </p:sp>
@@ -1364,7 +1368,7 @@
             <a:fld id="{1D8BD707-D9CF-40AE-B4C6-C98DA3205C09}" type="datetimeFigureOut">
               <a:rPr lang="en-US" smtClean="0"/>
               <a:pPr/>
-              <a:t>8/1/2011</a:t>
+              <a:t>3/17/2026</a:t>
             </a:fld>
             <a:endParaRPr lang="en-US"/>
           </a:p>
@@ -1458,10 +1462,9 @@
           </a:lstStyle>
           <a:p>
             <a:r>
-              <a:rPr lang="en-US" smtClean="0"/>
+              <a:rPr lang="en-US"/>
               <a:t>Click to edit Master title style</a:t>
             </a:r>
-            <a:endParaRPr lang="en-US"/>
           </a:p>
         </p:txBody>
       </p:sp>
@@ -1524,7 +1527,7 @@
           <a:p>
             <a:pPr lvl="0"/>
             <a:r>
-              <a:rPr lang="en-US" smtClean="0"/>
+              <a:rPr lang="en-US"/>
               <a:t>Click to edit Master text styles</a:t>
             </a:r>
           </a:p>
@@ -1580,38 +1583,37 @@
           <a:p>
             <a:pPr lvl="0"/>
             <a:r>
-              <a:rPr lang="en-US" smtClean="0"/>
+              <a:rPr lang="en-US"/>
               <a:t>Click to edit Master text styles</a:t>
             </a:r>
           </a:p>
           <a:p>
             <a:pPr lvl="1"/>
             <a:r>
-              <a:rPr lang="en-US" smtClean="0"/>
+              <a:rPr lang="en-US"/>
               <a:t>Second level</a:t>
             </a:r>
           </a:p>
           <a:p>
             <a:pPr lvl="2"/>
             <a:r>
-              <a:rPr lang="en-US" smtClean="0"/>
+              <a:rPr lang="en-US"/>
               <a:t>Third level</a:t>
             </a:r>
           </a:p>
           <a:p>
             <a:pPr lvl="3"/>
             <a:r>
-              <a:rPr lang="en-US" smtClean="0"/>
+              <a:rPr lang="en-US"/>
               <a:t>Fourth level</a:t>
             </a:r>
           </a:p>
           <a:p>
             <a:pPr lvl="4"/>
             <a:r>
-              <a:rPr lang="en-US" smtClean="0"/>
+              <a:rPr lang="en-US"/>
               <a:t>Fifth level</a:t>
             </a:r>
-            <a:endParaRPr lang="en-US"/>
           </a:p>
         </p:txBody>
       </p:sp>
@@ -1674,7 +1676,7 @@
           <a:p>
             <a:pPr lvl="0"/>
             <a:r>
-              <a:rPr lang="en-US" smtClean="0"/>
+              <a:rPr lang="en-US"/>
               <a:t>Click to edit Master text styles</a:t>
             </a:r>
           </a:p>
@@ -1730,38 +1732,37 @@
           <a:p>
             <a:pPr lvl="0"/>
             <a:r>
-              <a:rPr lang="en-US" smtClean="0"/>
+              <a:rPr lang="en-US"/>
               <a:t>Click to edit Master text styles</a:t>
             </a:r>
           </a:p>
           <a:p>
             <a:pPr lvl="1"/>
             <a:r>
-              <a:rPr lang="en-US" smtClean="0"/>
+              <a:rPr lang="en-US"/>
               <a:t>Second level</a:t>
             </a:r>
           </a:p>
           <a:p>
             <a:pPr lvl="2"/>
             <a:r>
-              <a:rPr lang="en-US" smtClean="0"/>
+              <a:rPr lang="en-US"/>
               <a:t>Third level</a:t>
             </a:r>
           </a:p>
           <a:p>
             <a:pPr lvl="3"/>
             <a:r>
-              <a:rPr lang="en-US" smtClean="0"/>
+              <a:rPr lang="en-US"/>
               <a:t>Fourth level</a:t>
             </a:r>
           </a:p>
           <a:p>
             <a:pPr lvl="4"/>
             <a:r>
-              <a:rPr lang="en-US" smtClean="0"/>
+              <a:rPr lang="en-US"/>
               <a:t>Fifth level</a:t>
             </a:r>
-            <a:endParaRPr lang="en-US"/>
           </a:p>
         </p:txBody>
       </p:sp>
@@ -1783,7 +1784,7 @@
             <a:fld id="{1D8BD707-D9CF-40AE-B4C6-C98DA3205C09}" type="datetimeFigureOut">
               <a:rPr lang="en-US" smtClean="0"/>
               <a:pPr/>
-              <a:t>8/1/2011</a:t>
+              <a:t>3/17/2026</a:t>
             </a:fld>
             <a:endParaRPr lang="en-US"/>
           </a:p>
@@ -1873,10 +1874,9 @@
           <a:lstStyle/>
           <a:p>
             <a:r>
-              <a:rPr lang="en-US" smtClean="0"/>
+              <a:rPr lang="en-US"/>
               <a:t>Click to edit Master title style</a:t>
             </a:r>
-            <a:endParaRPr lang="en-US"/>
           </a:p>
         </p:txBody>
       </p:sp>
@@ -1898,7 +1898,7 @@
             <a:fld id="{1D8BD707-D9CF-40AE-B4C6-C98DA3205C09}" type="datetimeFigureOut">
               <a:rPr lang="en-US" smtClean="0"/>
               <a:pPr/>
-              <a:t>8/1/2011</a:t>
+              <a:t>3/17/2026</a:t>
             </a:fld>
             <a:endParaRPr lang="en-US"/>
           </a:p>
@@ -1990,7 +1990,7 @@
             <a:fld id="{1D8BD707-D9CF-40AE-B4C6-C98DA3205C09}" type="datetimeFigureOut">
               <a:rPr lang="en-US" smtClean="0"/>
               <a:pPr/>
-              <a:t>8/1/2011</a:t>
+              <a:t>3/17/2026</a:t>
             </a:fld>
             <a:endParaRPr lang="en-US"/>
           </a:p>
@@ -2089,10 +2089,9 @@
           </a:lstStyle>
           <a:p>
             <a:r>
-              <a:rPr lang="en-US" smtClean="0"/>
+              <a:rPr lang="en-US"/>
               <a:t>Click to edit Master title style</a:t>
             </a:r>
-            <a:endParaRPr lang="en-US"/>
           </a:p>
         </p:txBody>
       </p:sp>
@@ -2146,38 +2145,37 @@
           <a:p>
             <a:pPr lvl="0"/>
             <a:r>
-              <a:rPr lang="en-US" smtClean="0"/>
+              <a:rPr lang="en-US"/>
               <a:t>Click to edit Master text styles</a:t>
             </a:r>
           </a:p>
           <a:p>
             <a:pPr lvl="1"/>
             <a:r>
-              <a:rPr lang="en-US" smtClean="0"/>
+              <a:rPr lang="en-US"/>
               <a:t>Second level</a:t>
             </a:r>
           </a:p>
           <a:p>
             <a:pPr lvl="2"/>
             <a:r>
-              <a:rPr lang="en-US" smtClean="0"/>
+              <a:rPr lang="en-US"/>
               <a:t>Third level</a:t>
             </a:r>
           </a:p>
           <a:p>
             <a:pPr lvl="3"/>
             <a:r>
-              <a:rPr lang="en-US" smtClean="0"/>
+              <a:rPr lang="en-US"/>
               <a:t>Fourth level</a:t>
             </a:r>
           </a:p>
           <a:p>
             <a:pPr lvl="4"/>
             <a:r>
-              <a:rPr lang="en-US" smtClean="0"/>
+              <a:rPr lang="en-US"/>
               <a:t>Fifth level</a:t>
             </a:r>
-            <a:endParaRPr lang="en-US"/>
           </a:p>
         </p:txBody>
       </p:sp>
@@ -2240,7 +2238,7 @@
           <a:p>
             <a:pPr lvl="0"/>
             <a:r>
-              <a:rPr lang="en-US" smtClean="0"/>
+              <a:rPr lang="en-US"/>
               <a:t>Click to edit Master text styles</a:t>
             </a:r>
           </a:p>
@@ -2264,7 +2262,7 @@
             <a:fld id="{1D8BD707-D9CF-40AE-B4C6-C98DA3205C09}" type="datetimeFigureOut">
               <a:rPr lang="en-US" smtClean="0"/>
               <a:pPr/>
-              <a:t>8/1/2011</a:t>
+              <a:t>3/17/2026</a:t>
             </a:fld>
             <a:endParaRPr lang="en-US"/>
           </a:p>
@@ -2363,10 +2361,9 @@
           </a:lstStyle>
           <a:p>
             <a:r>
-              <a:rPr lang="en-US" smtClean="0"/>
+              <a:rPr lang="en-US"/>
               <a:t>Click to edit Master title style</a:t>
             </a:r>
-            <a:endParaRPr lang="en-US"/>
           </a:p>
         </p:txBody>
       </p:sp>
@@ -2490,7 +2487,7 @@
           <a:p>
             <a:pPr lvl="0"/>
             <a:r>
-              <a:rPr lang="en-US" smtClean="0"/>
+              <a:rPr lang="en-US"/>
               <a:t>Click to edit Master text styles</a:t>
             </a:r>
           </a:p>
@@ -2514,7 +2511,7 @@
             <a:fld id="{1D8BD707-D9CF-40AE-B4C6-C98DA3205C09}" type="datetimeFigureOut">
               <a:rPr lang="en-US" smtClean="0"/>
               <a:pPr/>
-              <a:t>8/1/2011</a:t>
+              <a:t>3/17/2026</a:t>
             </a:fld>
             <a:endParaRPr lang="en-US"/>
           </a:p>
@@ -2619,10 +2616,9 @@
           <a:lstStyle/>
           <a:p>
             <a:r>
-              <a:rPr lang="en-US" smtClean="0"/>
+              <a:rPr lang="en-US"/>
               <a:t>Click to edit Master title style</a:t>
             </a:r>
-            <a:endParaRPr lang="en-US"/>
           </a:p>
         </p:txBody>
       </p:sp>
@@ -2653,38 +2649,37 @@
           <a:p>
             <a:pPr lvl="0"/>
             <a:r>
-              <a:rPr lang="en-US" smtClean="0"/>
+              <a:rPr lang="en-US"/>
               <a:t>Click to edit Master text styles</a:t>
             </a:r>
           </a:p>
           <a:p>
             <a:pPr lvl="1"/>
             <a:r>
-              <a:rPr lang="en-US" smtClean="0"/>
+              <a:rPr lang="en-US"/>
               <a:t>Second level</a:t>
             </a:r>
           </a:p>
           <a:p>
             <a:pPr lvl="2"/>
             <a:r>
-              <a:rPr lang="en-US" smtClean="0"/>
+              <a:rPr lang="en-US"/>
               <a:t>Third level</a:t>
             </a:r>
           </a:p>
           <a:p>
             <a:pPr lvl="3"/>
             <a:r>
-              <a:rPr lang="en-US" smtClean="0"/>
+              <a:rPr lang="en-US"/>
               <a:t>Fourth level</a:t>
             </a:r>
           </a:p>
           <a:p>
             <a:pPr lvl="4"/>
             <a:r>
-              <a:rPr lang="en-US" smtClean="0"/>
+              <a:rPr lang="en-US"/>
               <a:t>Fifth level</a:t>
             </a:r>
-            <a:endParaRPr lang="en-US"/>
           </a:p>
         </p:txBody>
       </p:sp>
@@ -2724,7 +2719,7 @@
             <a:fld id="{1D8BD707-D9CF-40AE-B4C6-C98DA3205C09}" type="datetimeFigureOut">
               <a:rPr lang="en-US" smtClean="0"/>
               <a:pPr/>
-              <a:t>8/1/2011</a:t>
+              <a:t>3/17/2026</a:t>
             </a:fld>
             <a:endParaRPr lang="en-US"/>
           </a:p>
@@ -3079,7 +3074,7 @@
 </file>
 
 <file path=ppt/slides/slide1.xml><?xml version="1.0" encoding="utf-8"?>
-<p:sld xmlns:p="http://schemas.openxmlformats.org/presentationml/2006/main" xmlns:a="http://schemas.openxmlformats.org/drawingml/2006/main" xmlns:r="http://schemas.openxmlformats.org/officeDocument/2006/relationships">
+<p:sld xmlns:a="http://schemas.openxmlformats.org/drawingml/2006/main" xmlns:r="http://schemas.openxmlformats.org/officeDocument/2006/relationships" xmlns:p="http://schemas.openxmlformats.org/presentationml/2006/main">
   <p:cSld>
     <p:spTree>
       <p:nvGrpSpPr>
@@ -3097,12 +3092,12 @@
       </p:grpSpPr>
       <p:sp>
         <p:nvSpPr>
-          <p:cNvPr name="Freeform 2" id="2"/>
+          <p:cNvPr id="2" name="Freeform 2"/>
           <p:cNvSpPr/>
           <p:nvPr/>
         </p:nvSpPr>
         <p:spPr>
-          <a:xfrm flipH="false" flipV="false" rot="-10800000">
+          <a:xfrm rot="-10800000">
             <a:off x="0" y="0"/>
             <a:ext cx="18288000" cy="10287000"/>
           </a:xfrm>
@@ -3111,9 +3106,9 @@
             <a:gdLst/>
             <a:ahLst/>
             <a:cxnLst/>
-            <a:rect r="r" b="b" t="t" l="l"/>
+            <a:rect l="l" t="t" r="r" b="b"/>
             <a:pathLst>
-              <a:path h="10287000" w="18288000">
+              <a:path w="18288000" h="10287000">
                 <a:moveTo>
                   <a:pt x="0" y="0"/>
                 </a:moveTo>
@@ -3136,19 +3131,19 @@
           <a:blipFill>
             <a:blip r:embed="rId2"/>
             <a:stretch>
-              <a:fillRect l="-116" t="0" r="-116" b="-232"/>
+              <a:fillRect l="-116" r="-116" b="-232"/>
             </a:stretch>
           </a:blipFill>
         </p:spPr>
       </p:sp>
       <p:grpSp>
         <p:nvGrpSpPr>
-          <p:cNvPr name="Group 3" id="3"/>
+          <p:cNvPr id="3" name="Group 3"/>
           <p:cNvGrpSpPr/>
           <p:nvPr/>
         </p:nvGrpSpPr>
         <p:grpSpPr>
-          <a:xfrm rot="0">
+          <a:xfrm>
             <a:off x="0" y="0"/>
             <a:ext cx="18288000" cy="10287000"/>
             <a:chOff x="0" y="0"/>
@@ -3157,12 +3152,12 @@
         </p:grpSpPr>
         <p:sp>
           <p:nvSpPr>
-            <p:cNvPr name="Freeform 4" id="4"/>
+            <p:cNvPr id="4" name="Freeform 4"/>
             <p:cNvSpPr/>
             <p:nvPr/>
           </p:nvSpPr>
           <p:spPr>
-            <a:xfrm flipH="false" flipV="false" rot="0">
+            <a:xfrm>
               <a:off x="0" y="0"/>
               <a:ext cx="4816592" cy="2709333"/>
             </a:xfrm>
@@ -3171,9 +3166,9 @@
               <a:gdLst/>
               <a:ahLst/>
               <a:cxnLst/>
-              <a:rect r="r" b="b" t="t" l="l"/>
+              <a:rect l="l" t="t" r="r" b="b"/>
               <a:pathLst>
-                <a:path h="2709333" w="4816592">
+                <a:path w="4816592" h="2709333">
                   <a:moveTo>
                     <a:pt x="0" y="0"/>
                   </a:moveTo>
@@ -3199,8 +3194,8 @@
         </p:sp>
         <p:sp>
           <p:nvSpPr>
-            <p:cNvPr name="TextBox 5" id="5"/>
-            <p:cNvSpPr txBox="true"/>
+            <p:cNvPr id="5" name="TextBox 5"/>
+            <p:cNvSpPr txBox="1"/>
             <p:nvPr/>
           </p:nvSpPr>
           <p:spPr>
@@ -3213,7 +3208,7 @@
             </a:prstGeom>
           </p:spPr>
           <p:txBody>
-            <a:bodyPr anchor="ctr" rtlCol="false" tIns="50800" lIns="50800" bIns="50800" rIns="50800"/>
+            <a:bodyPr lIns="50800" tIns="50800" rIns="50800" bIns="50800" rtlCol="0" anchor="ctr"/>
             <a:lstStyle/>
             <a:p>
               <a:pPr algn="ctr">
@@ -3221,18 +3216,19 @@
                   <a:spcPts val="2659"/>
                 </a:lnSpc>
               </a:pPr>
+              <a:endParaRPr/>
             </a:p>
           </p:txBody>
         </p:sp>
       </p:grpSp>
       <p:grpSp>
         <p:nvGrpSpPr>
-          <p:cNvPr name="Group 6" id="6"/>
+          <p:cNvPr id="6" name="Group 6"/>
           <p:cNvGrpSpPr/>
           <p:nvPr/>
         </p:nvGrpSpPr>
         <p:grpSpPr>
-          <a:xfrm rot="0">
+          <a:xfrm>
             <a:off x="0" y="9612716"/>
             <a:ext cx="18288000" cy="674284"/>
             <a:chOff x="0" y="0"/>
@@ -3241,12 +3237,12 @@
         </p:grpSpPr>
         <p:sp>
           <p:nvSpPr>
-            <p:cNvPr name="Freeform 7" id="7"/>
+            <p:cNvPr id="7" name="Freeform 7"/>
             <p:cNvSpPr/>
             <p:nvPr/>
           </p:nvSpPr>
           <p:spPr>
-            <a:xfrm flipH="false" flipV="false" rot="0">
+            <a:xfrm>
               <a:off x="0" y="0"/>
               <a:ext cx="4816592" cy="177589"/>
             </a:xfrm>
@@ -3255,9 +3251,9 @@
               <a:gdLst/>
               <a:ahLst/>
               <a:cxnLst/>
-              <a:rect r="r" b="b" t="t" l="l"/>
+              <a:rect l="l" t="t" r="r" b="b"/>
               <a:pathLst>
-                <a:path h="177589" w="4816592">
+                <a:path w="4816592" h="177589">
                   <a:moveTo>
                     <a:pt x="0" y="0"/>
                   </a:moveTo>
@@ -3283,8 +3279,8 @@
         </p:sp>
         <p:sp>
           <p:nvSpPr>
-            <p:cNvPr name="TextBox 8" id="8"/>
-            <p:cNvSpPr txBox="true"/>
+            <p:cNvPr id="8" name="TextBox 8"/>
+            <p:cNvSpPr txBox="1"/>
             <p:nvPr/>
           </p:nvSpPr>
           <p:spPr>
@@ -3297,7 +3293,7 @@
             </a:prstGeom>
           </p:spPr>
           <p:txBody>
-            <a:bodyPr anchor="ctr" rtlCol="false" tIns="50800" lIns="50800" bIns="50800" rIns="50800"/>
+            <a:bodyPr lIns="50800" tIns="50800" rIns="50800" bIns="50800" rtlCol="0" anchor="ctr"/>
             <a:lstStyle/>
             <a:p>
               <a:pPr algn="ctr">
@@ -3305,18 +3301,19 @@
                   <a:spcPts val="2659"/>
                 </a:lnSpc>
               </a:pPr>
+              <a:endParaRPr/>
             </a:p>
           </p:txBody>
         </p:sp>
       </p:grpSp>
       <p:grpSp>
         <p:nvGrpSpPr>
-          <p:cNvPr name="Group 9" id="9"/>
+          <p:cNvPr id="9" name="Group 9"/>
           <p:cNvGrpSpPr/>
           <p:nvPr/>
         </p:nvGrpSpPr>
         <p:grpSpPr>
-          <a:xfrm rot="0">
+          <a:xfrm>
             <a:off x="0" y="0"/>
             <a:ext cx="18288000" cy="1387754"/>
             <a:chOff x="0" y="0"/>
@@ -3325,12 +3322,12 @@
         </p:grpSpPr>
         <p:sp>
           <p:nvSpPr>
-            <p:cNvPr name="Freeform 10" id="10"/>
+            <p:cNvPr id="10" name="Freeform 10"/>
             <p:cNvSpPr/>
             <p:nvPr/>
           </p:nvSpPr>
           <p:spPr>
-            <a:xfrm flipH="false" flipV="false" rot="0">
+            <a:xfrm>
               <a:off x="0" y="0"/>
               <a:ext cx="4816592" cy="365499"/>
             </a:xfrm>
@@ -3339,9 +3336,9 @@
               <a:gdLst/>
               <a:ahLst/>
               <a:cxnLst/>
-              <a:rect r="r" b="b" t="t" l="l"/>
+              <a:rect l="l" t="t" r="r" b="b"/>
               <a:pathLst>
-                <a:path h="365499" w="4816592">
+                <a:path w="4816592" h="365499">
                   <a:moveTo>
                     <a:pt x="0" y="0"/>
                   </a:moveTo>
@@ -3376,8 +3373,8 @@
         </p:sp>
         <p:sp>
           <p:nvSpPr>
-            <p:cNvPr name="TextBox 11" id="11"/>
-            <p:cNvSpPr txBox="true"/>
+            <p:cNvPr id="11" name="TextBox 11"/>
+            <p:cNvSpPr txBox="1"/>
             <p:nvPr/>
           </p:nvSpPr>
           <p:spPr>
@@ -3390,7 +3387,7 @@
             </a:prstGeom>
           </p:spPr>
           <p:txBody>
-            <a:bodyPr anchor="ctr" rtlCol="false" tIns="50800" lIns="50800" bIns="50800" rIns="50800"/>
+            <a:bodyPr lIns="50800" tIns="50800" rIns="50800" bIns="50800" rtlCol="0" anchor="ctr"/>
             <a:lstStyle/>
             <a:p>
               <a:pPr algn="ctr">
@@ -3398,18 +3395,19 @@
                   <a:spcPts val="2659"/>
                 </a:lnSpc>
               </a:pPr>
+              <a:endParaRPr/>
             </a:p>
           </p:txBody>
         </p:sp>
       </p:grpSp>
       <p:sp>
         <p:nvSpPr>
-          <p:cNvPr name="TextBox 12" id="12"/>
-          <p:cNvSpPr txBox="true"/>
+          <p:cNvPr id="12" name="TextBox 12"/>
+          <p:cNvSpPr txBox="1"/>
           <p:nvPr/>
         </p:nvSpPr>
         <p:spPr>
-          <a:xfrm rot="0">
+          <a:xfrm>
             <a:off x="1591372" y="3399178"/>
             <a:ext cx="3463523" cy="5151476"/>
           </a:xfrm>
@@ -3418,7 +3416,7 @@
           </a:prstGeom>
         </p:spPr>
         <p:txBody>
-          <a:bodyPr anchor="t" rtlCol="false" tIns="0" lIns="0" bIns="0" rIns="0">
+          <a:bodyPr lIns="0" tIns="0" rIns="0" bIns="0" rtlCol="0" anchor="t">
             <a:spAutoFit/>
           </a:bodyPr>
           <a:lstStyle/>
@@ -3453,6 +3451,15 @@
                 <a:spcPct val="0"/>
               </a:spcBef>
             </a:pPr>
+            <a:endParaRPr lang="en-US" sz="3253">
+              <a:solidFill>
+                <a:srgbClr val="FFDE59"/>
+              </a:solidFill>
+              <a:latin typeface="Gagalin"/>
+              <a:ea typeface="Gagalin"/>
+              <a:cs typeface="Gagalin"/>
+              <a:sym typeface="Gagalin"/>
+            </a:endParaRPr>
           </a:p>
           <a:p>
             <a:pPr algn="ctr">
@@ -3485,6 +3492,15 @@
                 <a:spcPct val="0"/>
               </a:spcBef>
             </a:pPr>
+            <a:endParaRPr lang="en-US" sz="3253">
+              <a:solidFill>
+                <a:srgbClr val="FFDE59"/>
+              </a:solidFill>
+              <a:latin typeface="Gagalin"/>
+              <a:ea typeface="Gagalin"/>
+              <a:cs typeface="Gagalin"/>
+              <a:sym typeface="Gagalin"/>
+            </a:endParaRPr>
           </a:p>
           <a:p>
             <a:pPr algn="ctr">
@@ -3517,6 +3533,15 @@
                 <a:spcPct val="0"/>
               </a:spcBef>
             </a:pPr>
+            <a:endParaRPr lang="en-US" sz="3253">
+              <a:solidFill>
+                <a:srgbClr val="FFDE59"/>
+              </a:solidFill>
+              <a:latin typeface="Gagalin"/>
+              <a:ea typeface="Gagalin"/>
+              <a:cs typeface="Gagalin"/>
+              <a:sym typeface="Gagalin"/>
+            </a:endParaRPr>
           </a:p>
           <a:p>
             <a:pPr algn="ctr">
@@ -3549,6 +3574,15 @@
                 <a:spcPct val="0"/>
               </a:spcBef>
             </a:pPr>
+            <a:endParaRPr lang="en-US" sz="3253">
+              <a:solidFill>
+                <a:srgbClr val="FFDE59"/>
+              </a:solidFill>
+              <a:latin typeface="Gagalin"/>
+              <a:ea typeface="Gagalin"/>
+              <a:cs typeface="Gagalin"/>
+              <a:sym typeface="Gagalin"/>
+            </a:endParaRPr>
           </a:p>
           <a:p>
             <a:pPr algn="ctr">
@@ -3576,12 +3610,12 @@
       </p:sp>
       <p:sp>
         <p:nvSpPr>
-          <p:cNvPr name="TextBox 13" id="13"/>
-          <p:cNvSpPr txBox="true"/>
+          <p:cNvPr id="13" name="TextBox 13"/>
+          <p:cNvSpPr txBox="1"/>
           <p:nvPr/>
         </p:nvSpPr>
         <p:spPr>
-          <a:xfrm rot="0">
+          <a:xfrm>
             <a:off x="17834561" y="9660062"/>
             <a:ext cx="110133" cy="580390"/>
           </a:xfrm>
@@ -3590,7 +3624,7 @@
           </a:prstGeom>
         </p:spPr>
         <p:txBody>
-          <a:bodyPr anchor="t" rtlCol="false" tIns="0" lIns="0" bIns="0" rIns="0">
+          <a:bodyPr lIns="0" tIns="0" rIns="0" bIns="0" rtlCol="0" anchor="t">
             <a:spAutoFit/>
           </a:bodyPr>
           <a:lstStyle/>
@@ -3620,12 +3654,12 @@
       </p:sp>
       <p:sp>
         <p:nvSpPr>
-          <p:cNvPr name="Freeform 14" id="14"/>
+          <p:cNvPr id="14" name="Freeform 14"/>
           <p:cNvSpPr/>
           <p:nvPr/>
         </p:nvSpPr>
         <p:spPr>
-          <a:xfrm flipH="false" flipV="false" rot="0">
+          <a:xfrm>
             <a:off x="230308" y="179485"/>
             <a:ext cx="3140115" cy="1083728"/>
           </a:xfrm>
@@ -3634,9 +3668,9 @@
             <a:gdLst/>
             <a:ahLst/>
             <a:cxnLst/>
-            <a:rect r="r" b="b" t="t" l="l"/>
+            <a:rect l="l" t="t" r="r" b="b"/>
             <a:pathLst>
-              <a:path h="1083728" w="3140115">
+              <a:path w="3140115" h="1083728">
                 <a:moveTo>
                   <a:pt x="0" y="0"/>
                 </a:moveTo>
@@ -3659,19 +3693,19 @@
           <a:blipFill>
             <a:blip r:embed="rId3"/>
             <a:stretch>
-              <a:fillRect l="0" t="0" r="-17991" b="0"/>
+              <a:fillRect r="-17991"/>
             </a:stretch>
           </a:blipFill>
         </p:spPr>
       </p:sp>
       <p:grpSp>
         <p:nvGrpSpPr>
-          <p:cNvPr name="Group 15" id="15"/>
+          <p:cNvPr id="15" name="Group 15"/>
           <p:cNvGrpSpPr/>
           <p:nvPr/>
         </p:nvGrpSpPr>
         <p:grpSpPr>
-          <a:xfrm rot="0">
+          <a:xfrm>
             <a:off x="15042849" y="334869"/>
             <a:ext cx="2744013" cy="745256"/>
             <a:chOff x="0" y="0"/>
@@ -3680,12 +3714,12 @@
         </p:grpSpPr>
         <p:sp>
           <p:nvSpPr>
-            <p:cNvPr name="Freeform 16" id="16"/>
+            <p:cNvPr id="16" name="Freeform 16"/>
             <p:cNvSpPr/>
             <p:nvPr/>
           </p:nvSpPr>
           <p:spPr>
-            <a:xfrm flipH="false" flipV="false" rot="0">
+            <a:xfrm>
               <a:off x="0" y="0"/>
               <a:ext cx="832935" cy="993675"/>
             </a:xfrm>
@@ -3694,9 +3728,9 @@
               <a:gdLst/>
               <a:ahLst/>
               <a:cxnLst/>
-              <a:rect r="r" b="b" t="t" l="l"/>
+              <a:rect l="l" t="t" r="r" b="b"/>
               <a:pathLst>
-                <a:path h="993675" w="832935">
+                <a:path w="832935" h="993675">
                   <a:moveTo>
                     <a:pt x="0" y="0"/>
                   </a:moveTo>
@@ -3726,12 +3760,12 @@
         </p:sp>
         <p:sp>
           <p:nvSpPr>
-            <p:cNvPr name="TextBox 17" id="17"/>
-            <p:cNvSpPr txBox="true"/>
+            <p:cNvPr id="17" name="TextBox 17"/>
+            <p:cNvSpPr txBox="1"/>
             <p:nvPr/>
           </p:nvSpPr>
           <p:spPr>
-            <a:xfrm rot="0">
+            <a:xfrm>
               <a:off x="946119" y="144465"/>
               <a:ext cx="2356744" cy="562598"/>
             </a:xfrm>
@@ -3740,7 +3774,7 @@
             </a:prstGeom>
           </p:spPr>
           <p:txBody>
-            <a:bodyPr anchor="t" rtlCol="false" tIns="0" lIns="0" bIns="0" rIns="0">
+            <a:bodyPr lIns="0" tIns="0" rIns="0" bIns="0" rtlCol="0" anchor="t">
               <a:spAutoFit/>
             </a:bodyPr>
             <a:lstStyle/>
@@ -3770,12 +3804,12 @@
         </p:sp>
         <p:sp>
           <p:nvSpPr>
-            <p:cNvPr name="TextBox 18" id="18"/>
-            <p:cNvSpPr txBox="true"/>
+            <p:cNvPr id="18" name="TextBox 18"/>
+            <p:cNvSpPr txBox="1"/>
             <p:nvPr/>
           </p:nvSpPr>
           <p:spPr>
-            <a:xfrm rot="0">
+            <a:xfrm>
               <a:off x="691558" y="676707"/>
               <a:ext cx="2967126" cy="198664"/>
             </a:xfrm>
@@ -3784,7 +3818,7 @@
             </a:prstGeom>
           </p:spPr>
           <p:txBody>
-            <a:bodyPr anchor="t" rtlCol="false" tIns="0" lIns="0" bIns="0" rIns="0">
+            <a:bodyPr lIns="0" tIns="0" rIns="0" bIns="0" rtlCol="0" anchor="t">
               <a:spAutoFit/>
             </a:bodyPr>
             <a:lstStyle/>
@@ -3815,12 +3849,12 @@
       </p:grpSp>
       <p:sp>
         <p:nvSpPr>
-          <p:cNvPr name="TextBox 19" id="19"/>
-          <p:cNvSpPr txBox="true"/>
+          <p:cNvPr id="19" name="TextBox 19"/>
+          <p:cNvSpPr txBox="1"/>
           <p:nvPr/>
         </p:nvSpPr>
         <p:spPr>
-          <a:xfrm rot="0">
+          <a:xfrm>
             <a:off x="7493374" y="9832687"/>
             <a:ext cx="3083970" cy="273240"/>
           </a:xfrm>
@@ -3829,7 +3863,7 @@
           </a:prstGeom>
         </p:spPr>
         <p:txBody>
-          <a:bodyPr anchor="t" rtlCol="false" tIns="0" lIns="0" bIns="0" rIns="0">
+          <a:bodyPr lIns="0" tIns="0" rIns="0" bIns="0" rtlCol="0" anchor="t">
             <a:spAutoFit/>
           </a:bodyPr>
           <a:lstStyle/>
@@ -3859,12 +3893,12 @@
       </p:sp>
       <p:grpSp>
         <p:nvGrpSpPr>
-          <p:cNvPr name="Group 20" id="20"/>
+          <p:cNvPr id="20" name="Group 20"/>
           <p:cNvGrpSpPr/>
           <p:nvPr/>
         </p:nvGrpSpPr>
         <p:grpSpPr>
-          <a:xfrm rot="0">
+          <a:xfrm>
             <a:off x="7397943" y="165633"/>
             <a:ext cx="3274833" cy="1083728"/>
             <a:chOff x="0" y="0"/>
@@ -3873,12 +3907,12 @@
         </p:grpSpPr>
         <p:sp>
           <p:nvSpPr>
-            <p:cNvPr name="TextBox 21" id="21"/>
-            <p:cNvSpPr txBox="true"/>
+            <p:cNvPr id="21" name="TextBox 21"/>
+            <p:cNvSpPr txBox="1"/>
             <p:nvPr/>
           </p:nvSpPr>
           <p:spPr>
-            <a:xfrm rot="0">
+            <a:xfrm>
               <a:off x="0" y="-142875"/>
               <a:ext cx="3820161" cy="1523444"/>
             </a:xfrm>
@@ -3887,7 +3921,7 @@
             </a:prstGeom>
           </p:spPr>
           <p:txBody>
-            <a:bodyPr anchor="t" rtlCol="false" tIns="0" lIns="0" bIns="0" rIns="0">
+            <a:bodyPr lIns="0" tIns="0" rIns="0" bIns="0" rtlCol="0" anchor="t">
               <a:spAutoFit/>
             </a:bodyPr>
             <a:lstStyle/>
@@ -3917,12 +3951,12 @@
         </p:sp>
         <p:sp>
           <p:nvSpPr>
-            <p:cNvPr name="TextBox 22" id="22"/>
-            <p:cNvSpPr txBox="true"/>
+            <p:cNvPr id="22" name="TextBox 22"/>
+            <p:cNvSpPr txBox="1"/>
             <p:nvPr/>
           </p:nvSpPr>
           <p:spPr>
-            <a:xfrm rot="0">
+            <a:xfrm>
               <a:off x="68219" y="-78472"/>
               <a:ext cx="3820161" cy="1523444"/>
             </a:xfrm>
@@ -3931,7 +3965,7 @@
             </a:prstGeom>
           </p:spPr>
           <p:txBody>
-            <a:bodyPr anchor="t" rtlCol="false" tIns="0" lIns="0" bIns="0" rIns="0">
+            <a:bodyPr lIns="0" tIns="0" rIns="0" bIns="0" rtlCol="0" anchor="t">
               <a:spAutoFit/>
             </a:bodyPr>
             <a:lstStyle/>
@@ -3961,12 +3995,12 @@
         </p:sp>
         <p:sp>
           <p:nvSpPr>
-            <p:cNvPr name="TextBox 23" id="23"/>
-            <p:cNvSpPr txBox="true"/>
+            <p:cNvPr id="23" name="TextBox 23"/>
+            <p:cNvSpPr txBox="1"/>
             <p:nvPr/>
           </p:nvSpPr>
           <p:spPr>
-            <a:xfrm rot="0">
+            <a:xfrm>
               <a:off x="33321" y="-106547"/>
               <a:ext cx="3820161" cy="1523444"/>
             </a:xfrm>
@@ -3975,7 +4009,7 @@
             </a:prstGeom>
           </p:spPr>
           <p:txBody>
-            <a:bodyPr anchor="t" rtlCol="false" tIns="0" lIns="0" bIns="0" rIns="0">
+            <a:bodyPr lIns="0" tIns="0" rIns="0" bIns="0" rtlCol="0" anchor="t">
               <a:spAutoFit/>
             </a:bodyPr>
             <a:lstStyle/>
@@ -4005,12 +4039,12 @@
         </p:sp>
         <p:sp>
           <p:nvSpPr>
-            <p:cNvPr name="TextBox 24" id="24"/>
-            <p:cNvSpPr txBox="true"/>
+            <p:cNvPr id="24" name="TextBox 24"/>
+            <p:cNvSpPr txBox="1"/>
             <p:nvPr/>
           </p:nvSpPr>
           <p:spPr>
-            <a:xfrm rot="0">
+            <a:xfrm>
               <a:off x="3340520" y="415474"/>
               <a:ext cx="1025923" cy="965094"/>
             </a:xfrm>
@@ -4019,7 +4053,7 @@
             </a:prstGeom>
           </p:spPr>
           <p:txBody>
-            <a:bodyPr anchor="t" rtlCol="false" tIns="0" lIns="0" bIns="0" rIns="0">
+            <a:bodyPr lIns="0" tIns="0" rIns="0" bIns="0" rtlCol="0" anchor="t">
               <a:spAutoFit/>
             </a:bodyPr>
             <a:lstStyle/>
@@ -4057,7 +4091,7 @@
 </file>
 
 <file path=ppt/slides/slide2.xml><?xml version="1.0" encoding="utf-8"?>
-<p:sld xmlns:p="http://schemas.openxmlformats.org/presentationml/2006/main" xmlns:a="http://schemas.openxmlformats.org/drawingml/2006/main" xmlns:r="http://schemas.openxmlformats.org/officeDocument/2006/relationships">
+<p:sld xmlns:a="http://schemas.openxmlformats.org/drawingml/2006/main" xmlns:r="http://schemas.openxmlformats.org/officeDocument/2006/relationships" xmlns:p="http://schemas.openxmlformats.org/presentationml/2006/main">
   <p:cSld>
     <p:spTree>
       <p:nvGrpSpPr>
@@ -4075,12 +4109,12 @@
       </p:grpSpPr>
       <p:sp>
         <p:nvSpPr>
-          <p:cNvPr name="Freeform 2" id="2"/>
+          <p:cNvPr id="2" name="Freeform 2"/>
           <p:cNvSpPr/>
           <p:nvPr/>
         </p:nvSpPr>
         <p:spPr>
-          <a:xfrm flipH="false" flipV="false" rot="-10800000">
+          <a:xfrm rot="-10800000">
             <a:off x="0" y="0"/>
             <a:ext cx="18288000" cy="10287000"/>
           </a:xfrm>
@@ -4089,9 +4123,9 @@
             <a:gdLst/>
             <a:ahLst/>
             <a:cxnLst/>
-            <a:rect r="r" b="b" t="t" l="l"/>
+            <a:rect l="l" t="t" r="r" b="b"/>
             <a:pathLst>
-              <a:path h="10287000" w="18288000">
+              <a:path w="18288000" h="10287000">
                 <a:moveTo>
                   <a:pt x="0" y="0"/>
                 </a:moveTo>
@@ -4114,19 +4148,19 @@
           <a:blipFill>
             <a:blip r:embed="rId2"/>
             <a:stretch>
-              <a:fillRect l="-116" t="0" r="-116" b="-232"/>
+              <a:fillRect l="-116" r="-116" b="-232"/>
             </a:stretch>
           </a:blipFill>
         </p:spPr>
       </p:sp>
       <p:grpSp>
         <p:nvGrpSpPr>
-          <p:cNvPr name="Group 3" id="3"/>
+          <p:cNvPr id="3" name="Group 3"/>
           <p:cNvGrpSpPr/>
           <p:nvPr/>
         </p:nvGrpSpPr>
         <p:grpSpPr>
-          <a:xfrm rot="0">
+          <a:xfrm>
             <a:off x="0" y="0"/>
             <a:ext cx="18288000" cy="10287000"/>
             <a:chOff x="0" y="0"/>
@@ -4135,12 +4169,12 @@
         </p:grpSpPr>
         <p:sp>
           <p:nvSpPr>
-            <p:cNvPr name="Freeform 4" id="4"/>
+            <p:cNvPr id="4" name="Freeform 4"/>
             <p:cNvSpPr/>
             <p:nvPr/>
           </p:nvSpPr>
           <p:spPr>
-            <a:xfrm flipH="false" flipV="false" rot="0">
+            <a:xfrm>
               <a:off x="0" y="0"/>
               <a:ext cx="4816592" cy="2709333"/>
             </a:xfrm>
@@ -4149,9 +4183,9 @@
               <a:gdLst/>
               <a:ahLst/>
               <a:cxnLst/>
-              <a:rect r="r" b="b" t="t" l="l"/>
+              <a:rect l="l" t="t" r="r" b="b"/>
               <a:pathLst>
-                <a:path h="2709333" w="4816592">
+                <a:path w="4816592" h="2709333">
                   <a:moveTo>
                     <a:pt x="0" y="0"/>
                   </a:moveTo>
@@ -4177,8 +4211,8 @@
         </p:sp>
         <p:sp>
           <p:nvSpPr>
-            <p:cNvPr name="TextBox 5" id="5"/>
-            <p:cNvSpPr txBox="true"/>
+            <p:cNvPr id="5" name="TextBox 5"/>
+            <p:cNvSpPr txBox="1"/>
             <p:nvPr/>
           </p:nvSpPr>
           <p:spPr>
@@ -4191,7 +4225,7 @@
             </a:prstGeom>
           </p:spPr>
           <p:txBody>
-            <a:bodyPr anchor="ctr" rtlCol="false" tIns="50800" lIns="50800" bIns="50800" rIns="50800"/>
+            <a:bodyPr lIns="50800" tIns="50800" rIns="50800" bIns="50800" rtlCol="0" anchor="ctr"/>
             <a:lstStyle/>
             <a:p>
               <a:pPr algn="ctr">
@@ -4199,18 +4233,19 @@
                   <a:spcPts val="2659"/>
                 </a:lnSpc>
               </a:pPr>
+              <a:endParaRPr/>
             </a:p>
           </p:txBody>
         </p:sp>
       </p:grpSp>
       <p:grpSp>
         <p:nvGrpSpPr>
-          <p:cNvPr name="Group 6" id="6"/>
+          <p:cNvPr id="6" name="Group 6"/>
           <p:cNvGrpSpPr/>
           <p:nvPr/>
         </p:nvGrpSpPr>
         <p:grpSpPr>
-          <a:xfrm rot="0">
+          <a:xfrm>
             <a:off x="0" y="9612716"/>
             <a:ext cx="18288000" cy="674284"/>
             <a:chOff x="0" y="0"/>
@@ -4219,12 +4254,12 @@
         </p:grpSpPr>
         <p:sp>
           <p:nvSpPr>
-            <p:cNvPr name="Freeform 7" id="7"/>
+            <p:cNvPr id="7" name="Freeform 7"/>
             <p:cNvSpPr/>
             <p:nvPr/>
           </p:nvSpPr>
           <p:spPr>
-            <a:xfrm flipH="false" flipV="false" rot="0">
+            <a:xfrm>
               <a:off x="0" y="0"/>
               <a:ext cx="4816592" cy="177589"/>
             </a:xfrm>
@@ -4233,9 +4268,9 @@
               <a:gdLst/>
               <a:ahLst/>
               <a:cxnLst/>
-              <a:rect r="r" b="b" t="t" l="l"/>
+              <a:rect l="l" t="t" r="r" b="b"/>
               <a:pathLst>
-                <a:path h="177589" w="4816592">
+                <a:path w="4816592" h="177589">
                   <a:moveTo>
                     <a:pt x="0" y="0"/>
                   </a:moveTo>
@@ -4261,8 +4296,8 @@
         </p:sp>
         <p:sp>
           <p:nvSpPr>
-            <p:cNvPr name="TextBox 8" id="8"/>
-            <p:cNvSpPr txBox="true"/>
+            <p:cNvPr id="8" name="TextBox 8"/>
+            <p:cNvSpPr txBox="1"/>
             <p:nvPr/>
           </p:nvSpPr>
           <p:spPr>
@@ -4275,7 +4310,7 @@
             </a:prstGeom>
           </p:spPr>
           <p:txBody>
-            <a:bodyPr anchor="ctr" rtlCol="false" tIns="50800" lIns="50800" bIns="50800" rIns="50800"/>
+            <a:bodyPr lIns="50800" tIns="50800" rIns="50800" bIns="50800" rtlCol="0" anchor="ctr"/>
             <a:lstStyle/>
             <a:p>
               <a:pPr algn="ctr">
@@ -4283,18 +4318,19 @@
                   <a:spcPts val="2659"/>
                 </a:lnSpc>
               </a:pPr>
+              <a:endParaRPr/>
             </a:p>
           </p:txBody>
         </p:sp>
       </p:grpSp>
       <p:grpSp>
         <p:nvGrpSpPr>
-          <p:cNvPr name="Group 9" id="9"/>
+          <p:cNvPr id="9" name="Group 9"/>
           <p:cNvGrpSpPr/>
           <p:nvPr/>
         </p:nvGrpSpPr>
         <p:grpSpPr>
-          <a:xfrm rot="0">
+          <a:xfrm>
             <a:off x="0" y="0"/>
             <a:ext cx="18288000" cy="1387754"/>
             <a:chOff x="0" y="0"/>
@@ -4303,12 +4339,12 @@
         </p:grpSpPr>
         <p:sp>
           <p:nvSpPr>
-            <p:cNvPr name="Freeform 10" id="10"/>
+            <p:cNvPr id="10" name="Freeform 10"/>
             <p:cNvSpPr/>
             <p:nvPr/>
           </p:nvSpPr>
           <p:spPr>
-            <a:xfrm flipH="false" flipV="false" rot="0">
+            <a:xfrm>
               <a:off x="0" y="0"/>
               <a:ext cx="4816592" cy="365499"/>
             </a:xfrm>
@@ -4317,9 +4353,9 @@
               <a:gdLst/>
               <a:ahLst/>
               <a:cxnLst/>
-              <a:rect r="r" b="b" t="t" l="l"/>
+              <a:rect l="l" t="t" r="r" b="b"/>
               <a:pathLst>
-                <a:path h="365499" w="4816592">
+                <a:path w="4816592" h="365499">
                   <a:moveTo>
                     <a:pt x="0" y="0"/>
                   </a:moveTo>
@@ -4354,8 +4390,8 @@
         </p:sp>
         <p:sp>
           <p:nvSpPr>
-            <p:cNvPr name="TextBox 11" id="11"/>
-            <p:cNvSpPr txBox="true"/>
+            <p:cNvPr id="11" name="TextBox 11"/>
+            <p:cNvSpPr txBox="1"/>
             <p:nvPr/>
           </p:nvSpPr>
           <p:spPr>
@@ -4368,7 +4404,7 @@
             </a:prstGeom>
           </p:spPr>
           <p:txBody>
-            <a:bodyPr anchor="ctr" rtlCol="false" tIns="50800" lIns="50800" bIns="50800" rIns="50800"/>
+            <a:bodyPr lIns="50800" tIns="50800" rIns="50800" bIns="50800" rtlCol="0" anchor="ctr"/>
             <a:lstStyle/>
             <a:p>
               <a:pPr algn="ctr">
@@ -4376,18 +4412,19 @@
                   <a:spcPts val="2659"/>
                 </a:lnSpc>
               </a:pPr>
+              <a:endParaRPr/>
             </a:p>
           </p:txBody>
         </p:sp>
       </p:grpSp>
       <p:sp>
         <p:nvSpPr>
-          <p:cNvPr name="Freeform 12" id="12"/>
+          <p:cNvPr id="12" name="Freeform 12"/>
           <p:cNvSpPr/>
           <p:nvPr/>
         </p:nvSpPr>
         <p:spPr>
-          <a:xfrm flipH="false" flipV="false" rot="0">
+          <a:xfrm>
             <a:off x="230308" y="179485"/>
             <a:ext cx="3140115" cy="1083728"/>
           </a:xfrm>
@@ -4396,9 +4433,9 @@
             <a:gdLst/>
             <a:ahLst/>
             <a:cxnLst/>
-            <a:rect r="r" b="b" t="t" l="l"/>
+            <a:rect l="l" t="t" r="r" b="b"/>
             <a:pathLst>
-              <a:path h="1083728" w="3140115">
+              <a:path w="3140115" h="1083728">
                 <a:moveTo>
                   <a:pt x="0" y="0"/>
                 </a:moveTo>
@@ -4421,19 +4458,19 @@
           <a:blipFill>
             <a:blip r:embed="rId3"/>
             <a:stretch>
-              <a:fillRect l="0" t="0" r="-17991" b="0"/>
+              <a:fillRect r="-17991"/>
             </a:stretch>
           </a:blipFill>
         </p:spPr>
       </p:sp>
       <p:sp>
         <p:nvSpPr>
-          <p:cNvPr name="TextBox 13" id="13"/>
-          <p:cNvSpPr txBox="true"/>
+          <p:cNvPr id="13" name="TextBox 13"/>
+          <p:cNvSpPr txBox="1"/>
           <p:nvPr/>
         </p:nvSpPr>
         <p:spPr>
-          <a:xfrm rot="0">
+          <a:xfrm>
             <a:off x="1616543" y="4752528"/>
             <a:ext cx="6903486" cy="3004105"/>
           </a:xfrm>
@@ -4442,7 +4479,7 @@
           </a:prstGeom>
         </p:spPr>
         <p:txBody>
-          <a:bodyPr anchor="t" rtlCol="false" tIns="0" lIns="0" bIns="0" rIns="0">
+          <a:bodyPr lIns="0" tIns="0" rIns="0" bIns="0" rtlCol="0" anchor="t">
             <a:spAutoFit/>
           </a:bodyPr>
           <a:lstStyle/>
@@ -4465,19 +4502,7 @@
                 <a:cs typeface="Comic Sans"/>
                 <a:sym typeface="Comic Sans"/>
               </a:rPr>
-              <a:t>• Cl</a:t>
-            </a:r>
-            <a:r>
-              <a:rPr lang="en-US" sz="2853">
-                <a:solidFill>
-                  <a:srgbClr val="FFDE59"/>
-                </a:solidFill>
-                <a:latin typeface="Comic Sans"/>
-                <a:ea typeface="Comic Sans"/>
-                <a:cs typeface="Comic Sans"/>
-                <a:sym typeface="Comic Sans"/>
-              </a:rPr>
-              <a:t>early define the problem</a:t>
+              <a:t>• Clearly define the problem</a:t>
             </a:r>
           </a:p>
           <a:p>
@@ -4489,6 +4514,15 @@
                 <a:spcPct val="0"/>
               </a:spcBef>
             </a:pPr>
+            <a:endParaRPr lang="en-US" sz="2853">
+              <a:solidFill>
+                <a:srgbClr val="FFDE59"/>
+              </a:solidFill>
+              <a:latin typeface="Comic Sans"/>
+              <a:ea typeface="Comic Sans"/>
+              <a:cs typeface="Comic Sans"/>
+              <a:sym typeface="Comic Sans"/>
+            </a:endParaRPr>
           </a:p>
           <a:p>
             <a:pPr algn="just">
@@ -4521,6 +4555,15 @@
                 <a:spcPct val="0"/>
               </a:spcBef>
             </a:pPr>
+            <a:endParaRPr lang="en-US" sz="2853">
+              <a:solidFill>
+                <a:srgbClr val="FFDE59"/>
+              </a:solidFill>
+              <a:latin typeface="Comic Sans"/>
+              <a:ea typeface="Comic Sans"/>
+              <a:cs typeface="Comic Sans"/>
+              <a:sym typeface="Comic Sans"/>
+            </a:endParaRPr>
           </a:p>
           <a:p>
             <a:pPr algn="just">
@@ -4553,17 +4596,26 @@
                 <a:spcPct val="0"/>
               </a:spcBef>
             </a:pPr>
+            <a:endParaRPr lang="en-US" sz="2853">
+              <a:solidFill>
+                <a:srgbClr val="FFDE59"/>
+              </a:solidFill>
+              <a:latin typeface="Comic Sans"/>
+              <a:ea typeface="Comic Sans"/>
+              <a:cs typeface="Comic Sans"/>
+              <a:sym typeface="Comic Sans"/>
+            </a:endParaRPr>
           </a:p>
         </p:txBody>
       </p:sp>
       <p:grpSp>
         <p:nvGrpSpPr>
-          <p:cNvPr name="Group 14" id="14"/>
+          <p:cNvPr id="14" name="Group 14"/>
           <p:cNvGrpSpPr/>
           <p:nvPr/>
         </p:nvGrpSpPr>
         <p:grpSpPr>
-          <a:xfrm rot="0">
+          <a:xfrm>
             <a:off x="15042849" y="334869"/>
             <a:ext cx="2744013" cy="745256"/>
             <a:chOff x="0" y="0"/>
@@ -4572,12 +4624,12 @@
         </p:grpSpPr>
         <p:sp>
           <p:nvSpPr>
-            <p:cNvPr name="Freeform 15" id="15"/>
+            <p:cNvPr id="15" name="Freeform 15"/>
             <p:cNvSpPr/>
             <p:nvPr/>
           </p:nvSpPr>
           <p:spPr>
-            <a:xfrm flipH="false" flipV="false" rot="0">
+            <a:xfrm>
               <a:off x="0" y="0"/>
               <a:ext cx="832935" cy="993675"/>
             </a:xfrm>
@@ -4586,9 +4638,9 @@
               <a:gdLst/>
               <a:ahLst/>
               <a:cxnLst/>
-              <a:rect r="r" b="b" t="t" l="l"/>
+              <a:rect l="l" t="t" r="r" b="b"/>
               <a:pathLst>
-                <a:path h="993675" w="832935">
+                <a:path w="832935" h="993675">
                   <a:moveTo>
                     <a:pt x="0" y="0"/>
                   </a:moveTo>
@@ -4618,12 +4670,12 @@
         </p:sp>
         <p:sp>
           <p:nvSpPr>
-            <p:cNvPr name="TextBox 16" id="16"/>
-            <p:cNvSpPr txBox="true"/>
+            <p:cNvPr id="16" name="TextBox 16"/>
+            <p:cNvSpPr txBox="1"/>
             <p:nvPr/>
           </p:nvSpPr>
           <p:spPr>
-            <a:xfrm rot="0">
+            <a:xfrm>
               <a:off x="946119" y="144465"/>
               <a:ext cx="2356744" cy="562598"/>
             </a:xfrm>
@@ -4632,7 +4684,7 @@
             </a:prstGeom>
           </p:spPr>
           <p:txBody>
-            <a:bodyPr anchor="t" rtlCol="false" tIns="0" lIns="0" bIns="0" rIns="0">
+            <a:bodyPr lIns="0" tIns="0" rIns="0" bIns="0" rtlCol="0" anchor="t">
               <a:spAutoFit/>
             </a:bodyPr>
             <a:lstStyle/>
@@ -4662,12 +4714,12 @@
         </p:sp>
         <p:sp>
           <p:nvSpPr>
-            <p:cNvPr name="TextBox 17" id="17"/>
-            <p:cNvSpPr txBox="true"/>
+            <p:cNvPr id="17" name="TextBox 17"/>
+            <p:cNvSpPr txBox="1"/>
             <p:nvPr/>
           </p:nvSpPr>
           <p:spPr>
-            <a:xfrm rot="0">
+            <a:xfrm>
               <a:off x="691558" y="676707"/>
               <a:ext cx="2967126" cy="198664"/>
             </a:xfrm>
@@ -4676,7 +4728,7 @@
             </a:prstGeom>
           </p:spPr>
           <p:txBody>
-            <a:bodyPr anchor="t" rtlCol="false" tIns="0" lIns="0" bIns="0" rIns="0">
+            <a:bodyPr lIns="0" tIns="0" rIns="0" bIns="0" rtlCol="0" anchor="t">
               <a:spAutoFit/>
             </a:bodyPr>
             <a:lstStyle/>
@@ -4707,12 +4759,12 @@
       </p:grpSp>
       <p:sp>
         <p:nvSpPr>
-          <p:cNvPr name="TextBox 18" id="18"/>
-          <p:cNvSpPr txBox="true"/>
+          <p:cNvPr id="18" name="TextBox 18"/>
+          <p:cNvSpPr txBox="1"/>
           <p:nvPr/>
         </p:nvSpPr>
         <p:spPr>
-          <a:xfrm rot="0">
+          <a:xfrm>
             <a:off x="17786862" y="9660062"/>
             <a:ext cx="205532" cy="580390"/>
           </a:xfrm>
@@ -4721,7 +4773,7 @@
           </a:prstGeom>
         </p:spPr>
         <p:txBody>
-          <a:bodyPr anchor="t" rtlCol="false" tIns="0" lIns="0" bIns="0" rIns="0">
+          <a:bodyPr lIns="0" tIns="0" rIns="0" bIns="0" rtlCol="0" anchor="t">
             <a:spAutoFit/>
           </a:bodyPr>
           <a:lstStyle/>
@@ -4751,12 +4803,12 @@
       </p:sp>
       <p:sp>
         <p:nvSpPr>
-          <p:cNvPr name="TextBox 19" id="19"/>
-          <p:cNvSpPr txBox="true"/>
+          <p:cNvPr id="19" name="TextBox 19"/>
+          <p:cNvSpPr txBox="1"/>
           <p:nvPr/>
         </p:nvSpPr>
         <p:spPr>
-          <a:xfrm rot="0">
+          <a:xfrm>
             <a:off x="1616543" y="3811697"/>
             <a:ext cx="5727799" cy="539035"/>
           </a:xfrm>
@@ -4765,7 +4817,7 @@
           </a:prstGeom>
         </p:spPr>
         <p:txBody>
-          <a:bodyPr anchor="t" rtlCol="false" tIns="0" lIns="0" bIns="0" rIns="0">
+          <a:bodyPr lIns="0" tIns="0" rIns="0" bIns="0" rtlCol="0" anchor="t">
             <a:spAutoFit/>
           </a:bodyPr>
           <a:lstStyle/>
@@ -4795,12 +4847,12 @@
       </p:sp>
       <p:sp>
         <p:nvSpPr>
-          <p:cNvPr name="TextBox 20" id="20"/>
-          <p:cNvSpPr txBox="true"/>
+          <p:cNvPr id="20" name="TextBox 20"/>
+          <p:cNvSpPr txBox="1"/>
           <p:nvPr/>
         </p:nvSpPr>
         <p:spPr>
-          <a:xfrm rot="0">
+          <a:xfrm>
             <a:off x="6548949" y="1873057"/>
             <a:ext cx="4509641" cy="697150"/>
           </a:xfrm>
@@ -4809,7 +4861,7 @@
           </a:prstGeom>
         </p:spPr>
         <p:txBody>
-          <a:bodyPr anchor="t" rtlCol="false" tIns="0" lIns="0" bIns="0" rIns="0">
+          <a:bodyPr lIns="0" tIns="0" rIns="0" bIns="0" rtlCol="0" anchor="t">
             <a:spAutoFit/>
           </a:bodyPr>
           <a:lstStyle/>
@@ -4839,12 +4891,12 @@
       </p:sp>
       <p:sp>
         <p:nvSpPr>
-          <p:cNvPr name="TextBox 21" id="21"/>
-          <p:cNvSpPr txBox="true"/>
+          <p:cNvPr id="21" name="TextBox 21"/>
+          <p:cNvSpPr txBox="1"/>
           <p:nvPr/>
         </p:nvSpPr>
         <p:spPr>
-          <a:xfrm rot="0">
+          <a:xfrm>
             <a:off x="7493374" y="9832687"/>
             <a:ext cx="3083970" cy="273240"/>
           </a:xfrm>
@@ -4853,7 +4905,7 @@
           </a:prstGeom>
         </p:spPr>
         <p:txBody>
-          <a:bodyPr anchor="t" rtlCol="false" tIns="0" lIns="0" bIns="0" rIns="0">
+          <a:bodyPr lIns="0" tIns="0" rIns="0" bIns="0" rtlCol="0" anchor="t">
             <a:spAutoFit/>
           </a:bodyPr>
           <a:lstStyle/>
@@ -4883,12 +4935,12 @@
       </p:sp>
       <p:grpSp>
         <p:nvGrpSpPr>
-          <p:cNvPr name="Group 22" id="22"/>
+          <p:cNvPr id="22" name="Group 22"/>
           <p:cNvGrpSpPr/>
           <p:nvPr/>
         </p:nvGrpSpPr>
         <p:grpSpPr>
-          <a:xfrm rot="0">
+          <a:xfrm>
             <a:off x="7397943" y="165633"/>
             <a:ext cx="3274833" cy="1083728"/>
             <a:chOff x="0" y="0"/>
@@ -4897,12 +4949,12 @@
         </p:grpSpPr>
         <p:sp>
           <p:nvSpPr>
-            <p:cNvPr name="TextBox 23" id="23"/>
-            <p:cNvSpPr txBox="true"/>
+            <p:cNvPr id="23" name="TextBox 23"/>
+            <p:cNvSpPr txBox="1"/>
             <p:nvPr/>
           </p:nvSpPr>
           <p:spPr>
-            <a:xfrm rot="0">
+            <a:xfrm>
               <a:off x="0" y="-142875"/>
               <a:ext cx="3820161" cy="1523444"/>
             </a:xfrm>
@@ -4911,7 +4963,7 @@
             </a:prstGeom>
           </p:spPr>
           <p:txBody>
-            <a:bodyPr anchor="t" rtlCol="false" tIns="0" lIns="0" bIns="0" rIns="0">
+            <a:bodyPr lIns="0" tIns="0" rIns="0" bIns="0" rtlCol="0" anchor="t">
               <a:spAutoFit/>
             </a:bodyPr>
             <a:lstStyle/>
@@ -4941,12 +4993,12 @@
         </p:sp>
         <p:sp>
           <p:nvSpPr>
-            <p:cNvPr name="TextBox 24" id="24"/>
-            <p:cNvSpPr txBox="true"/>
+            <p:cNvPr id="24" name="TextBox 24"/>
+            <p:cNvSpPr txBox="1"/>
             <p:nvPr/>
           </p:nvSpPr>
           <p:spPr>
-            <a:xfrm rot="0">
+            <a:xfrm>
               <a:off x="68219" y="-78472"/>
               <a:ext cx="3820161" cy="1523444"/>
             </a:xfrm>
@@ -4955,7 +5007,7 @@
             </a:prstGeom>
           </p:spPr>
           <p:txBody>
-            <a:bodyPr anchor="t" rtlCol="false" tIns="0" lIns="0" bIns="0" rIns="0">
+            <a:bodyPr lIns="0" tIns="0" rIns="0" bIns="0" rtlCol="0" anchor="t">
               <a:spAutoFit/>
             </a:bodyPr>
             <a:lstStyle/>
@@ -4985,12 +5037,12 @@
         </p:sp>
         <p:sp>
           <p:nvSpPr>
-            <p:cNvPr name="TextBox 25" id="25"/>
-            <p:cNvSpPr txBox="true"/>
+            <p:cNvPr id="25" name="TextBox 25"/>
+            <p:cNvSpPr txBox="1"/>
             <p:nvPr/>
           </p:nvSpPr>
           <p:spPr>
-            <a:xfrm rot="0">
+            <a:xfrm>
               <a:off x="33321" y="-106547"/>
               <a:ext cx="3820161" cy="1523444"/>
             </a:xfrm>
@@ -4999,7 +5051,7 @@
             </a:prstGeom>
           </p:spPr>
           <p:txBody>
-            <a:bodyPr anchor="t" rtlCol="false" tIns="0" lIns="0" bIns="0" rIns="0">
+            <a:bodyPr lIns="0" tIns="0" rIns="0" bIns="0" rtlCol="0" anchor="t">
               <a:spAutoFit/>
             </a:bodyPr>
             <a:lstStyle/>
@@ -5029,12 +5081,12 @@
         </p:sp>
         <p:sp>
           <p:nvSpPr>
-            <p:cNvPr name="TextBox 26" id="26"/>
-            <p:cNvSpPr txBox="true"/>
+            <p:cNvPr id="26" name="TextBox 26"/>
+            <p:cNvSpPr txBox="1"/>
             <p:nvPr/>
           </p:nvSpPr>
           <p:spPr>
-            <a:xfrm rot="0">
+            <a:xfrm>
               <a:off x="3340520" y="415474"/>
               <a:ext cx="1025923" cy="965094"/>
             </a:xfrm>
@@ -5043,7 +5095,7 @@
             </a:prstGeom>
           </p:spPr>
           <p:txBody>
-            <a:bodyPr anchor="t" rtlCol="false" tIns="0" lIns="0" bIns="0" rIns="0">
+            <a:bodyPr lIns="0" tIns="0" rIns="0" bIns="0" rtlCol="0" anchor="t">
               <a:spAutoFit/>
             </a:bodyPr>
             <a:lstStyle/>
@@ -5081,7 +5133,7 @@
 </file>
 
 <file path=ppt/slides/slide3.xml><?xml version="1.0" encoding="utf-8"?>
-<p:sld xmlns:p="http://schemas.openxmlformats.org/presentationml/2006/main" xmlns:a="http://schemas.openxmlformats.org/drawingml/2006/main" xmlns:r="http://schemas.openxmlformats.org/officeDocument/2006/relationships">
+<p:sld xmlns:a="http://schemas.openxmlformats.org/drawingml/2006/main" xmlns:r="http://schemas.openxmlformats.org/officeDocument/2006/relationships" xmlns:p="http://schemas.openxmlformats.org/presentationml/2006/main">
   <p:cSld>
     <p:spTree>
       <p:nvGrpSpPr>
@@ -5099,12 +5151,12 @@
       </p:grpSpPr>
       <p:sp>
         <p:nvSpPr>
-          <p:cNvPr name="Freeform 2" id="2"/>
+          <p:cNvPr id="2" name="Freeform 2"/>
           <p:cNvSpPr/>
           <p:nvPr/>
         </p:nvSpPr>
         <p:spPr>
-          <a:xfrm flipH="false" flipV="false" rot="-10800000">
+          <a:xfrm rot="-10800000">
             <a:off x="0" y="0"/>
             <a:ext cx="18288000" cy="10287000"/>
           </a:xfrm>
@@ -5113,9 +5165,9 @@
             <a:gdLst/>
             <a:ahLst/>
             <a:cxnLst/>
-            <a:rect r="r" b="b" t="t" l="l"/>
+            <a:rect l="l" t="t" r="r" b="b"/>
             <a:pathLst>
-              <a:path h="10287000" w="18288000">
+              <a:path w="18288000" h="10287000">
                 <a:moveTo>
                   <a:pt x="0" y="0"/>
                 </a:moveTo>
@@ -5138,19 +5190,19 @@
           <a:blipFill>
             <a:blip r:embed="rId2"/>
             <a:stretch>
-              <a:fillRect l="-116" t="0" r="-116" b="-232"/>
+              <a:fillRect l="-116" r="-116" b="-232"/>
             </a:stretch>
           </a:blipFill>
         </p:spPr>
       </p:sp>
       <p:grpSp>
         <p:nvGrpSpPr>
-          <p:cNvPr name="Group 3" id="3"/>
+          <p:cNvPr id="3" name="Group 3"/>
           <p:cNvGrpSpPr/>
           <p:nvPr/>
         </p:nvGrpSpPr>
         <p:grpSpPr>
-          <a:xfrm rot="0">
+          <a:xfrm>
             <a:off x="0" y="0"/>
             <a:ext cx="18288000" cy="10287000"/>
             <a:chOff x="0" y="0"/>
@@ -5159,12 +5211,12 @@
         </p:grpSpPr>
         <p:sp>
           <p:nvSpPr>
-            <p:cNvPr name="Freeform 4" id="4"/>
+            <p:cNvPr id="4" name="Freeform 4"/>
             <p:cNvSpPr/>
             <p:nvPr/>
           </p:nvSpPr>
           <p:spPr>
-            <a:xfrm flipH="false" flipV="false" rot="0">
+            <a:xfrm>
               <a:off x="0" y="0"/>
               <a:ext cx="4816592" cy="2709333"/>
             </a:xfrm>
@@ -5173,9 +5225,9 @@
               <a:gdLst/>
               <a:ahLst/>
               <a:cxnLst/>
-              <a:rect r="r" b="b" t="t" l="l"/>
+              <a:rect l="l" t="t" r="r" b="b"/>
               <a:pathLst>
-                <a:path h="2709333" w="4816592">
+                <a:path w="4816592" h="2709333">
                   <a:moveTo>
                     <a:pt x="0" y="0"/>
                   </a:moveTo>
@@ -5201,8 +5253,8 @@
         </p:sp>
         <p:sp>
           <p:nvSpPr>
-            <p:cNvPr name="TextBox 5" id="5"/>
-            <p:cNvSpPr txBox="true"/>
+            <p:cNvPr id="5" name="TextBox 5"/>
+            <p:cNvSpPr txBox="1"/>
             <p:nvPr/>
           </p:nvSpPr>
           <p:spPr>
@@ -5215,7 +5267,7 @@
             </a:prstGeom>
           </p:spPr>
           <p:txBody>
-            <a:bodyPr anchor="ctr" rtlCol="false" tIns="50800" lIns="50800" bIns="50800" rIns="50800"/>
+            <a:bodyPr lIns="50800" tIns="50800" rIns="50800" bIns="50800" rtlCol="0" anchor="ctr"/>
             <a:lstStyle/>
             <a:p>
               <a:pPr algn="ctr">
@@ -5223,18 +5275,19 @@
                   <a:spcPts val="2659"/>
                 </a:lnSpc>
               </a:pPr>
+              <a:endParaRPr/>
             </a:p>
           </p:txBody>
         </p:sp>
       </p:grpSp>
       <p:grpSp>
         <p:nvGrpSpPr>
-          <p:cNvPr name="Group 6" id="6"/>
+          <p:cNvPr id="6" name="Group 6"/>
           <p:cNvGrpSpPr/>
           <p:nvPr/>
         </p:nvGrpSpPr>
         <p:grpSpPr>
-          <a:xfrm rot="0">
+          <a:xfrm>
             <a:off x="0" y="9612716"/>
             <a:ext cx="18288000" cy="674284"/>
             <a:chOff x="0" y="0"/>
@@ -5243,12 +5296,12 @@
         </p:grpSpPr>
         <p:sp>
           <p:nvSpPr>
-            <p:cNvPr name="Freeform 7" id="7"/>
+            <p:cNvPr id="7" name="Freeform 7"/>
             <p:cNvSpPr/>
             <p:nvPr/>
           </p:nvSpPr>
           <p:spPr>
-            <a:xfrm flipH="false" flipV="false" rot="0">
+            <a:xfrm>
               <a:off x="0" y="0"/>
               <a:ext cx="4816592" cy="177589"/>
             </a:xfrm>
@@ -5257,9 +5310,9 @@
               <a:gdLst/>
               <a:ahLst/>
               <a:cxnLst/>
-              <a:rect r="r" b="b" t="t" l="l"/>
+              <a:rect l="l" t="t" r="r" b="b"/>
               <a:pathLst>
-                <a:path h="177589" w="4816592">
+                <a:path w="4816592" h="177589">
                   <a:moveTo>
                     <a:pt x="0" y="0"/>
                   </a:moveTo>
@@ -5285,8 +5338,8 @@
         </p:sp>
         <p:sp>
           <p:nvSpPr>
-            <p:cNvPr name="TextBox 8" id="8"/>
-            <p:cNvSpPr txBox="true"/>
+            <p:cNvPr id="8" name="TextBox 8"/>
+            <p:cNvSpPr txBox="1"/>
             <p:nvPr/>
           </p:nvSpPr>
           <p:spPr>
@@ -5299,7 +5352,7 @@
             </a:prstGeom>
           </p:spPr>
           <p:txBody>
-            <a:bodyPr anchor="ctr" rtlCol="false" tIns="50800" lIns="50800" bIns="50800" rIns="50800"/>
+            <a:bodyPr lIns="50800" tIns="50800" rIns="50800" bIns="50800" rtlCol="0" anchor="ctr"/>
             <a:lstStyle/>
             <a:p>
               <a:pPr algn="ctr">
@@ -5307,18 +5360,19 @@
                   <a:spcPts val="2659"/>
                 </a:lnSpc>
               </a:pPr>
+              <a:endParaRPr/>
             </a:p>
           </p:txBody>
         </p:sp>
       </p:grpSp>
       <p:grpSp>
         <p:nvGrpSpPr>
-          <p:cNvPr name="Group 9" id="9"/>
+          <p:cNvPr id="9" name="Group 9"/>
           <p:cNvGrpSpPr/>
           <p:nvPr/>
         </p:nvGrpSpPr>
         <p:grpSpPr>
-          <a:xfrm rot="0">
+          <a:xfrm>
             <a:off x="0" y="0"/>
             <a:ext cx="18288000" cy="1387754"/>
             <a:chOff x="0" y="0"/>
@@ -5327,12 +5381,12 @@
         </p:grpSpPr>
         <p:sp>
           <p:nvSpPr>
-            <p:cNvPr name="Freeform 10" id="10"/>
+            <p:cNvPr id="10" name="Freeform 10"/>
             <p:cNvSpPr/>
             <p:nvPr/>
           </p:nvSpPr>
           <p:spPr>
-            <a:xfrm flipH="false" flipV="false" rot="0">
+            <a:xfrm>
               <a:off x="0" y="0"/>
               <a:ext cx="4816592" cy="365499"/>
             </a:xfrm>
@@ -5341,9 +5395,9 @@
               <a:gdLst/>
               <a:ahLst/>
               <a:cxnLst/>
-              <a:rect r="r" b="b" t="t" l="l"/>
+              <a:rect l="l" t="t" r="r" b="b"/>
               <a:pathLst>
-                <a:path h="365499" w="4816592">
+                <a:path w="4816592" h="365499">
                   <a:moveTo>
                     <a:pt x="0" y="0"/>
                   </a:moveTo>
@@ -5378,8 +5432,8 @@
         </p:sp>
         <p:sp>
           <p:nvSpPr>
-            <p:cNvPr name="TextBox 11" id="11"/>
-            <p:cNvSpPr txBox="true"/>
+            <p:cNvPr id="11" name="TextBox 11"/>
+            <p:cNvSpPr txBox="1"/>
             <p:nvPr/>
           </p:nvSpPr>
           <p:spPr>
@@ -5392,7 +5446,7 @@
             </a:prstGeom>
           </p:spPr>
           <p:txBody>
-            <a:bodyPr anchor="ctr" rtlCol="false" tIns="50800" lIns="50800" bIns="50800" rIns="50800"/>
+            <a:bodyPr lIns="50800" tIns="50800" rIns="50800" bIns="50800" rtlCol="0" anchor="ctr"/>
             <a:lstStyle/>
             <a:p>
               <a:pPr algn="ctr">
@@ -5400,18 +5454,19 @@
                   <a:spcPts val="2659"/>
                 </a:lnSpc>
               </a:pPr>
+              <a:endParaRPr/>
             </a:p>
           </p:txBody>
         </p:sp>
       </p:grpSp>
       <p:sp>
         <p:nvSpPr>
-          <p:cNvPr name="TextBox 12" id="12"/>
-          <p:cNvSpPr txBox="true"/>
+          <p:cNvPr id="12" name="TextBox 12"/>
+          <p:cNvSpPr txBox="1"/>
           <p:nvPr/>
         </p:nvSpPr>
         <p:spPr>
-          <a:xfrm rot="0">
+          <a:xfrm>
             <a:off x="1028700" y="3602402"/>
             <a:ext cx="5906062" cy="1132363"/>
           </a:xfrm>
@@ -5420,7 +5475,7 @@
           </a:prstGeom>
         </p:spPr>
         <p:txBody>
-          <a:bodyPr anchor="t" rtlCol="false" tIns="0" lIns="0" bIns="0" rIns="0">
+          <a:bodyPr lIns="0" tIns="0" rIns="0" bIns="0" rtlCol="0" anchor="t">
             <a:spAutoFit/>
           </a:bodyPr>
           <a:lstStyle/>
@@ -5443,19 +5498,7 @@
                 <a:cs typeface="Gagalin"/>
                 <a:sym typeface="Gagalin"/>
               </a:rPr>
-              <a:t>•</a:t>
-            </a:r>
-            <a:r>
-              <a:rPr lang="en-US" sz="3253">
-                <a:solidFill>
-                  <a:srgbClr val="FFDE59"/>
-                </a:solidFill>
-                <a:latin typeface="Gagalin"/>
-                <a:ea typeface="Gagalin"/>
-                <a:cs typeface="Gagalin"/>
-                <a:sym typeface="Gagalin"/>
-              </a:rPr>
-              <a:t> Brief description of your idea</a:t>
+              <a:t>• Brief description of your idea</a:t>
             </a:r>
           </a:p>
           <a:p>
@@ -5467,17 +5510,26 @@
                 <a:spcPct val="0"/>
               </a:spcBef>
             </a:pPr>
+            <a:endParaRPr lang="en-US" sz="3253">
+              <a:solidFill>
+                <a:srgbClr val="FFDE59"/>
+              </a:solidFill>
+              <a:latin typeface="Gagalin"/>
+              <a:ea typeface="Gagalin"/>
+              <a:cs typeface="Gagalin"/>
+              <a:sym typeface="Gagalin"/>
+            </a:endParaRPr>
           </a:p>
         </p:txBody>
       </p:sp>
       <p:sp>
         <p:nvSpPr>
-          <p:cNvPr name="TextBox 13" id="13"/>
-          <p:cNvSpPr txBox="true"/>
+          <p:cNvPr id="13" name="TextBox 13"/>
+          <p:cNvSpPr txBox="1"/>
           <p:nvPr/>
         </p:nvSpPr>
         <p:spPr>
-          <a:xfrm rot="0">
+          <a:xfrm>
             <a:off x="17789020" y="9660062"/>
             <a:ext cx="201216" cy="580390"/>
           </a:xfrm>
@@ -5486,7 +5538,7 @@
           </a:prstGeom>
         </p:spPr>
         <p:txBody>
-          <a:bodyPr anchor="t" rtlCol="false" tIns="0" lIns="0" bIns="0" rIns="0">
+          <a:bodyPr lIns="0" tIns="0" rIns="0" bIns="0" rtlCol="0" anchor="t">
             <a:spAutoFit/>
           </a:bodyPr>
           <a:lstStyle/>
@@ -5516,12 +5568,12 @@
       </p:sp>
       <p:sp>
         <p:nvSpPr>
-          <p:cNvPr name="TextBox 14" id="14"/>
-          <p:cNvSpPr txBox="true"/>
+          <p:cNvPr id="14" name="TextBox 14"/>
+          <p:cNvSpPr txBox="1"/>
           <p:nvPr/>
         </p:nvSpPr>
         <p:spPr>
-          <a:xfrm rot="0">
+          <a:xfrm>
             <a:off x="4819491" y="1873057"/>
             <a:ext cx="7968555" cy="697150"/>
           </a:xfrm>
@@ -5530,7 +5582,7 @@
           </a:prstGeom>
         </p:spPr>
         <p:txBody>
-          <a:bodyPr anchor="t" rtlCol="false" tIns="0" lIns="0" bIns="0" rIns="0">
+          <a:bodyPr lIns="0" tIns="0" rIns="0" bIns="0" rtlCol="0" anchor="t">
             <a:spAutoFit/>
           </a:bodyPr>
           <a:lstStyle/>
@@ -5560,12 +5612,12 @@
       </p:sp>
       <p:sp>
         <p:nvSpPr>
-          <p:cNvPr name="TextBox 15" id="15"/>
-          <p:cNvSpPr txBox="true"/>
+          <p:cNvPr id="15" name="TextBox 15"/>
+          <p:cNvSpPr txBox="1"/>
           <p:nvPr/>
         </p:nvSpPr>
         <p:spPr>
-          <a:xfrm rot="0">
+          <a:xfrm>
             <a:off x="1028700" y="5542884"/>
             <a:ext cx="7598271" cy="555545"/>
           </a:xfrm>
@@ -5574,7 +5626,7 @@
           </a:prstGeom>
         </p:spPr>
         <p:txBody>
-          <a:bodyPr anchor="t" rtlCol="false" tIns="0" lIns="0" bIns="0" rIns="0">
+          <a:bodyPr lIns="0" tIns="0" rIns="0" bIns="0" rtlCol="0" anchor="t">
             <a:spAutoFit/>
           </a:bodyPr>
           <a:lstStyle/>
@@ -5597,8 +5649,40 @@
                 <a:cs typeface="Gagalin"/>
                 <a:sym typeface="Gagalin"/>
               </a:rPr>
-              <a:t> </a:t>
-            </a:r>
+              <a:t> • How your solution solves the problem</a:t>
+            </a:r>
+          </a:p>
+        </p:txBody>
+      </p:sp>
+      <p:sp>
+        <p:nvSpPr>
+          <p:cNvPr id="16" name="TextBox 16"/>
+          <p:cNvSpPr txBox="1"/>
+          <p:nvPr/>
+        </p:nvSpPr>
+        <p:spPr>
+          <a:xfrm>
+            <a:off x="1028700" y="7460528"/>
+            <a:ext cx="5982146" cy="555545"/>
+          </a:xfrm>
+          <a:prstGeom prst="rect">
+            <a:avLst/>
+          </a:prstGeom>
+        </p:spPr>
+        <p:txBody>
+          <a:bodyPr lIns="0" tIns="0" rIns="0" bIns="0" rtlCol="0" anchor="t">
+            <a:spAutoFit/>
+          </a:bodyPr>
+          <a:lstStyle/>
+          <a:p>
+            <a:pPr algn="ctr">
+              <a:lnSpc>
+                <a:spcPts val="4554"/>
+              </a:lnSpc>
+              <a:spcBef>
+                <a:spcPct val="0"/>
+              </a:spcBef>
+            </a:pPr>
             <a:r>
               <a:rPr lang="en-US" sz="3253">
                 <a:solidFill>
@@ -5609,75 +5693,19 @@
                 <a:cs typeface="Gagalin"/>
                 <a:sym typeface="Gagalin"/>
               </a:rPr>
-              <a:t>• How your solution solves the problem</a:t>
+              <a:t>• Key features of your solution</a:t>
             </a:r>
           </a:p>
         </p:txBody>
       </p:sp>
       <p:sp>
         <p:nvSpPr>
-          <p:cNvPr name="TextBox 16" id="16"/>
-          <p:cNvSpPr txBox="true"/>
-          <p:nvPr/>
-        </p:nvSpPr>
-        <p:spPr>
-          <a:xfrm rot="0">
-            <a:off x="1028700" y="7460528"/>
-            <a:ext cx="5982146" cy="555545"/>
-          </a:xfrm>
-          <a:prstGeom prst="rect">
-            <a:avLst/>
-          </a:prstGeom>
-        </p:spPr>
-        <p:txBody>
-          <a:bodyPr anchor="t" rtlCol="false" tIns="0" lIns="0" bIns="0" rIns="0">
-            <a:spAutoFit/>
-          </a:bodyPr>
-          <a:lstStyle/>
-          <a:p>
-            <a:pPr algn="ctr">
-              <a:lnSpc>
-                <a:spcPts val="4554"/>
-              </a:lnSpc>
-              <a:spcBef>
-                <a:spcPct val="0"/>
-              </a:spcBef>
-            </a:pPr>
-            <a:r>
-              <a:rPr lang="en-US" sz="3253">
-                <a:solidFill>
-                  <a:srgbClr val="FFDE59"/>
-                </a:solidFill>
-                <a:latin typeface="Gagalin"/>
-                <a:ea typeface="Gagalin"/>
-                <a:cs typeface="Gagalin"/>
-                <a:sym typeface="Gagalin"/>
-              </a:rPr>
-              <a:t>• Key features</a:t>
-            </a:r>
-            <a:r>
-              <a:rPr lang="en-US" sz="3253">
-                <a:solidFill>
-                  <a:srgbClr val="FFDE59"/>
-                </a:solidFill>
-                <a:latin typeface="Gagalin"/>
-                <a:ea typeface="Gagalin"/>
-                <a:cs typeface="Gagalin"/>
-                <a:sym typeface="Gagalin"/>
-              </a:rPr>
-              <a:t> of your solution</a:t>
-            </a:r>
-          </a:p>
-        </p:txBody>
-      </p:sp>
-      <p:sp>
-        <p:nvSpPr>
-          <p:cNvPr name="Freeform 17" id="17"/>
+          <p:cNvPr id="17" name="Freeform 17"/>
           <p:cNvSpPr/>
           <p:nvPr/>
         </p:nvSpPr>
         <p:spPr>
-          <a:xfrm flipH="false" flipV="false" rot="0">
+          <a:xfrm>
             <a:off x="230308" y="179485"/>
             <a:ext cx="3140115" cy="1083728"/>
           </a:xfrm>
@@ -5686,9 +5714,9 @@
             <a:gdLst/>
             <a:ahLst/>
             <a:cxnLst/>
-            <a:rect r="r" b="b" t="t" l="l"/>
+            <a:rect l="l" t="t" r="r" b="b"/>
             <a:pathLst>
-              <a:path h="1083728" w="3140115">
+              <a:path w="3140115" h="1083728">
                 <a:moveTo>
                   <a:pt x="0" y="0"/>
                 </a:moveTo>
@@ -5711,19 +5739,19 @@
           <a:blipFill>
             <a:blip r:embed="rId3"/>
             <a:stretch>
-              <a:fillRect l="0" t="0" r="-17991" b="0"/>
+              <a:fillRect r="-17991"/>
             </a:stretch>
           </a:blipFill>
         </p:spPr>
       </p:sp>
       <p:grpSp>
         <p:nvGrpSpPr>
-          <p:cNvPr name="Group 18" id="18"/>
+          <p:cNvPr id="18" name="Group 18"/>
           <p:cNvGrpSpPr/>
           <p:nvPr/>
         </p:nvGrpSpPr>
         <p:grpSpPr>
-          <a:xfrm rot="0">
+          <a:xfrm>
             <a:off x="15042849" y="334869"/>
             <a:ext cx="2744013" cy="745256"/>
             <a:chOff x="0" y="0"/>
@@ -5732,12 +5760,12 @@
         </p:grpSpPr>
         <p:sp>
           <p:nvSpPr>
-            <p:cNvPr name="Freeform 19" id="19"/>
+            <p:cNvPr id="19" name="Freeform 19"/>
             <p:cNvSpPr/>
             <p:nvPr/>
           </p:nvSpPr>
           <p:spPr>
-            <a:xfrm flipH="false" flipV="false" rot="0">
+            <a:xfrm>
               <a:off x="0" y="0"/>
               <a:ext cx="832935" cy="993675"/>
             </a:xfrm>
@@ -5746,9 +5774,9 @@
               <a:gdLst/>
               <a:ahLst/>
               <a:cxnLst/>
-              <a:rect r="r" b="b" t="t" l="l"/>
+              <a:rect l="l" t="t" r="r" b="b"/>
               <a:pathLst>
-                <a:path h="993675" w="832935">
+                <a:path w="832935" h="993675">
                   <a:moveTo>
                     <a:pt x="0" y="0"/>
                   </a:moveTo>
@@ -5778,12 +5806,12 @@
         </p:sp>
         <p:sp>
           <p:nvSpPr>
-            <p:cNvPr name="TextBox 20" id="20"/>
-            <p:cNvSpPr txBox="true"/>
+            <p:cNvPr id="20" name="TextBox 20"/>
+            <p:cNvSpPr txBox="1"/>
             <p:nvPr/>
           </p:nvSpPr>
           <p:spPr>
-            <a:xfrm rot="0">
+            <a:xfrm>
               <a:off x="946119" y="144465"/>
               <a:ext cx="2356744" cy="562598"/>
             </a:xfrm>
@@ -5792,7 +5820,7 @@
             </a:prstGeom>
           </p:spPr>
           <p:txBody>
-            <a:bodyPr anchor="t" rtlCol="false" tIns="0" lIns="0" bIns="0" rIns="0">
+            <a:bodyPr lIns="0" tIns="0" rIns="0" bIns="0" rtlCol="0" anchor="t">
               <a:spAutoFit/>
             </a:bodyPr>
             <a:lstStyle/>
@@ -5822,12 +5850,12 @@
         </p:sp>
         <p:sp>
           <p:nvSpPr>
-            <p:cNvPr name="TextBox 21" id="21"/>
-            <p:cNvSpPr txBox="true"/>
+            <p:cNvPr id="21" name="TextBox 21"/>
+            <p:cNvSpPr txBox="1"/>
             <p:nvPr/>
           </p:nvSpPr>
           <p:spPr>
-            <a:xfrm rot="0">
+            <a:xfrm>
               <a:off x="691558" y="676707"/>
               <a:ext cx="2967126" cy="198664"/>
             </a:xfrm>
@@ -5836,7 +5864,7 @@
             </a:prstGeom>
           </p:spPr>
           <p:txBody>
-            <a:bodyPr anchor="t" rtlCol="false" tIns="0" lIns="0" bIns="0" rIns="0">
+            <a:bodyPr lIns="0" tIns="0" rIns="0" bIns="0" rtlCol="0" anchor="t">
               <a:spAutoFit/>
             </a:bodyPr>
             <a:lstStyle/>
@@ -5867,12 +5895,12 @@
       </p:grpSp>
       <p:sp>
         <p:nvSpPr>
-          <p:cNvPr name="TextBox 22" id="22"/>
-          <p:cNvSpPr txBox="true"/>
+          <p:cNvPr id="22" name="TextBox 22"/>
+          <p:cNvSpPr txBox="1"/>
           <p:nvPr/>
         </p:nvSpPr>
         <p:spPr>
-          <a:xfrm rot="0">
+          <a:xfrm>
             <a:off x="7493374" y="9832687"/>
             <a:ext cx="3083970" cy="273240"/>
           </a:xfrm>
@@ -5881,7 +5909,7 @@
           </a:prstGeom>
         </p:spPr>
         <p:txBody>
-          <a:bodyPr anchor="t" rtlCol="false" tIns="0" lIns="0" bIns="0" rIns="0">
+          <a:bodyPr lIns="0" tIns="0" rIns="0" bIns="0" rtlCol="0" anchor="t">
             <a:spAutoFit/>
           </a:bodyPr>
           <a:lstStyle/>
@@ -5911,12 +5939,12 @@
       </p:sp>
       <p:grpSp>
         <p:nvGrpSpPr>
-          <p:cNvPr name="Group 23" id="23"/>
+          <p:cNvPr id="23" name="Group 23"/>
           <p:cNvGrpSpPr/>
           <p:nvPr/>
         </p:nvGrpSpPr>
         <p:grpSpPr>
-          <a:xfrm rot="0">
+          <a:xfrm>
             <a:off x="7397943" y="165633"/>
             <a:ext cx="3274833" cy="1083728"/>
             <a:chOff x="0" y="0"/>
@@ -5925,12 +5953,12 @@
         </p:grpSpPr>
         <p:sp>
           <p:nvSpPr>
-            <p:cNvPr name="TextBox 24" id="24"/>
-            <p:cNvSpPr txBox="true"/>
+            <p:cNvPr id="24" name="TextBox 24"/>
+            <p:cNvSpPr txBox="1"/>
             <p:nvPr/>
           </p:nvSpPr>
           <p:spPr>
-            <a:xfrm rot="0">
+            <a:xfrm>
               <a:off x="0" y="-142875"/>
               <a:ext cx="3820161" cy="1523444"/>
             </a:xfrm>
@@ -5939,7 +5967,7 @@
             </a:prstGeom>
           </p:spPr>
           <p:txBody>
-            <a:bodyPr anchor="t" rtlCol="false" tIns="0" lIns="0" bIns="0" rIns="0">
+            <a:bodyPr lIns="0" tIns="0" rIns="0" bIns="0" rtlCol="0" anchor="t">
               <a:spAutoFit/>
             </a:bodyPr>
             <a:lstStyle/>
@@ -5969,12 +5997,12 @@
         </p:sp>
         <p:sp>
           <p:nvSpPr>
-            <p:cNvPr name="TextBox 25" id="25"/>
-            <p:cNvSpPr txBox="true"/>
+            <p:cNvPr id="25" name="TextBox 25"/>
+            <p:cNvSpPr txBox="1"/>
             <p:nvPr/>
           </p:nvSpPr>
           <p:spPr>
-            <a:xfrm rot="0">
+            <a:xfrm>
               <a:off x="68219" y="-78472"/>
               <a:ext cx="3820161" cy="1523444"/>
             </a:xfrm>
@@ -5983,7 +6011,7 @@
             </a:prstGeom>
           </p:spPr>
           <p:txBody>
-            <a:bodyPr anchor="t" rtlCol="false" tIns="0" lIns="0" bIns="0" rIns="0">
+            <a:bodyPr lIns="0" tIns="0" rIns="0" bIns="0" rtlCol="0" anchor="t">
               <a:spAutoFit/>
             </a:bodyPr>
             <a:lstStyle/>
@@ -6013,12 +6041,12 @@
         </p:sp>
         <p:sp>
           <p:nvSpPr>
-            <p:cNvPr name="TextBox 26" id="26"/>
-            <p:cNvSpPr txBox="true"/>
+            <p:cNvPr id="26" name="TextBox 26"/>
+            <p:cNvSpPr txBox="1"/>
             <p:nvPr/>
           </p:nvSpPr>
           <p:spPr>
-            <a:xfrm rot="0">
+            <a:xfrm>
               <a:off x="33321" y="-106547"/>
               <a:ext cx="3820161" cy="1523444"/>
             </a:xfrm>
@@ -6027,7 +6055,7 @@
             </a:prstGeom>
           </p:spPr>
           <p:txBody>
-            <a:bodyPr anchor="t" rtlCol="false" tIns="0" lIns="0" bIns="0" rIns="0">
+            <a:bodyPr lIns="0" tIns="0" rIns="0" bIns="0" rtlCol="0" anchor="t">
               <a:spAutoFit/>
             </a:bodyPr>
             <a:lstStyle/>
@@ -6057,12 +6085,12 @@
         </p:sp>
         <p:sp>
           <p:nvSpPr>
-            <p:cNvPr name="TextBox 27" id="27"/>
-            <p:cNvSpPr txBox="true"/>
+            <p:cNvPr id="27" name="TextBox 27"/>
+            <p:cNvSpPr txBox="1"/>
             <p:nvPr/>
           </p:nvSpPr>
           <p:spPr>
-            <a:xfrm rot="0">
+            <a:xfrm>
               <a:off x="3340520" y="415474"/>
               <a:ext cx="1025923" cy="965094"/>
             </a:xfrm>
@@ -6071,7 +6099,7 @@
             </a:prstGeom>
           </p:spPr>
           <p:txBody>
-            <a:bodyPr anchor="t" rtlCol="false" tIns="0" lIns="0" bIns="0" rIns="0">
+            <a:bodyPr lIns="0" tIns="0" rIns="0" bIns="0" rtlCol="0" anchor="t">
               <a:spAutoFit/>
             </a:bodyPr>
             <a:lstStyle/>
@@ -6109,7 +6137,7 @@
 </file>
 
 <file path=ppt/slides/slide4.xml><?xml version="1.0" encoding="utf-8"?>
-<p:sld xmlns:p="http://schemas.openxmlformats.org/presentationml/2006/main" xmlns:a="http://schemas.openxmlformats.org/drawingml/2006/main" xmlns:r="http://schemas.openxmlformats.org/officeDocument/2006/relationships">
+<p:sld xmlns:a="http://schemas.openxmlformats.org/drawingml/2006/main" xmlns:r="http://schemas.openxmlformats.org/officeDocument/2006/relationships" xmlns:p="http://schemas.openxmlformats.org/presentationml/2006/main">
   <p:cSld>
     <p:spTree>
       <p:nvGrpSpPr>
@@ -6127,12 +6155,12 @@
       </p:grpSpPr>
       <p:sp>
         <p:nvSpPr>
-          <p:cNvPr name="Freeform 2" id="2"/>
+          <p:cNvPr id="2" name="Freeform 2"/>
           <p:cNvSpPr/>
           <p:nvPr/>
         </p:nvSpPr>
         <p:spPr>
-          <a:xfrm flipH="false" flipV="false" rot="-10800000">
+          <a:xfrm rot="-10800000">
             <a:off x="0" y="0"/>
             <a:ext cx="18288000" cy="10287000"/>
           </a:xfrm>
@@ -6141,9 +6169,9 @@
             <a:gdLst/>
             <a:ahLst/>
             <a:cxnLst/>
-            <a:rect r="r" b="b" t="t" l="l"/>
+            <a:rect l="l" t="t" r="r" b="b"/>
             <a:pathLst>
-              <a:path h="10287000" w="18288000">
+              <a:path w="18288000" h="10287000">
                 <a:moveTo>
                   <a:pt x="0" y="0"/>
                 </a:moveTo>
@@ -6166,19 +6194,19 @@
           <a:blipFill>
             <a:blip r:embed="rId2"/>
             <a:stretch>
-              <a:fillRect l="-116" t="0" r="-116" b="-232"/>
+              <a:fillRect l="-116" r="-116" b="-232"/>
             </a:stretch>
           </a:blipFill>
         </p:spPr>
       </p:sp>
       <p:grpSp>
         <p:nvGrpSpPr>
-          <p:cNvPr name="Group 3" id="3"/>
+          <p:cNvPr id="3" name="Group 3"/>
           <p:cNvGrpSpPr/>
           <p:nvPr/>
         </p:nvGrpSpPr>
         <p:grpSpPr>
-          <a:xfrm rot="0">
+          <a:xfrm>
             <a:off x="0" y="0"/>
             <a:ext cx="18288000" cy="10287000"/>
             <a:chOff x="0" y="0"/>
@@ -6187,12 +6215,12 @@
         </p:grpSpPr>
         <p:sp>
           <p:nvSpPr>
-            <p:cNvPr name="Freeform 4" id="4"/>
+            <p:cNvPr id="4" name="Freeform 4"/>
             <p:cNvSpPr/>
             <p:nvPr/>
           </p:nvSpPr>
           <p:spPr>
-            <a:xfrm flipH="false" flipV="false" rot="0">
+            <a:xfrm>
               <a:off x="0" y="0"/>
               <a:ext cx="4816592" cy="2709333"/>
             </a:xfrm>
@@ -6201,9 +6229,9 @@
               <a:gdLst/>
               <a:ahLst/>
               <a:cxnLst/>
-              <a:rect r="r" b="b" t="t" l="l"/>
+              <a:rect l="l" t="t" r="r" b="b"/>
               <a:pathLst>
-                <a:path h="2709333" w="4816592">
+                <a:path w="4816592" h="2709333">
                   <a:moveTo>
                     <a:pt x="0" y="0"/>
                   </a:moveTo>
@@ -6229,8 +6257,8 @@
         </p:sp>
         <p:sp>
           <p:nvSpPr>
-            <p:cNvPr name="TextBox 5" id="5"/>
-            <p:cNvSpPr txBox="true"/>
+            <p:cNvPr id="5" name="TextBox 5"/>
+            <p:cNvSpPr txBox="1"/>
             <p:nvPr/>
           </p:nvSpPr>
           <p:spPr>
@@ -6243,7 +6271,7 @@
             </a:prstGeom>
           </p:spPr>
           <p:txBody>
-            <a:bodyPr anchor="ctr" rtlCol="false" tIns="50800" lIns="50800" bIns="50800" rIns="50800"/>
+            <a:bodyPr lIns="50800" tIns="50800" rIns="50800" bIns="50800" rtlCol="0" anchor="ctr"/>
             <a:lstStyle/>
             <a:p>
               <a:pPr algn="ctr">
@@ -6251,18 +6279,19 @@
                   <a:spcPts val="2659"/>
                 </a:lnSpc>
               </a:pPr>
+              <a:endParaRPr/>
             </a:p>
           </p:txBody>
         </p:sp>
       </p:grpSp>
       <p:grpSp>
         <p:nvGrpSpPr>
-          <p:cNvPr name="Group 6" id="6"/>
+          <p:cNvPr id="6" name="Group 6"/>
           <p:cNvGrpSpPr/>
           <p:nvPr/>
         </p:nvGrpSpPr>
         <p:grpSpPr>
-          <a:xfrm rot="0">
+          <a:xfrm>
             <a:off x="0" y="9612716"/>
             <a:ext cx="18288000" cy="674284"/>
             <a:chOff x="0" y="0"/>
@@ -6271,12 +6300,12 @@
         </p:grpSpPr>
         <p:sp>
           <p:nvSpPr>
-            <p:cNvPr name="Freeform 7" id="7"/>
+            <p:cNvPr id="7" name="Freeform 7"/>
             <p:cNvSpPr/>
             <p:nvPr/>
           </p:nvSpPr>
           <p:spPr>
-            <a:xfrm flipH="false" flipV="false" rot="0">
+            <a:xfrm>
               <a:off x="0" y="0"/>
               <a:ext cx="4816592" cy="177589"/>
             </a:xfrm>
@@ -6285,9 +6314,9 @@
               <a:gdLst/>
               <a:ahLst/>
               <a:cxnLst/>
-              <a:rect r="r" b="b" t="t" l="l"/>
+              <a:rect l="l" t="t" r="r" b="b"/>
               <a:pathLst>
-                <a:path h="177589" w="4816592">
+                <a:path w="4816592" h="177589">
                   <a:moveTo>
                     <a:pt x="0" y="0"/>
                   </a:moveTo>
@@ -6313,8 +6342,8 @@
         </p:sp>
         <p:sp>
           <p:nvSpPr>
-            <p:cNvPr name="TextBox 8" id="8"/>
-            <p:cNvSpPr txBox="true"/>
+            <p:cNvPr id="8" name="TextBox 8"/>
+            <p:cNvSpPr txBox="1"/>
             <p:nvPr/>
           </p:nvSpPr>
           <p:spPr>
@@ -6327,7 +6356,7 @@
             </a:prstGeom>
           </p:spPr>
           <p:txBody>
-            <a:bodyPr anchor="ctr" rtlCol="false" tIns="50800" lIns="50800" bIns="50800" rIns="50800"/>
+            <a:bodyPr lIns="50800" tIns="50800" rIns="50800" bIns="50800" rtlCol="0" anchor="ctr"/>
             <a:lstStyle/>
             <a:p>
               <a:pPr algn="ctr">
@@ -6335,18 +6364,19 @@
                   <a:spcPts val="2659"/>
                 </a:lnSpc>
               </a:pPr>
+              <a:endParaRPr/>
             </a:p>
           </p:txBody>
         </p:sp>
       </p:grpSp>
       <p:grpSp>
         <p:nvGrpSpPr>
-          <p:cNvPr name="Group 9" id="9"/>
+          <p:cNvPr id="9" name="Group 9"/>
           <p:cNvGrpSpPr/>
           <p:nvPr/>
         </p:nvGrpSpPr>
         <p:grpSpPr>
-          <a:xfrm rot="0">
+          <a:xfrm>
             <a:off x="0" y="0"/>
             <a:ext cx="18288000" cy="1387754"/>
             <a:chOff x="0" y="0"/>
@@ -6355,12 +6385,12 @@
         </p:grpSpPr>
         <p:sp>
           <p:nvSpPr>
-            <p:cNvPr name="Freeform 10" id="10"/>
+            <p:cNvPr id="10" name="Freeform 10"/>
             <p:cNvSpPr/>
             <p:nvPr/>
           </p:nvSpPr>
           <p:spPr>
-            <a:xfrm flipH="false" flipV="false" rot="0">
+            <a:xfrm>
               <a:off x="0" y="0"/>
               <a:ext cx="4816592" cy="365499"/>
             </a:xfrm>
@@ -6369,9 +6399,9 @@
               <a:gdLst/>
               <a:ahLst/>
               <a:cxnLst/>
-              <a:rect r="r" b="b" t="t" l="l"/>
+              <a:rect l="l" t="t" r="r" b="b"/>
               <a:pathLst>
-                <a:path h="365499" w="4816592">
+                <a:path w="4816592" h="365499">
                   <a:moveTo>
                     <a:pt x="0" y="0"/>
                   </a:moveTo>
@@ -6406,8 +6436,8 @@
         </p:sp>
         <p:sp>
           <p:nvSpPr>
-            <p:cNvPr name="TextBox 11" id="11"/>
-            <p:cNvSpPr txBox="true"/>
+            <p:cNvPr id="11" name="TextBox 11"/>
+            <p:cNvSpPr txBox="1"/>
             <p:nvPr/>
           </p:nvSpPr>
           <p:spPr>
@@ -6420,7 +6450,7 @@
             </a:prstGeom>
           </p:spPr>
           <p:txBody>
-            <a:bodyPr anchor="ctr" rtlCol="false" tIns="50800" lIns="50800" bIns="50800" rIns="50800"/>
+            <a:bodyPr lIns="50800" tIns="50800" rIns="50800" bIns="50800" rtlCol="0" anchor="ctr"/>
             <a:lstStyle/>
             <a:p>
               <a:pPr algn="ctr">
@@ -6428,18 +6458,19 @@
                   <a:spcPts val="2659"/>
                 </a:lnSpc>
               </a:pPr>
+              <a:endParaRPr/>
             </a:p>
           </p:txBody>
         </p:sp>
       </p:grpSp>
       <p:sp>
         <p:nvSpPr>
-          <p:cNvPr name="TextBox 12" id="12"/>
-          <p:cNvSpPr txBox="true"/>
+          <p:cNvPr id="12" name="TextBox 12"/>
+          <p:cNvSpPr txBox="1"/>
           <p:nvPr/>
         </p:nvSpPr>
         <p:spPr>
-          <a:xfrm rot="0">
+          <a:xfrm>
             <a:off x="1690260" y="3467429"/>
             <a:ext cx="4720233" cy="3984545"/>
           </a:xfrm>
@@ -6448,7 +6479,7 @@
           </a:prstGeom>
         </p:spPr>
         <p:txBody>
-          <a:bodyPr anchor="t" rtlCol="false" tIns="0" lIns="0" bIns="0" rIns="0">
+          <a:bodyPr lIns="0" tIns="0" rIns="0" bIns="0" rtlCol="0" anchor="t">
             <a:spAutoFit/>
           </a:bodyPr>
           <a:lstStyle/>
@@ -6458,6 +6489,7 @@
                 <a:spcPts val="4554"/>
               </a:lnSpc>
             </a:pPr>
+            <a:endParaRPr/>
           </a:p>
           <a:p>
             <a:pPr algn="l">
@@ -6478,19 +6510,7 @@
                 <a:cs typeface="Gagalin"/>
                 <a:sym typeface="Gagalin"/>
               </a:rPr>
-              <a:t>• Progr</a:t>
-            </a:r>
-            <a:r>
-              <a:rPr lang="en-US" sz="3253">
-                <a:solidFill>
-                  <a:srgbClr val="FFDE59"/>
-                </a:solidFill>
-                <a:latin typeface="Gagalin"/>
-                <a:ea typeface="Gagalin"/>
-                <a:cs typeface="Gagalin"/>
-                <a:sym typeface="Gagalin"/>
-              </a:rPr>
-              <a:t>amming languages</a:t>
+              <a:t>• Programming languages</a:t>
             </a:r>
           </a:p>
           <a:p>
@@ -6502,6 +6522,15 @@
                 <a:spcPct val="0"/>
               </a:spcBef>
             </a:pPr>
+            <a:endParaRPr lang="en-US" sz="3253">
+              <a:solidFill>
+                <a:srgbClr val="FFDE59"/>
+              </a:solidFill>
+              <a:latin typeface="Gagalin"/>
+              <a:ea typeface="Gagalin"/>
+              <a:cs typeface="Gagalin"/>
+              <a:sym typeface="Gagalin"/>
+            </a:endParaRPr>
           </a:p>
           <a:p>
             <a:pPr algn="l">
@@ -6534,6 +6563,15 @@
                 <a:spcPct val="0"/>
               </a:spcBef>
             </a:pPr>
+            <a:endParaRPr lang="en-US" sz="3253">
+              <a:solidFill>
+                <a:srgbClr val="FFDE59"/>
+              </a:solidFill>
+              <a:latin typeface="Gagalin"/>
+              <a:ea typeface="Gagalin"/>
+              <a:cs typeface="Gagalin"/>
+              <a:sym typeface="Gagalin"/>
+            </a:endParaRPr>
           </a:p>
           <a:p>
             <a:pPr algn="l">
@@ -6566,17 +6604,26 @@
                 <a:spcPct val="0"/>
               </a:spcBef>
             </a:pPr>
+            <a:endParaRPr lang="en-US" sz="3253">
+              <a:solidFill>
+                <a:srgbClr val="FFDE59"/>
+              </a:solidFill>
+              <a:latin typeface="Gagalin"/>
+              <a:ea typeface="Gagalin"/>
+              <a:cs typeface="Gagalin"/>
+              <a:sym typeface="Gagalin"/>
+            </a:endParaRPr>
           </a:p>
         </p:txBody>
       </p:sp>
       <p:sp>
         <p:nvSpPr>
-          <p:cNvPr name="TextBox 13" id="13"/>
-          <p:cNvSpPr txBox="true"/>
+          <p:cNvPr id="13" name="TextBox 13"/>
+          <p:cNvSpPr txBox="1"/>
           <p:nvPr/>
         </p:nvSpPr>
         <p:spPr>
-          <a:xfrm rot="0">
+          <a:xfrm>
             <a:off x="17781653" y="9660062"/>
             <a:ext cx="215950" cy="580390"/>
           </a:xfrm>
@@ -6585,7 +6632,7 @@
           </a:prstGeom>
         </p:spPr>
         <p:txBody>
-          <a:bodyPr anchor="t" rtlCol="false" tIns="0" lIns="0" bIns="0" rIns="0">
+          <a:bodyPr lIns="0" tIns="0" rIns="0" bIns="0" rtlCol="0" anchor="t">
             <a:spAutoFit/>
           </a:bodyPr>
           <a:lstStyle/>
@@ -6615,12 +6662,12 @@
       </p:sp>
       <p:sp>
         <p:nvSpPr>
-          <p:cNvPr name="TextBox 14" id="14"/>
-          <p:cNvSpPr txBox="true"/>
+          <p:cNvPr id="14" name="TextBox 14"/>
+          <p:cNvSpPr txBox="1"/>
           <p:nvPr/>
         </p:nvSpPr>
         <p:spPr>
-          <a:xfrm rot="0">
+          <a:xfrm>
             <a:off x="4416688" y="1873057"/>
             <a:ext cx="8774162" cy="697150"/>
           </a:xfrm>
@@ -6629,7 +6676,7 @@
           </a:prstGeom>
         </p:spPr>
         <p:txBody>
-          <a:bodyPr anchor="t" rtlCol="false" tIns="0" lIns="0" bIns="0" rIns="0">
+          <a:bodyPr lIns="0" tIns="0" rIns="0" bIns="0" rtlCol="0" anchor="t">
             <a:spAutoFit/>
           </a:bodyPr>
           <a:lstStyle/>
@@ -6652,31 +6699,19 @@
                 <a:cs typeface="Gagalin"/>
                 <a:sym typeface="Gagalin"/>
               </a:rPr>
-              <a:t>Techn</a:t>
-            </a:r>
-            <a:r>
-              <a:rPr lang="en-US" sz="4053">
-                <a:solidFill>
-                  <a:srgbClr val="FFFFFF"/>
-                </a:solidFill>
-                <a:latin typeface="Gagalin"/>
-                <a:ea typeface="Gagalin"/>
-                <a:cs typeface="Gagalin"/>
-                <a:sym typeface="Gagalin"/>
-              </a:rPr>
-              <a:t>ology Stack /Technologies Used</a:t>
+              <a:t>Technology Stack /Technologies Used</a:t>
             </a:r>
           </a:p>
         </p:txBody>
       </p:sp>
       <p:sp>
         <p:nvSpPr>
-          <p:cNvPr name="Freeform 15" id="15"/>
+          <p:cNvPr id="15" name="Freeform 15"/>
           <p:cNvSpPr/>
           <p:nvPr/>
         </p:nvSpPr>
         <p:spPr>
-          <a:xfrm flipH="false" flipV="false" rot="0">
+          <a:xfrm>
             <a:off x="230308" y="179485"/>
             <a:ext cx="3140115" cy="1083728"/>
           </a:xfrm>
@@ -6685,9 +6720,9 @@
             <a:gdLst/>
             <a:ahLst/>
             <a:cxnLst/>
-            <a:rect r="r" b="b" t="t" l="l"/>
+            <a:rect l="l" t="t" r="r" b="b"/>
             <a:pathLst>
-              <a:path h="1083728" w="3140115">
+              <a:path w="3140115" h="1083728">
                 <a:moveTo>
                   <a:pt x="0" y="0"/>
                 </a:moveTo>
@@ -6710,19 +6745,19 @@
           <a:blipFill>
             <a:blip r:embed="rId3"/>
             <a:stretch>
-              <a:fillRect l="0" t="0" r="-17991" b="0"/>
+              <a:fillRect r="-17991"/>
             </a:stretch>
           </a:blipFill>
         </p:spPr>
       </p:sp>
       <p:grpSp>
         <p:nvGrpSpPr>
-          <p:cNvPr name="Group 16" id="16"/>
+          <p:cNvPr id="16" name="Group 16"/>
           <p:cNvGrpSpPr/>
           <p:nvPr/>
         </p:nvGrpSpPr>
         <p:grpSpPr>
-          <a:xfrm rot="0">
+          <a:xfrm>
             <a:off x="15042849" y="334869"/>
             <a:ext cx="2744013" cy="745256"/>
             <a:chOff x="0" y="0"/>
@@ -6731,12 +6766,12 @@
         </p:grpSpPr>
         <p:sp>
           <p:nvSpPr>
-            <p:cNvPr name="Freeform 17" id="17"/>
+            <p:cNvPr id="17" name="Freeform 17"/>
             <p:cNvSpPr/>
             <p:nvPr/>
           </p:nvSpPr>
           <p:spPr>
-            <a:xfrm flipH="false" flipV="false" rot="0">
+            <a:xfrm>
               <a:off x="0" y="0"/>
               <a:ext cx="832935" cy="993675"/>
             </a:xfrm>
@@ -6745,9 +6780,9 @@
               <a:gdLst/>
               <a:ahLst/>
               <a:cxnLst/>
-              <a:rect r="r" b="b" t="t" l="l"/>
+              <a:rect l="l" t="t" r="r" b="b"/>
               <a:pathLst>
-                <a:path h="993675" w="832935">
+                <a:path w="832935" h="993675">
                   <a:moveTo>
                     <a:pt x="0" y="0"/>
                   </a:moveTo>
@@ -6777,12 +6812,12 @@
         </p:sp>
         <p:sp>
           <p:nvSpPr>
-            <p:cNvPr name="TextBox 18" id="18"/>
-            <p:cNvSpPr txBox="true"/>
+            <p:cNvPr id="18" name="TextBox 18"/>
+            <p:cNvSpPr txBox="1"/>
             <p:nvPr/>
           </p:nvSpPr>
           <p:spPr>
-            <a:xfrm rot="0">
+            <a:xfrm>
               <a:off x="946119" y="144465"/>
               <a:ext cx="2356744" cy="562598"/>
             </a:xfrm>
@@ -6791,7 +6826,7 @@
             </a:prstGeom>
           </p:spPr>
           <p:txBody>
-            <a:bodyPr anchor="t" rtlCol="false" tIns="0" lIns="0" bIns="0" rIns="0">
+            <a:bodyPr lIns="0" tIns="0" rIns="0" bIns="0" rtlCol="0" anchor="t">
               <a:spAutoFit/>
             </a:bodyPr>
             <a:lstStyle/>
@@ -6821,12 +6856,12 @@
         </p:sp>
         <p:sp>
           <p:nvSpPr>
-            <p:cNvPr name="TextBox 19" id="19"/>
-            <p:cNvSpPr txBox="true"/>
+            <p:cNvPr id="19" name="TextBox 19"/>
+            <p:cNvSpPr txBox="1"/>
             <p:nvPr/>
           </p:nvSpPr>
           <p:spPr>
-            <a:xfrm rot="0">
+            <a:xfrm>
               <a:off x="691558" y="676707"/>
               <a:ext cx="2967126" cy="198664"/>
             </a:xfrm>
@@ -6835,7 +6870,7 @@
             </a:prstGeom>
           </p:spPr>
           <p:txBody>
-            <a:bodyPr anchor="t" rtlCol="false" tIns="0" lIns="0" bIns="0" rIns="0">
+            <a:bodyPr lIns="0" tIns="0" rIns="0" bIns="0" rtlCol="0" anchor="t">
               <a:spAutoFit/>
             </a:bodyPr>
             <a:lstStyle/>
@@ -6866,12 +6901,12 @@
       </p:grpSp>
       <p:sp>
         <p:nvSpPr>
-          <p:cNvPr name="TextBox 20" id="20"/>
-          <p:cNvSpPr txBox="true"/>
+          <p:cNvPr id="20" name="TextBox 20"/>
+          <p:cNvSpPr txBox="1"/>
           <p:nvPr/>
         </p:nvSpPr>
         <p:spPr>
-          <a:xfrm rot="0">
+          <a:xfrm>
             <a:off x="7493374" y="9832687"/>
             <a:ext cx="3083970" cy="273240"/>
           </a:xfrm>
@@ -6880,7 +6915,7 @@
           </a:prstGeom>
         </p:spPr>
         <p:txBody>
-          <a:bodyPr anchor="t" rtlCol="false" tIns="0" lIns="0" bIns="0" rIns="0">
+          <a:bodyPr lIns="0" tIns="0" rIns="0" bIns="0" rtlCol="0" anchor="t">
             <a:spAutoFit/>
           </a:bodyPr>
           <a:lstStyle/>
@@ -6910,12 +6945,12 @@
       </p:sp>
       <p:grpSp>
         <p:nvGrpSpPr>
-          <p:cNvPr name="Group 21" id="21"/>
+          <p:cNvPr id="21" name="Group 21"/>
           <p:cNvGrpSpPr/>
           <p:nvPr/>
         </p:nvGrpSpPr>
         <p:grpSpPr>
-          <a:xfrm rot="0">
+          <a:xfrm>
             <a:off x="7397943" y="165633"/>
             <a:ext cx="3274833" cy="1083728"/>
             <a:chOff x="0" y="0"/>
@@ -6924,12 +6959,12 @@
         </p:grpSpPr>
         <p:sp>
           <p:nvSpPr>
-            <p:cNvPr name="TextBox 22" id="22"/>
-            <p:cNvSpPr txBox="true"/>
+            <p:cNvPr id="22" name="TextBox 22"/>
+            <p:cNvSpPr txBox="1"/>
             <p:nvPr/>
           </p:nvSpPr>
           <p:spPr>
-            <a:xfrm rot="0">
+            <a:xfrm>
               <a:off x="0" y="-142875"/>
               <a:ext cx="3820161" cy="1523444"/>
             </a:xfrm>
@@ -6938,7 +6973,7 @@
             </a:prstGeom>
           </p:spPr>
           <p:txBody>
-            <a:bodyPr anchor="t" rtlCol="false" tIns="0" lIns="0" bIns="0" rIns="0">
+            <a:bodyPr lIns="0" tIns="0" rIns="0" bIns="0" rtlCol="0" anchor="t">
               <a:spAutoFit/>
             </a:bodyPr>
             <a:lstStyle/>
@@ -6968,12 +7003,12 @@
         </p:sp>
         <p:sp>
           <p:nvSpPr>
-            <p:cNvPr name="TextBox 23" id="23"/>
-            <p:cNvSpPr txBox="true"/>
+            <p:cNvPr id="23" name="TextBox 23"/>
+            <p:cNvSpPr txBox="1"/>
             <p:nvPr/>
           </p:nvSpPr>
           <p:spPr>
-            <a:xfrm rot="0">
+            <a:xfrm>
               <a:off x="68219" y="-78472"/>
               <a:ext cx="3820161" cy="1523444"/>
             </a:xfrm>
@@ -6982,7 +7017,7 @@
             </a:prstGeom>
           </p:spPr>
           <p:txBody>
-            <a:bodyPr anchor="t" rtlCol="false" tIns="0" lIns="0" bIns="0" rIns="0">
+            <a:bodyPr lIns="0" tIns="0" rIns="0" bIns="0" rtlCol="0" anchor="t">
               <a:spAutoFit/>
             </a:bodyPr>
             <a:lstStyle/>
@@ -7012,12 +7047,12 @@
         </p:sp>
         <p:sp>
           <p:nvSpPr>
-            <p:cNvPr name="TextBox 24" id="24"/>
-            <p:cNvSpPr txBox="true"/>
+            <p:cNvPr id="24" name="TextBox 24"/>
+            <p:cNvSpPr txBox="1"/>
             <p:nvPr/>
           </p:nvSpPr>
           <p:spPr>
-            <a:xfrm rot="0">
+            <a:xfrm>
               <a:off x="33321" y="-106547"/>
               <a:ext cx="3820161" cy="1523444"/>
             </a:xfrm>
@@ -7026,7 +7061,7 @@
             </a:prstGeom>
           </p:spPr>
           <p:txBody>
-            <a:bodyPr anchor="t" rtlCol="false" tIns="0" lIns="0" bIns="0" rIns="0">
+            <a:bodyPr lIns="0" tIns="0" rIns="0" bIns="0" rtlCol="0" anchor="t">
               <a:spAutoFit/>
             </a:bodyPr>
             <a:lstStyle/>
@@ -7056,12 +7091,12 @@
         </p:sp>
         <p:sp>
           <p:nvSpPr>
-            <p:cNvPr name="TextBox 25" id="25"/>
-            <p:cNvSpPr txBox="true"/>
+            <p:cNvPr id="25" name="TextBox 25"/>
+            <p:cNvSpPr txBox="1"/>
             <p:nvPr/>
           </p:nvSpPr>
           <p:spPr>
-            <a:xfrm rot="0">
+            <a:xfrm>
               <a:off x="3340520" y="415474"/>
               <a:ext cx="1025923" cy="965094"/>
             </a:xfrm>
@@ -7070,7 +7105,7 @@
             </a:prstGeom>
           </p:spPr>
           <p:txBody>
-            <a:bodyPr anchor="t" rtlCol="false" tIns="0" lIns="0" bIns="0" rIns="0">
+            <a:bodyPr lIns="0" tIns="0" rIns="0" bIns="0" rtlCol="0" anchor="t">
               <a:spAutoFit/>
             </a:bodyPr>
             <a:lstStyle/>
@@ -7108,7 +7143,7 @@
 </file>
 
 <file path=ppt/slides/slide5.xml><?xml version="1.0" encoding="utf-8"?>
-<p:sld xmlns:p="http://schemas.openxmlformats.org/presentationml/2006/main" xmlns:a="http://schemas.openxmlformats.org/drawingml/2006/main" xmlns:r="http://schemas.openxmlformats.org/officeDocument/2006/relationships">
+<p:sld xmlns:a="http://schemas.openxmlformats.org/drawingml/2006/main" xmlns:r="http://schemas.openxmlformats.org/officeDocument/2006/relationships" xmlns:p="http://schemas.openxmlformats.org/presentationml/2006/main">
   <p:cSld>
     <p:spTree>
       <p:nvGrpSpPr>
@@ -7126,12 +7161,12 @@
       </p:grpSpPr>
       <p:sp>
         <p:nvSpPr>
-          <p:cNvPr name="Freeform 2" id="2"/>
+          <p:cNvPr id="2" name="Freeform 2"/>
           <p:cNvSpPr/>
           <p:nvPr/>
         </p:nvSpPr>
         <p:spPr>
-          <a:xfrm flipH="false" flipV="false" rot="-10800000">
+          <a:xfrm rot="-10800000">
             <a:off x="0" y="0"/>
             <a:ext cx="18288000" cy="10287000"/>
           </a:xfrm>
@@ -7140,9 +7175,9 @@
             <a:gdLst/>
             <a:ahLst/>
             <a:cxnLst/>
-            <a:rect r="r" b="b" t="t" l="l"/>
+            <a:rect l="l" t="t" r="r" b="b"/>
             <a:pathLst>
-              <a:path h="10287000" w="18288000">
+              <a:path w="18288000" h="10287000">
                 <a:moveTo>
                   <a:pt x="0" y="0"/>
                 </a:moveTo>
@@ -7165,19 +7200,19 @@
           <a:blipFill>
             <a:blip r:embed="rId2"/>
             <a:stretch>
-              <a:fillRect l="-116" t="0" r="-116" b="-232"/>
+              <a:fillRect l="-116" r="-116" b="-232"/>
             </a:stretch>
           </a:blipFill>
         </p:spPr>
       </p:sp>
       <p:grpSp>
         <p:nvGrpSpPr>
-          <p:cNvPr name="Group 3" id="3"/>
+          <p:cNvPr id="3" name="Group 3"/>
           <p:cNvGrpSpPr/>
           <p:nvPr/>
         </p:nvGrpSpPr>
         <p:grpSpPr>
-          <a:xfrm rot="0">
+          <a:xfrm>
             <a:off x="0" y="0"/>
             <a:ext cx="18288000" cy="10287000"/>
             <a:chOff x="0" y="0"/>
@@ -7186,12 +7221,12 @@
         </p:grpSpPr>
         <p:sp>
           <p:nvSpPr>
-            <p:cNvPr name="Freeform 4" id="4"/>
+            <p:cNvPr id="4" name="Freeform 4"/>
             <p:cNvSpPr/>
             <p:nvPr/>
           </p:nvSpPr>
           <p:spPr>
-            <a:xfrm flipH="false" flipV="false" rot="0">
+            <a:xfrm>
               <a:off x="0" y="0"/>
               <a:ext cx="4816592" cy="2709333"/>
             </a:xfrm>
@@ -7200,9 +7235,9 @@
               <a:gdLst/>
               <a:ahLst/>
               <a:cxnLst/>
-              <a:rect r="r" b="b" t="t" l="l"/>
+              <a:rect l="l" t="t" r="r" b="b"/>
               <a:pathLst>
-                <a:path h="2709333" w="4816592">
+                <a:path w="4816592" h="2709333">
                   <a:moveTo>
                     <a:pt x="0" y="0"/>
                   </a:moveTo>
@@ -7228,8 +7263,8 @@
         </p:sp>
         <p:sp>
           <p:nvSpPr>
-            <p:cNvPr name="TextBox 5" id="5"/>
-            <p:cNvSpPr txBox="true"/>
+            <p:cNvPr id="5" name="TextBox 5"/>
+            <p:cNvSpPr txBox="1"/>
             <p:nvPr/>
           </p:nvSpPr>
           <p:spPr>
@@ -7242,7 +7277,7 @@
             </a:prstGeom>
           </p:spPr>
           <p:txBody>
-            <a:bodyPr anchor="ctr" rtlCol="false" tIns="50800" lIns="50800" bIns="50800" rIns="50800"/>
+            <a:bodyPr lIns="50800" tIns="50800" rIns="50800" bIns="50800" rtlCol="0" anchor="ctr"/>
             <a:lstStyle/>
             <a:p>
               <a:pPr algn="ctr">
@@ -7250,18 +7285,19 @@
                   <a:spcPts val="2659"/>
                 </a:lnSpc>
               </a:pPr>
+              <a:endParaRPr/>
             </a:p>
           </p:txBody>
         </p:sp>
       </p:grpSp>
       <p:grpSp>
         <p:nvGrpSpPr>
-          <p:cNvPr name="Group 6" id="6"/>
+          <p:cNvPr id="6" name="Group 6"/>
           <p:cNvGrpSpPr/>
           <p:nvPr/>
         </p:nvGrpSpPr>
         <p:grpSpPr>
-          <a:xfrm rot="0">
+          <a:xfrm>
             <a:off x="0" y="9612716"/>
             <a:ext cx="18288000" cy="674284"/>
             <a:chOff x="0" y="0"/>
@@ -7270,12 +7306,12 @@
         </p:grpSpPr>
         <p:sp>
           <p:nvSpPr>
-            <p:cNvPr name="Freeform 7" id="7"/>
+            <p:cNvPr id="7" name="Freeform 7"/>
             <p:cNvSpPr/>
             <p:nvPr/>
           </p:nvSpPr>
           <p:spPr>
-            <a:xfrm flipH="false" flipV="false" rot="0">
+            <a:xfrm>
               <a:off x="0" y="0"/>
               <a:ext cx="4816592" cy="177589"/>
             </a:xfrm>
@@ -7284,9 +7320,9 @@
               <a:gdLst/>
               <a:ahLst/>
               <a:cxnLst/>
-              <a:rect r="r" b="b" t="t" l="l"/>
+              <a:rect l="l" t="t" r="r" b="b"/>
               <a:pathLst>
-                <a:path h="177589" w="4816592">
+                <a:path w="4816592" h="177589">
                   <a:moveTo>
                     <a:pt x="0" y="0"/>
                   </a:moveTo>
@@ -7312,8 +7348,8 @@
         </p:sp>
         <p:sp>
           <p:nvSpPr>
-            <p:cNvPr name="TextBox 8" id="8"/>
-            <p:cNvSpPr txBox="true"/>
+            <p:cNvPr id="8" name="TextBox 8"/>
+            <p:cNvSpPr txBox="1"/>
             <p:nvPr/>
           </p:nvSpPr>
           <p:spPr>
@@ -7326,7 +7362,7 @@
             </a:prstGeom>
           </p:spPr>
           <p:txBody>
-            <a:bodyPr anchor="ctr" rtlCol="false" tIns="50800" lIns="50800" bIns="50800" rIns="50800"/>
+            <a:bodyPr lIns="50800" tIns="50800" rIns="50800" bIns="50800" rtlCol="0" anchor="ctr"/>
             <a:lstStyle/>
             <a:p>
               <a:pPr algn="ctr">
@@ -7334,18 +7370,19 @@
                   <a:spcPts val="2659"/>
                 </a:lnSpc>
               </a:pPr>
+              <a:endParaRPr/>
             </a:p>
           </p:txBody>
         </p:sp>
       </p:grpSp>
       <p:grpSp>
         <p:nvGrpSpPr>
-          <p:cNvPr name="Group 9" id="9"/>
+          <p:cNvPr id="9" name="Group 9"/>
           <p:cNvGrpSpPr/>
           <p:nvPr/>
         </p:nvGrpSpPr>
         <p:grpSpPr>
-          <a:xfrm rot="0">
+          <a:xfrm>
             <a:off x="0" y="0"/>
             <a:ext cx="18288000" cy="1387754"/>
             <a:chOff x="0" y="0"/>
@@ -7354,12 +7391,12 @@
         </p:grpSpPr>
         <p:sp>
           <p:nvSpPr>
-            <p:cNvPr name="Freeform 10" id="10"/>
+            <p:cNvPr id="10" name="Freeform 10"/>
             <p:cNvSpPr/>
             <p:nvPr/>
           </p:nvSpPr>
           <p:spPr>
-            <a:xfrm flipH="false" flipV="false" rot="0">
+            <a:xfrm>
               <a:off x="0" y="0"/>
               <a:ext cx="4816592" cy="365499"/>
             </a:xfrm>
@@ -7368,9 +7405,9 @@
               <a:gdLst/>
               <a:ahLst/>
               <a:cxnLst/>
-              <a:rect r="r" b="b" t="t" l="l"/>
+              <a:rect l="l" t="t" r="r" b="b"/>
               <a:pathLst>
-                <a:path h="365499" w="4816592">
+                <a:path w="4816592" h="365499">
                   <a:moveTo>
                     <a:pt x="0" y="0"/>
                   </a:moveTo>
@@ -7405,8 +7442,8 @@
         </p:sp>
         <p:sp>
           <p:nvSpPr>
-            <p:cNvPr name="TextBox 11" id="11"/>
-            <p:cNvSpPr txBox="true"/>
+            <p:cNvPr id="11" name="TextBox 11"/>
+            <p:cNvSpPr txBox="1"/>
             <p:nvPr/>
           </p:nvSpPr>
           <p:spPr>
@@ -7419,7 +7456,7 @@
             </a:prstGeom>
           </p:spPr>
           <p:txBody>
-            <a:bodyPr anchor="ctr" rtlCol="false" tIns="50800" lIns="50800" bIns="50800" rIns="50800"/>
+            <a:bodyPr lIns="50800" tIns="50800" rIns="50800" bIns="50800" rtlCol="0" anchor="ctr"/>
             <a:lstStyle/>
             <a:p>
               <a:pPr algn="ctr">
@@ -7427,18 +7464,19 @@
                   <a:spcPts val="2659"/>
                 </a:lnSpc>
               </a:pPr>
+              <a:endParaRPr/>
             </a:p>
           </p:txBody>
         </p:sp>
       </p:grpSp>
       <p:sp>
         <p:nvSpPr>
-          <p:cNvPr name="TextBox 12" id="12"/>
-          <p:cNvSpPr txBox="true"/>
+          <p:cNvPr id="12" name="TextBox 12"/>
+          <p:cNvSpPr txBox="1"/>
           <p:nvPr/>
         </p:nvSpPr>
         <p:spPr>
-          <a:xfrm rot="0">
+          <a:xfrm>
             <a:off x="2085816" y="3569293"/>
             <a:ext cx="2474637" cy="558204"/>
           </a:xfrm>
@@ -7447,7 +7485,7 @@
           </a:prstGeom>
         </p:spPr>
         <p:txBody>
-          <a:bodyPr anchor="t" rtlCol="false" tIns="0" lIns="0" bIns="0" rIns="0">
+          <a:bodyPr lIns="0" tIns="0" rIns="0" bIns="0" rtlCol="0" anchor="t">
             <a:spAutoFit/>
           </a:bodyPr>
           <a:lstStyle/>
@@ -7470,31 +7508,19 @@
                 <a:cs typeface="Gagalin"/>
                 <a:sym typeface="Gagalin"/>
               </a:rPr>
-              <a:t>H</a:t>
-            </a:r>
-            <a:r>
-              <a:rPr lang="en-US" sz="3253">
-                <a:solidFill>
-                  <a:srgbClr val="FFDE59"/>
-                </a:solidFill>
-                <a:latin typeface="Gagalin"/>
-                <a:ea typeface="Gagalin"/>
-                <a:cs typeface="Gagalin"/>
-                <a:sym typeface="Gagalin"/>
-              </a:rPr>
-              <a:t>ow It Works:</a:t>
+              <a:t>How It Works:</a:t>
             </a:r>
           </a:p>
         </p:txBody>
       </p:sp>
       <p:sp>
         <p:nvSpPr>
-          <p:cNvPr name="TextBox 13" id="13"/>
-          <p:cNvSpPr txBox="true"/>
+          <p:cNvPr id="13" name="TextBox 13"/>
+          <p:cNvSpPr txBox="1"/>
           <p:nvPr/>
         </p:nvSpPr>
         <p:spPr>
-          <a:xfrm rot="0">
+          <a:xfrm>
             <a:off x="17785076" y="9660062"/>
             <a:ext cx="209104" cy="580390"/>
           </a:xfrm>
@@ -7503,7 +7529,7 @@
           </a:prstGeom>
         </p:spPr>
         <p:txBody>
-          <a:bodyPr anchor="t" rtlCol="false" tIns="0" lIns="0" bIns="0" rIns="0">
+          <a:bodyPr lIns="0" tIns="0" rIns="0" bIns="0" rtlCol="0" anchor="t">
             <a:spAutoFit/>
           </a:bodyPr>
           <a:lstStyle/>
@@ -7533,12 +7559,12 @@
       </p:sp>
       <p:sp>
         <p:nvSpPr>
-          <p:cNvPr name="TextBox 14" id="14"/>
-          <p:cNvSpPr txBox="true"/>
+          <p:cNvPr id="14" name="TextBox 14"/>
+          <p:cNvSpPr txBox="1"/>
           <p:nvPr/>
         </p:nvSpPr>
         <p:spPr>
-          <a:xfrm rot="0">
+          <a:xfrm>
             <a:off x="5878255" y="1873057"/>
             <a:ext cx="5851029" cy="697150"/>
           </a:xfrm>
@@ -7547,7 +7573,7 @@
           </a:prstGeom>
         </p:spPr>
         <p:txBody>
-          <a:bodyPr anchor="t" rtlCol="false" tIns="0" lIns="0" bIns="0" rIns="0">
+          <a:bodyPr lIns="0" tIns="0" rIns="0" bIns="0" rtlCol="0" anchor="t">
             <a:spAutoFit/>
           </a:bodyPr>
           <a:lstStyle/>
@@ -7570,31 +7596,19 @@
                 <a:cs typeface="Gagalin"/>
                 <a:sym typeface="Gagalin"/>
               </a:rPr>
-              <a:t>Imp</a:t>
-            </a:r>
-            <a:r>
-              <a:rPr lang="en-US" sz="4053">
-                <a:solidFill>
-                  <a:srgbClr val="FFFFFF"/>
-                </a:solidFill>
-                <a:latin typeface="Gagalin"/>
-                <a:ea typeface="Gagalin"/>
-                <a:cs typeface="Gagalin"/>
-                <a:sym typeface="Gagalin"/>
-              </a:rPr>
-              <a:t>lementation / Working</a:t>
+              <a:t>Implementation / Working</a:t>
             </a:r>
           </a:p>
         </p:txBody>
       </p:sp>
       <p:sp>
         <p:nvSpPr>
-          <p:cNvPr name="TextBox 15" id="15"/>
-          <p:cNvSpPr txBox="true"/>
+          <p:cNvPr id="15" name="TextBox 15"/>
+          <p:cNvSpPr txBox="1"/>
           <p:nvPr/>
         </p:nvSpPr>
         <p:spPr>
-          <a:xfrm rot="0">
+          <a:xfrm>
             <a:off x="2001835" y="4752528"/>
             <a:ext cx="6903486" cy="1994455"/>
           </a:xfrm>
@@ -7603,7 +7617,7 @@
           </a:prstGeom>
         </p:spPr>
         <p:txBody>
-          <a:bodyPr anchor="t" rtlCol="false" tIns="0" lIns="0" bIns="0" rIns="0">
+          <a:bodyPr lIns="0" tIns="0" rIns="0" bIns="0" rtlCol="0" anchor="t">
             <a:spAutoFit/>
           </a:bodyPr>
           <a:lstStyle/>
@@ -7626,19 +7640,7 @@
                 <a:cs typeface="Comic Sans"/>
                 <a:sym typeface="Comic Sans"/>
               </a:rPr>
-              <a:t>• S</a:t>
-            </a:r>
-            <a:r>
-              <a:rPr lang="en-US" sz="2853">
-                <a:solidFill>
-                  <a:srgbClr val="FFDE59"/>
-                </a:solidFill>
-                <a:latin typeface="Comic Sans"/>
-                <a:ea typeface="Comic Sans"/>
-                <a:cs typeface="Comic Sans"/>
-                <a:sym typeface="Comic Sans"/>
-              </a:rPr>
-              <a:t>ystem workflow</a:t>
+              <a:t>• System workflow</a:t>
             </a:r>
           </a:p>
           <a:p>
@@ -7650,6 +7652,15 @@
                 <a:spcPct val="0"/>
               </a:spcBef>
             </a:pPr>
+            <a:endParaRPr lang="en-US" sz="2853">
+              <a:solidFill>
+                <a:srgbClr val="FFDE59"/>
+              </a:solidFill>
+              <a:latin typeface="Comic Sans"/>
+              <a:ea typeface="Comic Sans"/>
+              <a:cs typeface="Comic Sans"/>
+              <a:sym typeface="Comic Sans"/>
+            </a:endParaRPr>
           </a:p>
           <a:p>
             <a:pPr algn="just">
@@ -7682,17 +7693,26 @@
                 <a:spcPct val="0"/>
               </a:spcBef>
             </a:pPr>
+            <a:endParaRPr lang="en-US" sz="2853">
+              <a:solidFill>
+                <a:srgbClr val="FFDE59"/>
+              </a:solidFill>
+              <a:latin typeface="Comic Sans"/>
+              <a:ea typeface="Comic Sans"/>
+              <a:cs typeface="Comic Sans"/>
+              <a:sym typeface="Comic Sans"/>
+            </a:endParaRPr>
           </a:p>
         </p:txBody>
       </p:sp>
       <p:sp>
         <p:nvSpPr>
-          <p:cNvPr name="TextBox 16" id="16"/>
-          <p:cNvSpPr txBox="true"/>
+          <p:cNvPr id="16" name="TextBox 16"/>
+          <p:cNvSpPr txBox="1"/>
           <p:nvPr/>
         </p:nvSpPr>
         <p:spPr>
-          <a:xfrm rot="0">
+          <a:xfrm>
             <a:off x="13232465" y="4637042"/>
             <a:ext cx="3451805" cy="955767"/>
           </a:xfrm>
@@ -7701,7 +7721,7 @@
           </a:prstGeom>
         </p:spPr>
         <p:txBody>
-          <a:bodyPr anchor="t" rtlCol="false" tIns="0" lIns="0" bIns="0" rIns="0">
+          <a:bodyPr lIns="0" tIns="0" rIns="0" bIns="0" rtlCol="0" anchor="t">
             <a:spAutoFit/>
           </a:bodyPr>
           <a:lstStyle/>
@@ -7724,31 +7744,19 @@
                 <a:cs typeface="Comic Sans"/>
                 <a:sym typeface="Comic Sans"/>
               </a:rPr>
-              <a:t> • Sc</a:t>
-            </a:r>
-            <a:r>
-              <a:rPr lang="en-US" sz="2735">
-                <a:solidFill>
-                  <a:srgbClr val="FFDE59"/>
-                </a:solidFill>
-                <a:latin typeface="Comic Sans"/>
-                <a:ea typeface="Comic Sans"/>
-                <a:cs typeface="Comic Sans"/>
-                <a:sym typeface="Comic Sans"/>
-              </a:rPr>
-              <a:t>reenshots / diagrams / prototype</a:t>
+              <a:t> • Screenshots / diagrams / prototype</a:t>
             </a:r>
           </a:p>
         </p:txBody>
       </p:sp>
       <p:sp>
         <p:nvSpPr>
-          <p:cNvPr name="Freeform 17" id="17"/>
+          <p:cNvPr id="17" name="Freeform 17"/>
           <p:cNvSpPr/>
           <p:nvPr/>
         </p:nvSpPr>
         <p:spPr>
-          <a:xfrm flipH="false" flipV="false" rot="0">
+          <a:xfrm>
             <a:off x="230308" y="179485"/>
             <a:ext cx="3140115" cy="1083728"/>
           </a:xfrm>
@@ -7757,9 +7765,9 @@
             <a:gdLst/>
             <a:ahLst/>
             <a:cxnLst/>
-            <a:rect r="r" b="b" t="t" l="l"/>
+            <a:rect l="l" t="t" r="r" b="b"/>
             <a:pathLst>
-              <a:path h="1083728" w="3140115">
+              <a:path w="3140115" h="1083728">
                 <a:moveTo>
                   <a:pt x="0" y="0"/>
                 </a:moveTo>
@@ -7782,19 +7790,19 @@
           <a:blipFill>
             <a:blip r:embed="rId3"/>
             <a:stretch>
-              <a:fillRect l="0" t="0" r="-17991" b="0"/>
+              <a:fillRect r="-17991"/>
             </a:stretch>
           </a:blipFill>
         </p:spPr>
       </p:sp>
       <p:grpSp>
         <p:nvGrpSpPr>
-          <p:cNvPr name="Group 18" id="18"/>
+          <p:cNvPr id="18" name="Group 18"/>
           <p:cNvGrpSpPr/>
           <p:nvPr/>
         </p:nvGrpSpPr>
         <p:grpSpPr>
-          <a:xfrm rot="0">
+          <a:xfrm>
             <a:off x="15042849" y="334869"/>
             <a:ext cx="2744013" cy="745256"/>
             <a:chOff x="0" y="0"/>
@@ -7803,12 +7811,12 @@
         </p:grpSpPr>
         <p:sp>
           <p:nvSpPr>
-            <p:cNvPr name="Freeform 19" id="19"/>
+            <p:cNvPr id="19" name="Freeform 19"/>
             <p:cNvSpPr/>
             <p:nvPr/>
           </p:nvSpPr>
           <p:spPr>
-            <a:xfrm flipH="false" flipV="false" rot="0">
+            <a:xfrm>
               <a:off x="0" y="0"/>
               <a:ext cx="832935" cy="993675"/>
             </a:xfrm>
@@ -7817,9 +7825,9 @@
               <a:gdLst/>
               <a:ahLst/>
               <a:cxnLst/>
-              <a:rect r="r" b="b" t="t" l="l"/>
+              <a:rect l="l" t="t" r="r" b="b"/>
               <a:pathLst>
-                <a:path h="993675" w="832935">
+                <a:path w="832935" h="993675">
                   <a:moveTo>
                     <a:pt x="0" y="0"/>
                   </a:moveTo>
@@ -7849,12 +7857,12 @@
         </p:sp>
         <p:sp>
           <p:nvSpPr>
-            <p:cNvPr name="TextBox 20" id="20"/>
-            <p:cNvSpPr txBox="true"/>
+            <p:cNvPr id="20" name="TextBox 20"/>
+            <p:cNvSpPr txBox="1"/>
             <p:nvPr/>
           </p:nvSpPr>
           <p:spPr>
-            <a:xfrm rot="0">
+            <a:xfrm>
               <a:off x="946119" y="144465"/>
               <a:ext cx="2356744" cy="562598"/>
             </a:xfrm>
@@ -7863,7 +7871,7 @@
             </a:prstGeom>
           </p:spPr>
           <p:txBody>
-            <a:bodyPr anchor="t" rtlCol="false" tIns="0" lIns="0" bIns="0" rIns="0">
+            <a:bodyPr lIns="0" tIns="0" rIns="0" bIns="0" rtlCol="0" anchor="t">
               <a:spAutoFit/>
             </a:bodyPr>
             <a:lstStyle/>
@@ -7893,12 +7901,12 @@
         </p:sp>
         <p:sp>
           <p:nvSpPr>
-            <p:cNvPr name="TextBox 21" id="21"/>
-            <p:cNvSpPr txBox="true"/>
+            <p:cNvPr id="21" name="TextBox 21"/>
+            <p:cNvSpPr txBox="1"/>
             <p:nvPr/>
           </p:nvSpPr>
           <p:spPr>
-            <a:xfrm rot="0">
+            <a:xfrm>
               <a:off x="691558" y="676707"/>
               <a:ext cx="2967126" cy="198664"/>
             </a:xfrm>
@@ -7907,7 +7915,7 @@
             </a:prstGeom>
           </p:spPr>
           <p:txBody>
-            <a:bodyPr anchor="t" rtlCol="false" tIns="0" lIns="0" bIns="0" rIns="0">
+            <a:bodyPr lIns="0" tIns="0" rIns="0" bIns="0" rtlCol="0" anchor="t">
               <a:spAutoFit/>
             </a:bodyPr>
             <a:lstStyle/>
@@ -7938,12 +7946,12 @@
       </p:grpSp>
       <p:sp>
         <p:nvSpPr>
-          <p:cNvPr name="TextBox 22" id="22"/>
-          <p:cNvSpPr txBox="true"/>
+          <p:cNvPr id="22" name="TextBox 22"/>
+          <p:cNvSpPr txBox="1"/>
           <p:nvPr/>
         </p:nvSpPr>
         <p:spPr>
-          <a:xfrm rot="0">
+          <a:xfrm>
             <a:off x="7493374" y="9832687"/>
             <a:ext cx="3083970" cy="273240"/>
           </a:xfrm>
@@ -7952,7 +7960,7 @@
           </a:prstGeom>
         </p:spPr>
         <p:txBody>
-          <a:bodyPr anchor="t" rtlCol="false" tIns="0" lIns="0" bIns="0" rIns="0">
+          <a:bodyPr lIns="0" tIns="0" rIns="0" bIns="0" rtlCol="0" anchor="t">
             <a:spAutoFit/>
           </a:bodyPr>
           <a:lstStyle/>
@@ -7982,12 +7990,12 @@
       </p:sp>
       <p:grpSp>
         <p:nvGrpSpPr>
-          <p:cNvPr name="Group 23" id="23"/>
+          <p:cNvPr id="23" name="Group 23"/>
           <p:cNvGrpSpPr/>
           <p:nvPr/>
         </p:nvGrpSpPr>
         <p:grpSpPr>
-          <a:xfrm rot="0">
+          <a:xfrm>
             <a:off x="7397943" y="165633"/>
             <a:ext cx="3274833" cy="1083728"/>
             <a:chOff x="0" y="0"/>
@@ -7996,12 +8004,12 @@
         </p:grpSpPr>
         <p:sp>
           <p:nvSpPr>
-            <p:cNvPr name="TextBox 24" id="24"/>
-            <p:cNvSpPr txBox="true"/>
+            <p:cNvPr id="24" name="TextBox 24"/>
+            <p:cNvSpPr txBox="1"/>
             <p:nvPr/>
           </p:nvSpPr>
           <p:spPr>
-            <a:xfrm rot="0">
+            <a:xfrm>
               <a:off x="0" y="-142875"/>
               <a:ext cx="3820161" cy="1523444"/>
             </a:xfrm>
@@ -8010,7 +8018,7 @@
             </a:prstGeom>
           </p:spPr>
           <p:txBody>
-            <a:bodyPr anchor="t" rtlCol="false" tIns="0" lIns="0" bIns="0" rIns="0">
+            <a:bodyPr lIns="0" tIns="0" rIns="0" bIns="0" rtlCol="0" anchor="t">
               <a:spAutoFit/>
             </a:bodyPr>
             <a:lstStyle/>
@@ -8040,12 +8048,12 @@
         </p:sp>
         <p:sp>
           <p:nvSpPr>
-            <p:cNvPr name="TextBox 25" id="25"/>
-            <p:cNvSpPr txBox="true"/>
+            <p:cNvPr id="25" name="TextBox 25"/>
+            <p:cNvSpPr txBox="1"/>
             <p:nvPr/>
           </p:nvSpPr>
           <p:spPr>
-            <a:xfrm rot="0">
+            <a:xfrm>
               <a:off x="68219" y="-78472"/>
               <a:ext cx="3820161" cy="1523444"/>
             </a:xfrm>
@@ -8054,7 +8062,7 @@
             </a:prstGeom>
           </p:spPr>
           <p:txBody>
-            <a:bodyPr anchor="t" rtlCol="false" tIns="0" lIns="0" bIns="0" rIns="0">
+            <a:bodyPr lIns="0" tIns="0" rIns="0" bIns="0" rtlCol="0" anchor="t">
               <a:spAutoFit/>
             </a:bodyPr>
             <a:lstStyle/>
@@ -8084,12 +8092,12 @@
         </p:sp>
         <p:sp>
           <p:nvSpPr>
-            <p:cNvPr name="TextBox 26" id="26"/>
-            <p:cNvSpPr txBox="true"/>
+            <p:cNvPr id="26" name="TextBox 26"/>
+            <p:cNvSpPr txBox="1"/>
             <p:nvPr/>
           </p:nvSpPr>
           <p:spPr>
-            <a:xfrm rot="0">
+            <a:xfrm>
               <a:off x="33321" y="-106547"/>
               <a:ext cx="3820161" cy="1523444"/>
             </a:xfrm>
@@ -8098,7 +8106,7 @@
             </a:prstGeom>
           </p:spPr>
           <p:txBody>
-            <a:bodyPr anchor="t" rtlCol="false" tIns="0" lIns="0" bIns="0" rIns="0">
+            <a:bodyPr lIns="0" tIns="0" rIns="0" bIns="0" rtlCol="0" anchor="t">
               <a:spAutoFit/>
             </a:bodyPr>
             <a:lstStyle/>
@@ -8128,12 +8136,12 @@
         </p:sp>
         <p:sp>
           <p:nvSpPr>
-            <p:cNvPr name="TextBox 27" id="27"/>
-            <p:cNvSpPr txBox="true"/>
+            <p:cNvPr id="27" name="TextBox 27"/>
+            <p:cNvSpPr txBox="1"/>
             <p:nvPr/>
           </p:nvSpPr>
           <p:spPr>
-            <a:xfrm rot="0">
+            <a:xfrm>
               <a:off x="3340520" y="415474"/>
               <a:ext cx="1025923" cy="965094"/>
             </a:xfrm>
@@ -8142,7 +8150,7 @@
             </a:prstGeom>
           </p:spPr>
           <p:txBody>
-            <a:bodyPr anchor="t" rtlCol="false" tIns="0" lIns="0" bIns="0" rIns="0">
+            <a:bodyPr lIns="0" tIns="0" rIns="0" bIns="0" rtlCol="0" anchor="t">
               <a:spAutoFit/>
             </a:bodyPr>
             <a:lstStyle/>
@@ -8180,7 +8188,7 @@
 </file>
 
 <file path=ppt/slides/slide6.xml><?xml version="1.0" encoding="utf-8"?>
-<p:sld xmlns:p="http://schemas.openxmlformats.org/presentationml/2006/main" xmlns:a="http://schemas.openxmlformats.org/drawingml/2006/main" xmlns:r="http://schemas.openxmlformats.org/officeDocument/2006/relationships">
+<p:sld xmlns:a="http://schemas.openxmlformats.org/drawingml/2006/main" xmlns:r="http://schemas.openxmlformats.org/officeDocument/2006/relationships" xmlns:p="http://schemas.openxmlformats.org/presentationml/2006/main">
   <p:cSld>
     <p:spTree>
       <p:nvGrpSpPr>
@@ -8198,12 +8206,12 @@
       </p:grpSpPr>
       <p:sp>
         <p:nvSpPr>
-          <p:cNvPr name="Freeform 2" id="2"/>
+          <p:cNvPr id="2" name="Freeform 2"/>
           <p:cNvSpPr/>
           <p:nvPr/>
         </p:nvSpPr>
         <p:spPr>
-          <a:xfrm flipH="false" flipV="false" rot="-10800000">
+          <a:xfrm rot="-10800000">
             <a:off x="0" y="0"/>
             <a:ext cx="18288000" cy="10287000"/>
           </a:xfrm>
@@ -8212,9 +8220,9 @@
             <a:gdLst/>
             <a:ahLst/>
             <a:cxnLst/>
-            <a:rect r="r" b="b" t="t" l="l"/>
+            <a:rect l="l" t="t" r="r" b="b"/>
             <a:pathLst>
-              <a:path h="10287000" w="18288000">
+              <a:path w="18288000" h="10287000">
                 <a:moveTo>
                   <a:pt x="0" y="0"/>
                 </a:moveTo>
@@ -8237,19 +8245,19 @@
           <a:blipFill>
             <a:blip r:embed="rId2"/>
             <a:stretch>
-              <a:fillRect l="-116" t="0" r="-116" b="-232"/>
+              <a:fillRect l="-116" r="-116" b="-232"/>
             </a:stretch>
           </a:blipFill>
         </p:spPr>
       </p:sp>
       <p:grpSp>
         <p:nvGrpSpPr>
-          <p:cNvPr name="Group 3" id="3"/>
+          <p:cNvPr id="3" name="Group 3"/>
           <p:cNvGrpSpPr/>
           <p:nvPr/>
         </p:nvGrpSpPr>
         <p:grpSpPr>
-          <a:xfrm rot="0">
+          <a:xfrm>
             <a:off x="0" y="0"/>
             <a:ext cx="18288000" cy="10287000"/>
             <a:chOff x="0" y="0"/>
@@ -8258,12 +8266,12 @@
         </p:grpSpPr>
         <p:sp>
           <p:nvSpPr>
-            <p:cNvPr name="Freeform 4" id="4"/>
+            <p:cNvPr id="4" name="Freeform 4"/>
             <p:cNvSpPr/>
             <p:nvPr/>
           </p:nvSpPr>
           <p:spPr>
-            <a:xfrm flipH="false" flipV="false" rot="0">
+            <a:xfrm>
               <a:off x="0" y="0"/>
               <a:ext cx="4816592" cy="2709333"/>
             </a:xfrm>
@@ -8272,9 +8280,9 @@
               <a:gdLst/>
               <a:ahLst/>
               <a:cxnLst/>
-              <a:rect r="r" b="b" t="t" l="l"/>
+              <a:rect l="l" t="t" r="r" b="b"/>
               <a:pathLst>
-                <a:path h="2709333" w="4816592">
+                <a:path w="4816592" h="2709333">
                   <a:moveTo>
                     <a:pt x="0" y="0"/>
                   </a:moveTo>
@@ -8300,8 +8308,8 @@
         </p:sp>
         <p:sp>
           <p:nvSpPr>
-            <p:cNvPr name="TextBox 5" id="5"/>
-            <p:cNvSpPr txBox="true"/>
+            <p:cNvPr id="5" name="TextBox 5"/>
+            <p:cNvSpPr txBox="1"/>
             <p:nvPr/>
           </p:nvSpPr>
           <p:spPr>
@@ -8314,7 +8322,7 @@
             </a:prstGeom>
           </p:spPr>
           <p:txBody>
-            <a:bodyPr anchor="ctr" rtlCol="false" tIns="50800" lIns="50800" bIns="50800" rIns="50800"/>
+            <a:bodyPr lIns="50800" tIns="50800" rIns="50800" bIns="50800" rtlCol="0" anchor="ctr"/>
             <a:lstStyle/>
             <a:p>
               <a:pPr algn="ctr">
@@ -8322,18 +8330,19 @@
                   <a:spcPts val="2659"/>
                 </a:lnSpc>
               </a:pPr>
+              <a:endParaRPr/>
             </a:p>
           </p:txBody>
         </p:sp>
       </p:grpSp>
       <p:grpSp>
         <p:nvGrpSpPr>
-          <p:cNvPr name="Group 6" id="6"/>
+          <p:cNvPr id="6" name="Group 6"/>
           <p:cNvGrpSpPr/>
           <p:nvPr/>
         </p:nvGrpSpPr>
         <p:grpSpPr>
-          <a:xfrm rot="0">
+          <a:xfrm>
             <a:off x="0" y="9612716"/>
             <a:ext cx="18288000" cy="674284"/>
             <a:chOff x="0" y="0"/>
@@ -8342,12 +8351,12 @@
         </p:grpSpPr>
         <p:sp>
           <p:nvSpPr>
-            <p:cNvPr name="Freeform 7" id="7"/>
+            <p:cNvPr id="7" name="Freeform 7"/>
             <p:cNvSpPr/>
             <p:nvPr/>
           </p:nvSpPr>
           <p:spPr>
-            <a:xfrm flipH="false" flipV="false" rot="0">
+            <a:xfrm>
               <a:off x="0" y="0"/>
               <a:ext cx="4816592" cy="177589"/>
             </a:xfrm>
@@ -8356,9 +8365,9 @@
               <a:gdLst/>
               <a:ahLst/>
               <a:cxnLst/>
-              <a:rect r="r" b="b" t="t" l="l"/>
+              <a:rect l="l" t="t" r="r" b="b"/>
               <a:pathLst>
-                <a:path h="177589" w="4816592">
+                <a:path w="4816592" h="177589">
                   <a:moveTo>
                     <a:pt x="0" y="0"/>
                   </a:moveTo>
@@ -8384,8 +8393,8 @@
         </p:sp>
         <p:sp>
           <p:nvSpPr>
-            <p:cNvPr name="TextBox 8" id="8"/>
-            <p:cNvSpPr txBox="true"/>
+            <p:cNvPr id="8" name="TextBox 8"/>
+            <p:cNvSpPr txBox="1"/>
             <p:nvPr/>
           </p:nvSpPr>
           <p:spPr>
@@ -8398,7 +8407,7 @@
             </a:prstGeom>
           </p:spPr>
           <p:txBody>
-            <a:bodyPr anchor="ctr" rtlCol="false" tIns="50800" lIns="50800" bIns="50800" rIns="50800"/>
+            <a:bodyPr lIns="50800" tIns="50800" rIns="50800" bIns="50800" rtlCol="0" anchor="ctr"/>
             <a:lstStyle/>
             <a:p>
               <a:pPr algn="ctr">
@@ -8406,18 +8415,19 @@
                   <a:spcPts val="2659"/>
                 </a:lnSpc>
               </a:pPr>
+              <a:endParaRPr/>
             </a:p>
           </p:txBody>
         </p:sp>
       </p:grpSp>
       <p:grpSp>
         <p:nvGrpSpPr>
-          <p:cNvPr name="Group 9" id="9"/>
+          <p:cNvPr id="9" name="Group 9"/>
           <p:cNvGrpSpPr/>
           <p:nvPr/>
         </p:nvGrpSpPr>
         <p:grpSpPr>
-          <a:xfrm rot="0">
+          <a:xfrm>
             <a:off x="0" y="0"/>
             <a:ext cx="18288000" cy="1387754"/>
             <a:chOff x="0" y="0"/>
@@ -8426,12 +8436,12 @@
         </p:grpSpPr>
         <p:sp>
           <p:nvSpPr>
-            <p:cNvPr name="Freeform 10" id="10"/>
+            <p:cNvPr id="10" name="Freeform 10"/>
             <p:cNvSpPr/>
             <p:nvPr/>
           </p:nvSpPr>
           <p:spPr>
-            <a:xfrm flipH="false" flipV="false" rot="0">
+            <a:xfrm>
               <a:off x="0" y="0"/>
               <a:ext cx="4816592" cy="365499"/>
             </a:xfrm>
@@ -8440,9 +8450,9 @@
               <a:gdLst/>
               <a:ahLst/>
               <a:cxnLst/>
-              <a:rect r="r" b="b" t="t" l="l"/>
+              <a:rect l="l" t="t" r="r" b="b"/>
               <a:pathLst>
-                <a:path h="365499" w="4816592">
+                <a:path w="4816592" h="365499">
                   <a:moveTo>
                     <a:pt x="0" y="0"/>
                   </a:moveTo>
@@ -8477,8 +8487,8 @@
         </p:sp>
         <p:sp>
           <p:nvSpPr>
-            <p:cNvPr name="TextBox 11" id="11"/>
-            <p:cNvSpPr txBox="true"/>
+            <p:cNvPr id="11" name="TextBox 11"/>
+            <p:cNvSpPr txBox="1"/>
             <p:nvPr/>
           </p:nvSpPr>
           <p:spPr>
@@ -8491,7 +8501,7 @@
             </a:prstGeom>
           </p:spPr>
           <p:txBody>
-            <a:bodyPr anchor="ctr" rtlCol="false" tIns="50800" lIns="50800" bIns="50800" rIns="50800"/>
+            <a:bodyPr lIns="50800" tIns="50800" rIns="50800" bIns="50800" rtlCol="0" anchor="ctr"/>
             <a:lstStyle/>
             <a:p>
               <a:pPr algn="ctr">
@@ -8499,18 +8509,19 @@
                   <a:spcPts val="2659"/>
                 </a:lnSpc>
               </a:pPr>
+              <a:endParaRPr/>
             </a:p>
           </p:txBody>
         </p:sp>
       </p:grpSp>
       <p:sp>
         <p:nvSpPr>
-          <p:cNvPr name="TextBox 12" id="12"/>
-          <p:cNvSpPr txBox="true"/>
+          <p:cNvPr id="12" name="TextBox 12"/>
+          <p:cNvSpPr txBox="1"/>
           <p:nvPr/>
         </p:nvSpPr>
         <p:spPr>
-          <a:xfrm rot="0">
+          <a:xfrm>
             <a:off x="1404625" y="2958506"/>
             <a:ext cx="4857304" cy="6270545"/>
           </a:xfrm>
@@ -8519,7 +8530,7 @@
           </a:prstGeom>
         </p:spPr>
         <p:txBody>
-          <a:bodyPr anchor="t" rtlCol="false" tIns="0" lIns="0" bIns="0" rIns="0">
+          <a:bodyPr lIns="0" tIns="0" rIns="0" bIns="0" rtlCol="0" anchor="t">
             <a:spAutoFit/>
           </a:bodyPr>
           <a:lstStyle/>
@@ -8529,6 +8540,7 @@
                 <a:spcPts val="4554"/>
               </a:lnSpc>
             </a:pPr>
+            <a:endParaRPr/>
           </a:p>
           <a:p>
             <a:pPr algn="l">
@@ -8549,19 +8561,7 @@
                 <a:cs typeface="Gagalin"/>
                 <a:sym typeface="Gagalin"/>
               </a:rPr>
-              <a:t>• Ben</a:t>
-            </a:r>
-            <a:r>
-              <a:rPr lang="en-US" sz="3253">
-                <a:solidFill>
-                  <a:srgbClr val="FFDE59"/>
-                </a:solidFill>
-                <a:latin typeface="Gagalin"/>
-                <a:ea typeface="Gagalin"/>
-                <a:cs typeface="Gagalin"/>
-                <a:sym typeface="Gagalin"/>
-              </a:rPr>
-              <a:t>efits of the solution</a:t>
+              <a:t>• Benefits of the solution</a:t>
             </a:r>
           </a:p>
           <a:p>
@@ -8573,6 +8573,15 @@
                 <a:spcPct val="0"/>
               </a:spcBef>
             </a:pPr>
+            <a:endParaRPr lang="en-US" sz="3253">
+              <a:solidFill>
+                <a:srgbClr val="FFDE59"/>
+              </a:solidFill>
+              <a:latin typeface="Gagalin"/>
+              <a:ea typeface="Gagalin"/>
+              <a:cs typeface="Gagalin"/>
+              <a:sym typeface="Gagalin"/>
+            </a:endParaRPr>
           </a:p>
           <a:p>
             <a:pPr algn="l">
@@ -8605,6 +8614,15 @@
                 <a:spcPct val="0"/>
               </a:spcBef>
             </a:pPr>
+            <a:endParaRPr lang="en-US" sz="3253">
+              <a:solidFill>
+                <a:srgbClr val="FFDE59"/>
+              </a:solidFill>
+              <a:latin typeface="Gagalin"/>
+              <a:ea typeface="Gagalin"/>
+              <a:cs typeface="Gagalin"/>
+              <a:sym typeface="Gagalin"/>
+            </a:endParaRPr>
           </a:p>
           <a:p>
             <a:pPr algn="l">
@@ -8637,6 +8655,15 @@
                 <a:spcPct val="0"/>
               </a:spcBef>
             </a:pPr>
+            <a:endParaRPr lang="en-US" sz="3253">
+              <a:solidFill>
+                <a:srgbClr val="FFDE59"/>
+              </a:solidFill>
+              <a:latin typeface="Gagalin"/>
+              <a:ea typeface="Gagalin"/>
+              <a:cs typeface="Gagalin"/>
+              <a:sym typeface="Gagalin"/>
+            </a:endParaRPr>
           </a:p>
           <a:p>
             <a:pPr algn="l">
@@ -8713,17 +8740,26 @@
                 <a:spcPct val="0"/>
               </a:spcBef>
             </a:pPr>
+            <a:endParaRPr lang="en-US" sz="3253">
+              <a:solidFill>
+                <a:srgbClr val="FFDE59"/>
+              </a:solidFill>
+              <a:latin typeface="Gagalin"/>
+              <a:ea typeface="Gagalin"/>
+              <a:cs typeface="Gagalin"/>
+              <a:sym typeface="Gagalin"/>
+            </a:endParaRPr>
           </a:p>
         </p:txBody>
       </p:sp>
       <p:sp>
         <p:nvSpPr>
-          <p:cNvPr name="TextBox 13" id="13"/>
-          <p:cNvSpPr txBox="true"/>
+          <p:cNvPr id="13" name="TextBox 13"/>
+          <p:cNvSpPr txBox="1"/>
           <p:nvPr/>
         </p:nvSpPr>
         <p:spPr>
-          <a:xfrm rot="0">
+          <a:xfrm>
             <a:off x="17781653" y="9660062"/>
             <a:ext cx="215950" cy="580390"/>
           </a:xfrm>
@@ -8732,7 +8768,7 @@
           </a:prstGeom>
         </p:spPr>
         <p:txBody>
-          <a:bodyPr anchor="t" rtlCol="false" tIns="0" lIns="0" bIns="0" rIns="0">
+          <a:bodyPr lIns="0" tIns="0" rIns="0" bIns="0" rtlCol="0" anchor="t">
             <a:spAutoFit/>
           </a:bodyPr>
           <a:lstStyle/>
@@ -8762,12 +8798,12 @@
       </p:sp>
       <p:sp>
         <p:nvSpPr>
-          <p:cNvPr name="TextBox 14" id="14"/>
-          <p:cNvSpPr txBox="true"/>
+          <p:cNvPr id="14" name="TextBox 14"/>
+          <p:cNvSpPr txBox="1"/>
           <p:nvPr/>
         </p:nvSpPr>
         <p:spPr>
-          <a:xfrm rot="0">
+          <a:xfrm>
             <a:off x="5430112" y="1873057"/>
             <a:ext cx="8421531" cy="1411525"/>
           </a:xfrm>
@@ -8776,7 +8812,7 @@
           </a:prstGeom>
         </p:spPr>
         <p:txBody>
-          <a:bodyPr anchor="t" rtlCol="false" tIns="0" lIns="0" bIns="0" rIns="0">
+          <a:bodyPr lIns="0" tIns="0" rIns="0" bIns="0" rtlCol="0" anchor="t">
             <a:spAutoFit/>
           </a:bodyPr>
           <a:lstStyle/>
@@ -8799,19 +8835,7 @@
                 <a:cs typeface="Gagalin"/>
                 <a:sym typeface="Gagalin"/>
               </a:rPr>
-              <a:t>Impact &amp; Futu</a:t>
-            </a:r>
-            <a:r>
-              <a:rPr lang="en-US" sz="4053">
-                <a:solidFill>
-                  <a:srgbClr val="FFFFFF"/>
-                </a:solidFill>
-                <a:latin typeface="Gagalin"/>
-                <a:ea typeface="Gagalin"/>
-                <a:cs typeface="Gagalin"/>
-                <a:sym typeface="Gagalin"/>
-              </a:rPr>
-              <a:t>re Scope Impact</a:t>
+              <a:t>Impact &amp; Future Scope Impact</a:t>
             </a:r>
           </a:p>
           <a:p>
@@ -8823,17 +8847,26 @@
                 <a:spcPct val="0"/>
               </a:spcBef>
             </a:pPr>
+            <a:endParaRPr lang="en-US" sz="4053">
+              <a:solidFill>
+                <a:srgbClr val="FFFFFF"/>
+              </a:solidFill>
+              <a:latin typeface="Gagalin"/>
+              <a:ea typeface="Gagalin"/>
+              <a:cs typeface="Gagalin"/>
+              <a:sym typeface="Gagalin"/>
+            </a:endParaRPr>
           </a:p>
         </p:txBody>
       </p:sp>
       <p:sp>
         <p:nvSpPr>
-          <p:cNvPr name="Freeform 15" id="15"/>
+          <p:cNvPr id="15" name="Freeform 15"/>
           <p:cNvSpPr/>
           <p:nvPr/>
         </p:nvSpPr>
         <p:spPr>
-          <a:xfrm flipH="false" flipV="false" rot="0">
+          <a:xfrm>
             <a:off x="230308" y="179485"/>
             <a:ext cx="3140115" cy="1083728"/>
           </a:xfrm>
@@ -8842,9 +8875,9 @@
             <a:gdLst/>
             <a:ahLst/>
             <a:cxnLst/>
-            <a:rect r="r" b="b" t="t" l="l"/>
+            <a:rect l="l" t="t" r="r" b="b"/>
             <a:pathLst>
-              <a:path h="1083728" w="3140115">
+              <a:path w="3140115" h="1083728">
                 <a:moveTo>
                   <a:pt x="0" y="0"/>
                 </a:moveTo>
@@ -8867,19 +8900,19 @@
           <a:blipFill>
             <a:blip r:embed="rId3"/>
             <a:stretch>
-              <a:fillRect l="0" t="0" r="-17991" b="0"/>
+              <a:fillRect r="-17991"/>
             </a:stretch>
           </a:blipFill>
         </p:spPr>
       </p:sp>
       <p:grpSp>
         <p:nvGrpSpPr>
-          <p:cNvPr name="Group 16" id="16"/>
+          <p:cNvPr id="16" name="Group 16"/>
           <p:cNvGrpSpPr/>
           <p:nvPr/>
         </p:nvGrpSpPr>
         <p:grpSpPr>
-          <a:xfrm rot="0">
+          <a:xfrm>
             <a:off x="15042849" y="334869"/>
             <a:ext cx="2744013" cy="745256"/>
             <a:chOff x="0" y="0"/>
@@ -8888,12 +8921,12 @@
         </p:grpSpPr>
         <p:sp>
           <p:nvSpPr>
-            <p:cNvPr name="Freeform 17" id="17"/>
+            <p:cNvPr id="17" name="Freeform 17"/>
             <p:cNvSpPr/>
             <p:nvPr/>
           </p:nvSpPr>
           <p:spPr>
-            <a:xfrm flipH="false" flipV="false" rot="0">
+            <a:xfrm>
               <a:off x="0" y="0"/>
               <a:ext cx="832935" cy="993675"/>
             </a:xfrm>
@@ -8902,9 +8935,9 @@
               <a:gdLst/>
               <a:ahLst/>
               <a:cxnLst/>
-              <a:rect r="r" b="b" t="t" l="l"/>
+              <a:rect l="l" t="t" r="r" b="b"/>
               <a:pathLst>
-                <a:path h="993675" w="832935">
+                <a:path w="832935" h="993675">
                   <a:moveTo>
                     <a:pt x="0" y="0"/>
                   </a:moveTo>
@@ -8934,12 +8967,12 @@
         </p:sp>
         <p:sp>
           <p:nvSpPr>
-            <p:cNvPr name="TextBox 18" id="18"/>
-            <p:cNvSpPr txBox="true"/>
+            <p:cNvPr id="18" name="TextBox 18"/>
+            <p:cNvSpPr txBox="1"/>
             <p:nvPr/>
           </p:nvSpPr>
           <p:spPr>
-            <a:xfrm rot="0">
+            <a:xfrm>
               <a:off x="946119" y="144465"/>
               <a:ext cx="2356744" cy="562598"/>
             </a:xfrm>
@@ -8948,7 +8981,7 @@
             </a:prstGeom>
           </p:spPr>
           <p:txBody>
-            <a:bodyPr anchor="t" rtlCol="false" tIns="0" lIns="0" bIns="0" rIns="0">
+            <a:bodyPr lIns="0" tIns="0" rIns="0" bIns="0" rtlCol="0" anchor="t">
               <a:spAutoFit/>
             </a:bodyPr>
             <a:lstStyle/>
@@ -8978,12 +9011,12 @@
         </p:sp>
         <p:sp>
           <p:nvSpPr>
-            <p:cNvPr name="TextBox 19" id="19"/>
-            <p:cNvSpPr txBox="true"/>
+            <p:cNvPr id="19" name="TextBox 19"/>
+            <p:cNvSpPr txBox="1"/>
             <p:nvPr/>
           </p:nvSpPr>
           <p:spPr>
-            <a:xfrm rot="0">
+            <a:xfrm>
               <a:off x="691558" y="676707"/>
               <a:ext cx="2967126" cy="198664"/>
             </a:xfrm>
@@ -8992,7 +9025,7 @@
             </a:prstGeom>
           </p:spPr>
           <p:txBody>
-            <a:bodyPr anchor="t" rtlCol="false" tIns="0" lIns="0" bIns="0" rIns="0">
+            <a:bodyPr lIns="0" tIns="0" rIns="0" bIns="0" rtlCol="0" anchor="t">
               <a:spAutoFit/>
             </a:bodyPr>
             <a:lstStyle/>
@@ -9023,12 +9056,12 @@
       </p:grpSp>
       <p:sp>
         <p:nvSpPr>
-          <p:cNvPr name="TextBox 20" id="20"/>
-          <p:cNvSpPr txBox="true"/>
+          <p:cNvPr id="20" name="TextBox 20"/>
+          <p:cNvSpPr txBox="1"/>
           <p:nvPr/>
         </p:nvSpPr>
         <p:spPr>
-          <a:xfrm rot="0">
+          <a:xfrm>
             <a:off x="7493374" y="9832687"/>
             <a:ext cx="3083970" cy="273240"/>
           </a:xfrm>
@@ -9037,7 +9070,7 @@
           </a:prstGeom>
         </p:spPr>
         <p:txBody>
-          <a:bodyPr anchor="t" rtlCol="false" tIns="0" lIns="0" bIns="0" rIns="0">
+          <a:bodyPr lIns="0" tIns="0" rIns="0" bIns="0" rtlCol="0" anchor="t">
             <a:spAutoFit/>
           </a:bodyPr>
           <a:lstStyle/>
@@ -9067,12 +9100,12 @@
       </p:sp>
       <p:grpSp>
         <p:nvGrpSpPr>
-          <p:cNvPr name="Group 21" id="21"/>
+          <p:cNvPr id="21" name="Group 21"/>
           <p:cNvGrpSpPr/>
           <p:nvPr/>
         </p:nvGrpSpPr>
         <p:grpSpPr>
-          <a:xfrm rot="0">
+          <a:xfrm>
             <a:off x="7397943" y="165633"/>
             <a:ext cx="3274833" cy="1083728"/>
             <a:chOff x="0" y="0"/>
@@ -9081,12 +9114,12 @@
         </p:grpSpPr>
         <p:sp>
           <p:nvSpPr>
-            <p:cNvPr name="TextBox 22" id="22"/>
-            <p:cNvSpPr txBox="true"/>
+            <p:cNvPr id="22" name="TextBox 22"/>
+            <p:cNvSpPr txBox="1"/>
             <p:nvPr/>
           </p:nvSpPr>
           <p:spPr>
-            <a:xfrm rot="0">
+            <a:xfrm>
               <a:off x="0" y="-142875"/>
               <a:ext cx="3820161" cy="1523444"/>
             </a:xfrm>
@@ -9095,7 +9128,7 @@
             </a:prstGeom>
           </p:spPr>
           <p:txBody>
-            <a:bodyPr anchor="t" rtlCol="false" tIns="0" lIns="0" bIns="0" rIns="0">
+            <a:bodyPr lIns="0" tIns="0" rIns="0" bIns="0" rtlCol="0" anchor="t">
               <a:spAutoFit/>
             </a:bodyPr>
             <a:lstStyle/>
@@ -9125,12 +9158,12 @@
         </p:sp>
         <p:sp>
           <p:nvSpPr>
-            <p:cNvPr name="TextBox 23" id="23"/>
-            <p:cNvSpPr txBox="true"/>
+            <p:cNvPr id="23" name="TextBox 23"/>
+            <p:cNvSpPr txBox="1"/>
             <p:nvPr/>
           </p:nvSpPr>
           <p:spPr>
-            <a:xfrm rot="0">
+            <a:xfrm>
               <a:off x="68219" y="-78472"/>
               <a:ext cx="3820161" cy="1523444"/>
             </a:xfrm>
@@ -9139,7 +9172,7 @@
             </a:prstGeom>
           </p:spPr>
           <p:txBody>
-            <a:bodyPr anchor="t" rtlCol="false" tIns="0" lIns="0" bIns="0" rIns="0">
+            <a:bodyPr lIns="0" tIns="0" rIns="0" bIns="0" rtlCol="0" anchor="t">
               <a:spAutoFit/>
             </a:bodyPr>
             <a:lstStyle/>
@@ -9169,12 +9202,12 @@
         </p:sp>
         <p:sp>
           <p:nvSpPr>
-            <p:cNvPr name="TextBox 24" id="24"/>
-            <p:cNvSpPr txBox="true"/>
+            <p:cNvPr id="24" name="TextBox 24"/>
+            <p:cNvSpPr txBox="1"/>
             <p:nvPr/>
           </p:nvSpPr>
           <p:spPr>
-            <a:xfrm rot="0">
+            <a:xfrm>
               <a:off x="33321" y="-106547"/>
               <a:ext cx="3820161" cy="1523444"/>
             </a:xfrm>
@@ -9183,7 +9216,7 @@
             </a:prstGeom>
           </p:spPr>
           <p:txBody>
-            <a:bodyPr anchor="t" rtlCol="false" tIns="0" lIns="0" bIns="0" rIns="0">
+            <a:bodyPr lIns="0" tIns="0" rIns="0" bIns="0" rtlCol="0" anchor="t">
               <a:spAutoFit/>
             </a:bodyPr>
             <a:lstStyle/>
@@ -9213,12 +9246,12 @@
         </p:sp>
         <p:sp>
           <p:nvSpPr>
-            <p:cNvPr name="TextBox 25" id="25"/>
-            <p:cNvSpPr txBox="true"/>
+            <p:cNvPr id="25" name="TextBox 25"/>
+            <p:cNvSpPr txBox="1"/>
             <p:nvPr/>
           </p:nvSpPr>
           <p:spPr>
-            <a:xfrm rot="0">
+            <a:xfrm>
               <a:off x="3340520" y="415474"/>
               <a:ext cx="1025923" cy="965094"/>
             </a:xfrm>
@@ -9227,7 +9260,7 @@
             </a:prstGeom>
           </p:spPr>
           <p:txBody>
-            <a:bodyPr anchor="t" rtlCol="false" tIns="0" lIns="0" bIns="0" rIns="0">
+            <a:bodyPr lIns="0" tIns="0" rIns="0" bIns="0" rtlCol="0" anchor="t">
               <a:spAutoFit/>
             </a:bodyPr>
             <a:lstStyle/>
@@ -9265,7 +9298,7 @@
 </file>
 
 <file path=ppt/slides/slide7.xml><?xml version="1.0" encoding="utf-8"?>
-<p:sld xmlns:p="http://schemas.openxmlformats.org/presentationml/2006/main" xmlns:a="http://schemas.openxmlformats.org/drawingml/2006/main" xmlns:r="http://schemas.openxmlformats.org/officeDocument/2006/relationships">
+<p:sld xmlns:a="http://schemas.openxmlformats.org/drawingml/2006/main" xmlns:r="http://schemas.openxmlformats.org/officeDocument/2006/relationships" xmlns:p="http://schemas.openxmlformats.org/presentationml/2006/main">
   <p:cSld>
     <p:spTree>
       <p:nvGrpSpPr>
@@ -9283,12 +9316,12 @@
       </p:grpSpPr>
       <p:sp>
         <p:nvSpPr>
-          <p:cNvPr name="Freeform 2" id="2"/>
+          <p:cNvPr id="2" name="Freeform 2"/>
           <p:cNvSpPr/>
           <p:nvPr/>
         </p:nvSpPr>
         <p:spPr>
-          <a:xfrm flipH="false" flipV="false" rot="-10800000">
+          <a:xfrm rot="-10800000">
             <a:off x="0" y="0"/>
             <a:ext cx="18288000" cy="10287000"/>
           </a:xfrm>
@@ -9297,9 +9330,9 @@
             <a:gdLst/>
             <a:ahLst/>
             <a:cxnLst/>
-            <a:rect r="r" b="b" t="t" l="l"/>
+            <a:rect l="l" t="t" r="r" b="b"/>
             <a:pathLst>
-              <a:path h="10287000" w="18288000">
+              <a:path w="18288000" h="10287000">
                 <a:moveTo>
                   <a:pt x="0" y="0"/>
                 </a:moveTo>
@@ -9322,19 +9355,19 @@
           <a:blipFill>
             <a:blip r:embed="rId2"/>
             <a:stretch>
-              <a:fillRect l="-116" t="0" r="-116" b="-232"/>
+              <a:fillRect l="-116" r="-116" b="-232"/>
             </a:stretch>
           </a:blipFill>
         </p:spPr>
       </p:sp>
       <p:grpSp>
         <p:nvGrpSpPr>
-          <p:cNvPr name="Group 3" id="3"/>
+          <p:cNvPr id="3" name="Group 3"/>
           <p:cNvGrpSpPr/>
           <p:nvPr/>
         </p:nvGrpSpPr>
         <p:grpSpPr>
-          <a:xfrm rot="0">
+          <a:xfrm>
             <a:off x="0" y="0"/>
             <a:ext cx="18288000" cy="10287000"/>
             <a:chOff x="0" y="0"/>
@@ -9343,12 +9376,12 @@
         </p:grpSpPr>
         <p:sp>
           <p:nvSpPr>
-            <p:cNvPr name="Freeform 4" id="4"/>
+            <p:cNvPr id="4" name="Freeform 4"/>
             <p:cNvSpPr/>
             <p:nvPr/>
           </p:nvSpPr>
           <p:spPr>
-            <a:xfrm flipH="false" flipV="false" rot="0">
+            <a:xfrm>
               <a:off x="0" y="0"/>
               <a:ext cx="4816592" cy="2709333"/>
             </a:xfrm>
@@ -9357,9 +9390,9 @@
               <a:gdLst/>
               <a:ahLst/>
               <a:cxnLst/>
-              <a:rect r="r" b="b" t="t" l="l"/>
+              <a:rect l="l" t="t" r="r" b="b"/>
               <a:pathLst>
-                <a:path h="2709333" w="4816592">
+                <a:path w="4816592" h="2709333">
                   <a:moveTo>
                     <a:pt x="0" y="0"/>
                   </a:moveTo>
@@ -9385,8 +9418,8 @@
         </p:sp>
         <p:sp>
           <p:nvSpPr>
-            <p:cNvPr name="TextBox 5" id="5"/>
-            <p:cNvSpPr txBox="true"/>
+            <p:cNvPr id="5" name="TextBox 5"/>
+            <p:cNvSpPr txBox="1"/>
             <p:nvPr/>
           </p:nvSpPr>
           <p:spPr>
@@ -9399,7 +9432,7 @@
             </a:prstGeom>
           </p:spPr>
           <p:txBody>
-            <a:bodyPr anchor="ctr" rtlCol="false" tIns="50800" lIns="50800" bIns="50800" rIns="50800"/>
+            <a:bodyPr lIns="50800" tIns="50800" rIns="50800" bIns="50800" rtlCol="0" anchor="ctr"/>
             <a:lstStyle/>
             <a:p>
               <a:pPr algn="ctr">
@@ -9407,18 +9440,19 @@
                   <a:spcPts val="2659"/>
                 </a:lnSpc>
               </a:pPr>
+              <a:endParaRPr/>
             </a:p>
           </p:txBody>
         </p:sp>
       </p:grpSp>
       <p:grpSp>
         <p:nvGrpSpPr>
-          <p:cNvPr name="Group 6" id="6"/>
+          <p:cNvPr id="6" name="Group 6"/>
           <p:cNvGrpSpPr/>
           <p:nvPr/>
         </p:nvGrpSpPr>
         <p:grpSpPr>
-          <a:xfrm rot="0">
+          <a:xfrm>
             <a:off x="0" y="9612716"/>
             <a:ext cx="18288000" cy="674284"/>
             <a:chOff x="0" y="0"/>
@@ -9427,12 +9461,12 @@
         </p:grpSpPr>
         <p:sp>
           <p:nvSpPr>
-            <p:cNvPr name="Freeform 7" id="7"/>
+            <p:cNvPr id="7" name="Freeform 7"/>
             <p:cNvSpPr/>
             <p:nvPr/>
           </p:nvSpPr>
           <p:spPr>
-            <a:xfrm flipH="false" flipV="false" rot="0">
+            <a:xfrm>
               <a:off x="0" y="0"/>
               <a:ext cx="4816592" cy="177589"/>
             </a:xfrm>
@@ -9441,9 +9475,9 @@
               <a:gdLst/>
               <a:ahLst/>
               <a:cxnLst/>
-              <a:rect r="r" b="b" t="t" l="l"/>
+              <a:rect l="l" t="t" r="r" b="b"/>
               <a:pathLst>
-                <a:path h="177589" w="4816592">
+                <a:path w="4816592" h="177589">
                   <a:moveTo>
                     <a:pt x="0" y="0"/>
                   </a:moveTo>
@@ -9469,8 +9503,8 @@
         </p:sp>
         <p:sp>
           <p:nvSpPr>
-            <p:cNvPr name="TextBox 8" id="8"/>
-            <p:cNvSpPr txBox="true"/>
+            <p:cNvPr id="8" name="TextBox 8"/>
+            <p:cNvSpPr txBox="1"/>
             <p:nvPr/>
           </p:nvSpPr>
           <p:spPr>
@@ -9483,7 +9517,7 @@
             </a:prstGeom>
           </p:spPr>
           <p:txBody>
-            <a:bodyPr anchor="ctr" rtlCol="false" tIns="50800" lIns="50800" bIns="50800" rIns="50800"/>
+            <a:bodyPr lIns="50800" tIns="50800" rIns="50800" bIns="50800" rtlCol="0" anchor="ctr"/>
             <a:lstStyle/>
             <a:p>
               <a:pPr algn="ctr">
@@ -9491,18 +9525,19 @@
                   <a:spcPts val="2659"/>
                 </a:lnSpc>
               </a:pPr>
+              <a:endParaRPr/>
             </a:p>
           </p:txBody>
         </p:sp>
       </p:grpSp>
       <p:grpSp>
         <p:nvGrpSpPr>
-          <p:cNvPr name="Group 9" id="9"/>
+          <p:cNvPr id="9" name="Group 9"/>
           <p:cNvGrpSpPr/>
           <p:nvPr/>
         </p:nvGrpSpPr>
         <p:grpSpPr>
-          <a:xfrm rot="0">
+          <a:xfrm>
             <a:off x="0" y="0"/>
             <a:ext cx="18288000" cy="1387754"/>
             <a:chOff x="0" y="0"/>
@@ -9511,12 +9546,12 @@
         </p:grpSpPr>
         <p:sp>
           <p:nvSpPr>
-            <p:cNvPr name="Freeform 10" id="10"/>
+            <p:cNvPr id="10" name="Freeform 10"/>
             <p:cNvSpPr/>
             <p:nvPr/>
           </p:nvSpPr>
           <p:spPr>
-            <a:xfrm flipH="false" flipV="false" rot="0">
+            <a:xfrm>
               <a:off x="0" y="0"/>
               <a:ext cx="4816592" cy="365499"/>
             </a:xfrm>
@@ -9525,9 +9560,9 @@
               <a:gdLst/>
               <a:ahLst/>
               <a:cxnLst/>
-              <a:rect r="r" b="b" t="t" l="l"/>
+              <a:rect l="l" t="t" r="r" b="b"/>
               <a:pathLst>
-                <a:path h="365499" w="4816592">
+                <a:path w="4816592" h="365499">
                   <a:moveTo>
                     <a:pt x="0" y="0"/>
                   </a:moveTo>
@@ -9562,8 +9597,8 @@
         </p:sp>
         <p:sp>
           <p:nvSpPr>
-            <p:cNvPr name="TextBox 11" id="11"/>
-            <p:cNvSpPr txBox="true"/>
+            <p:cNvPr id="11" name="TextBox 11"/>
+            <p:cNvSpPr txBox="1"/>
             <p:nvPr/>
           </p:nvSpPr>
           <p:spPr>
@@ -9576,7 +9611,7 @@
             </a:prstGeom>
           </p:spPr>
           <p:txBody>
-            <a:bodyPr anchor="ctr" rtlCol="false" tIns="50800" lIns="50800" bIns="50800" rIns="50800"/>
+            <a:bodyPr lIns="50800" tIns="50800" rIns="50800" bIns="50800" rtlCol="0" anchor="ctr"/>
             <a:lstStyle/>
             <a:p>
               <a:pPr algn="ctr">
@@ -9584,18 +9619,19 @@
                   <a:spcPts val="2659"/>
                 </a:lnSpc>
               </a:pPr>
+              <a:endParaRPr/>
             </a:p>
           </p:txBody>
         </p:sp>
       </p:grpSp>
       <p:sp>
         <p:nvSpPr>
-          <p:cNvPr name="TextBox 12" id="12"/>
-          <p:cNvSpPr txBox="true"/>
+          <p:cNvPr id="12" name="TextBox 12"/>
+          <p:cNvSpPr txBox="1"/>
           <p:nvPr/>
         </p:nvSpPr>
         <p:spPr>
-          <a:xfrm rot="0">
+          <a:xfrm>
             <a:off x="17788350" y="9660062"/>
             <a:ext cx="202555" cy="580390"/>
           </a:xfrm>
@@ -9604,7 +9640,7 @@
           </a:prstGeom>
         </p:spPr>
         <p:txBody>
-          <a:bodyPr anchor="t" rtlCol="false" tIns="0" lIns="0" bIns="0" rIns="0">
+          <a:bodyPr lIns="0" tIns="0" rIns="0" bIns="0" rtlCol="0" anchor="t">
             <a:spAutoFit/>
           </a:bodyPr>
           <a:lstStyle/>
@@ -9634,12 +9670,12 @@
       </p:sp>
       <p:sp>
         <p:nvSpPr>
-          <p:cNvPr name="TextBox 13" id="13"/>
-          <p:cNvSpPr txBox="true"/>
+          <p:cNvPr id="13" name="TextBox 13"/>
+          <p:cNvSpPr txBox="1"/>
           <p:nvPr/>
         </p:nvSpPr>
         <p:spPr>
-          <a:xfrm rot="0">
+          <a:xfrm>
             <a:off x="5629414" y="1873057"/>
             <a:ext cx="6348710" cy="697150"/>
           </a:xfrm>
@@ -9648,7 +9684,7 @@
           </a:prstGeom>
         </p:spPr>
         <p:txBody>
-          <a:bodyPr anchor="t" rtlCol="false" tIns="0" lIns="0" bIns="0" rIns="0">
+          <a:bodyPr lIns="0" tIns="0" rIns="0" bIns="0" rtlCol="0" anchor="t">
             <a:spAutoFit/>
           </a:bodyPr>
           <a:lstStyle/>
@@ -9671,31 +9707,19 @@
                 <a:cs typeface="Gagalin"/>
                 <a:sym typeface="Gagalin"/>
               </a:rPr>
-              <a:t>S</a:t>
-            </a:r>
-            <a:r>
-              <a:rPr lang="en-US" sz="4053">
-                <a:solidFill>
-                  <a:srgbClr val="FFFFFF"/>
-                </a:solidFill>
-                <a:latin typeface="Gagalin"/>
-                <a:ea typeface="Gagalin"/>
-                <a:cs typeface="Gagalin"/>
-                <a:sym typeface="Gagalin"/>
-              </a:rPr>
-              <a:t>lide 7 – Rules &amp; Guidelines</a:t>
+              <a:t>Slide 7 – Rules &amp; Guidelines</a:t>
             </a:r>
           </a:p>
         </p:txBody>
       </p:sp>
       <p:sp>
         <p:nvSpPr>
-          <p:cNvPr name="TextBox 14" id="14"/>
-          <p:cNvSpPr txBox="true"/>
+          <p:cNvPr id="14" name="TextBox 14"/>
+          <p:cNvSpPr txBox="1"/>
           <p:nvPr/>
         </p:nvSpPr>
         <p:spPr>
-          <a:xfrm rot="0">
+          <a:xfrm>
             <a:off x="570017" y="2904456"/>
             <a:ext cx="17147966" cy="6708261"/>
           </a:xfrm>
@@ -9704,16 +9728,16 @@
           </a:prstGeom>
         </p:spPr>
         <p:txBody>
-          <a:bodyPr anchor="t" rtlCol="false" tIns="0" lIns="0" bIns="0" rIns="0">
+          <a:bodyPr lIns="0" tIns="0" rIns="0" bIns="0" rtlCol="0" anchor="t">
             <a:spAutoFit/>
           </a:bodyPr>
           <a:lstStyle/>
           <a:p>
-            <a:pPr algn="just" marL="544121" indent="-272061" lvl="1">
+            <a:pPr marL="544121" lvl="1" indent="-272061" algn="just">
               <a:lnSpc>
                 <a:spcPts val="3528"/>
               </a:lnSpc>
-              <a:buAutoNum type="arabicPeriod" startAt="1"/>
+              <a:buAutoNum type="arabicPeriod"/>
             </a:pPr>
             <a:r>
               <a:rPr lang="en-US" sz="2520">
@@ -9729,11 +9753,11 @@
             </a:r>
           </a:p>
           <a:p>
-            <a:pPr algn="just" marL="544121" indent="-272061" lvl="1">
+            <a:pPr marL="544121" lvl="1" indent="-272061" algn="just">
               <a:lnSpc>
                 <a:spcPts val="3528"/>
               </a:lnSpc>
-              <a:buAutoNum type="arabicPeriod" startAt="1"/>
+              <a:buAutoNum type="arabicPeriod"/>
             </a:pPr>
             <a:r>
               <a:rPr lang="en-US" sz="2520">
@@ -9749,11 +9773,11 @@
             </a:r>
           </a:p>
           <a:p>
-            <a:pPr algn="just" marL="544121" indent="-272061" lvl="1">
+            <a:pPr marL="544121" lvl="1" indent="-272061" algn="just">
               <a:lnSpc>
                 <a:spcPts val="3528"/>
               </a:lnSpc>
-              <a:buAutoNum type="arabicPeriod" startAt="1"/>
+              <a:buAutoNum type="arabicPeriod"/>
             </a:pPr>
             <a:r>
               <a:rPr lang="en-US" sz="2520">
@@ -9769,11 +9793,11 @@
             </a:r>
           </a:p>
           <a:p>
-            <a:pPr algn="just" marL="544121" indent="-272061" lvl="1">
+            <a:pPr marL="544121" lvl="1" indent="-272061" algn="just">
               <a:lnSpc>
                 <a:spcPts val="3528"/>
               </a:lnSpc>
-              <a:buAutoNum type="arabicPeriod" startAt="1"/>
+              <a:buAutoNum type="arabicPeriod"/>
             </a:pPr>
             <a:r>
               <a:rPr lang="en-US" sz="2520">
@@ -9789,11 +9813,11 @@
             </a:r>
           </a:p>
           <a:p>
-            <a:pPr algn="just" marL="544121" indent="-272061" lvl="1">
+            <a:pPr marL="544121" lvl="1" indent="-272061" algn="just">
               <a:lnSpc>
                 <a:spcPts val="3528"/>
               </a:lnSpc>
-              <a:buAutoNum type="arabicPeriod" startAt="1"/>
+              <a:buAutoNum type="arabicPeriod"/>
             </a:pPr>
             <a:r>
               <a:rPr lang="en-US" sz="2520">
@@ -9809,11 +9833,11 @@
             </a:r>
           </a:p>
           <a:p>
-            <a:pPr algn="just" marL="544121" indent="-272061" lvl="1">
+            <a:pPr marL="544121" lvl="1" indent="-272061" algn="just">
               <a:lnSpc>
                 <a:spcPts val="3528"/>
               </a:lnSpc>
-              <a:buAutoNum type="arabicPeriod" startAt="1"/>
+              <a:buAutoNum type="arabicPeriod"/>
             </a:pPr>
             <a:r>
               <a:rPr lang="en-US" sz="2520">
@@ -9829,11 +9853,11 @@
             </a:r>
           </a:p>
           <a:p>
-            <a:pPr algn="just" marL="544121" indent="-272061" lvl="1">
+            <a:pPr marL="544121" lvl="1" indent="-272061" algn="just">
               <a:lnSpc>
                 <a:spcPts val="3528"/>
               </a:lnSpc>
-              <a:buAutoNum type="arabicPeriod" startAt="1"/>
+              <a:buAutoNum type="arabicPeriod"/>
             </a:pPr>
             <a:r>
               <a:rPr lang="en-US" sz="2520">
@@ -9849,11 +9873,11 @@
             </a:r>
           </a:p>
           <a:p>
-            <a:pPr algn="just" marL="544121" indent="-272061" lvl="1">
+            <a:pPr marL="544121" lvl="1" indent="-272061" algn="just">
               <a:lnSpc>
                 <a:spcPts val="3528"/>
               </a:lnSpc>
-              <a:buAutoNum type="arabicPeriod" startAt="1"/>
+              <a:buAutoNum type="arabicPeriod"/>
             </a:pPr>
             <a:r>
               <a:rPr lang="en-US" sz="2520">
@@ -9874,6 +9898,15 @@
                 <a:spcPts val="3528"/>
               </a:lnSpc>
             </a:pPr>
+            <a:endParaRPr lang="en-US" sz="2520">
+              <a:solidFill>
+                <a:srgbClr val="FFFFFF"/>
+              </a:solidFill>
+              <a:latin typeface="Canva Sans"/>
+              <a:ea typeface="Canva Sans"/>
+              <a:cs typeface="Canva Sans"/>
+              <a:sym typeface="Canva Sans"/>
+            </a:endParaRPr>
           </a:p>
           <a:p>
             <a:pPr algn="ctr">
@@ -9882,7 +9915,7 @@
               </a:lnSpc>
             </a:pPr>
             <a:r>
-              <a:rPr lang="en-US" b="true" sz="2520">
+              <a:rPr lang="en-US" sz="2520" b="1">
                 <a:solidFill>
                   <a:srgbClr val="FF5757"/>
                 </a:solidFill>
@@ -9898,12 +9931,12 @@
       </p:sp>
       <p:sp>
         <p:nvSpPr>
-          <p:cNvPr name="Freeform 15" id="15"/>
+          <p:cNvPr id="15" name="Freeform 15"/>
           <p:cNvSpPr/>
           <p:nvPr/>
         </p:nvSpPr>
         <p:spPr>
-          <a:xfrm flipH="false" flipV="false" rot="0">
+          <a:xfrm>
             <a:off x="230308" y="179485"/>
             <a:ext cx="3140115" cy="1083728"/>
           </a:xfrm>
@@ -9912,9 +9945,9 @@
             <a:gdLst/>
             <a:ahLst/>
             <a:cxnLst/>
-            <a:rect r="r" b="b" t="t" l="l"/>
+            <a:rect l="l" t="t" r="r" b="b"/>
             <a:pathLst>
-              <a:path h="1083728" w="3140115">
+              <a:path w="3140115" h="1083728">
                 <a:moveTo>
                   <a:pt x="0" y="0"/>
                 </a:moveTo>
@@ -9937,19 +9970,19 @@
           <a:blipFill>
             <a:blip r:embed="rId3"/>
             <a:stretch>
-              <a:fillRect l="0" t="0" r="-17991" b="0"/>
+              <a:fillRect r="-17991"/>
             </a:stretch>
           </a:blipFill>
         </p:spPr>
       </p:sp>
       <p:grpSp>
         <p:nvGrpSpPr>
-          <p:cNvPr name="Group 16" id="16"/>
+          <p:cNvPr id="16" name="Group 16"/>
           <p:cNvGrpSpPr/>
           <p:nvPr/>
         </p:nvGrpSpPr>
         <p:grpSpPr>
-          <a:xfrm rot="0">
+          <a:xfrm>
             <a:off x="15042849" y="334869"/>
             <a:ext cx="2744013" cy="745256"/>
             <a:chOff x="0" y="0"/>
@@ -9958,12 +9991,12 @@
         </p:grpSpPr>
         <p:sp>
           <p:nvSpPr>
-            <p:cNvPr name="Freeform 17" id="17"/>
+            <p:cNvPr id="17" name="Freeform 17"/>
             <p:cNvSpPr/>
             <p:nvPr/>
           </p:nvSpPr>
           <p:spPr>
-            <a:xfrm flipH="false" flipV="false" rot="0">
+            <a:xfrm>
               <a:off x="0" y="0"/>
               <a:ext cx="832935" cy="993675"/>
             </a:xfrm>
@@ -9972,9 +10005,9 @@
               <a:gdLst/>
               <a:ahLst/>
               <a:cxnLst/>
-              <a:rect r="r" b="b" t="t" l="l"/>
+              <a:rect l="l" t="t" r="r" b="b"/>
               <a:pathLst>
-                <a:path h="993675" w="832935">
+                <a:path w="832935" h="993675">
                   <a:moveTo>
                     <a:pt x="0" y="0"/>
                   </a:moveTo>
@@ -10004,12 +10037,12 @@
         </p:sp>
         <p:sp>
           <p:nvSpPr>
-            <p:cNvPr name="TextBox 18" id="18"/>
-            <p:cNvSpPr txBox="true"/>
+            <p:cNvPr id="18" name="TextBox 18"/>
+            <p:cNvSpPr txBox="1"/>
             <p:nvPr/>
           </p:nvSpPr>
           <p:spPr>
-            <a:xfrm rot="0">
+            <a:xfrm>
               <a:off x="946119" y="144465"/>
               <a:ext cx="2356744" cy="562598"/>
             </a:xfrm>
@@ -10018,7 +10051,7 @@
             </a:prstGeom>
           </p:spPr>
           <p:txBody>
-            <a:bodyPr anchor="t" rtlCol="false" tIns="0" lIns="0" bIns="0" rIns="0">
+            <a:bodyPr lIns="0" tIns="0" rIns="0" bIns="0" rtlCol="0" anchor="t">
               <a:spAutoFit/>
             </a:bodyPr>
             <a:lstStyle/>
@@ -10048,12 +10081,12 @@
         </p:sp>
         <p:sp>
           <p:nvSpPr>
-            <p:cNvPr name="TextBox 19" id="19"/>
-            <p:cNvSpPr txBox="true"/>
+            <p:cNvPr id="19" name="TextBox 19"/>
+            <p:cNvSpPr txBox="1"/>
             <p:nvPr/>
           </p:nvSpPr>
           <p:spPr>
-            <a:xfrm rot="0">
+            <a:xfrm>
               <a:off x="691558" y="676707"/>
               <a:ext cx="2967126" cy="198664"/>
             </a:xfrm>
@@ -10062,7 +10095,7 @@
             </a:prstGeom>
           </p:spPr>
           <p:txBody>
-            <a:bodyPr anchor="t" rtlCol="false" tIns="0" lIns="0" bIns="0" rIns="0">
+            <a:bodyPr lIns="0" tIns="0" rIns="0" bIns="0" rtlCol="0" anchor="t">
               <a:spAutoFit/>
             </a:bodyPr>
             <a:lstStyle/>
@@ -10093,12 +10126,12 @@
       </p:grpSp>
       <p:sp>
         <p:nvSpPr>
-          <p:cNvPr name="TextBox 20" id="20"/>
-          <p:cNvSpPr txBox="true"/>
+          <p:cNvPr id="20" name="TextBox 20"/>
+          <p:cNvSpPr txBox="1"/>
           <p:nvPr/>
         </p:nvSpPr>
         <p:spPr>
-          <a:xfrm rot="0">
+          <a:xfrm>
             <a:off x="7493374" y="9832687"/>
             <a:ext cx="3083970" cy="273240"/>
           </a:xfrm>
@@ -10107,7 +10140,7 @@
           </a:prstGeom>
         </p:spPr>
         <p:txBody>
-          <a:bodyPr anchor="t" rtlCol="false" tIns="0" lIns="0" bIns="0" rIns="0">
+          <a:bodyPr lIns="0" tIns="0" rIns="0" bIns="0" rtlCol="0" anchor="t">
             <a:spAutoFit/>
           </a:bodyPr>
           <a:lstStyle/>
@@ -10137,12 +10170,12 @@
       </p:sp>
       <p:grpSp>
         <p:nvGrpSpPr>
-          <p:cNvPr name="Group 21" id="21"/>
+          <p:cNvPr id="21" name="Group 21"/>
           <p:cNvGrpSpPr/>
           <p:nvPr/>
         </p:nvGrpSpPr>
         <p:grpSpPr>
-          <a:xfrm rot="0">
+          <a:xfrm>
             <a:off x="7397943" y="165633"/>
             <a:ext cx="3274833" cy="1083728"/>
             <a:chOff x="0" y="0"/>
@@ -10151,12 +10184,12 @@
         </p:grpSpPr>
         <p:sp>
           <p:nvSpPr>
-            <p:cNvPr name="TextBox 22" id="22"/>
-            <p:cNvSpPr txBox="true"/>
+            <p:cNvPr id="22" name="TextBox 22"/>
+            <p:cNvSpPr txBox="1"/>
             <p:nvPr/>
           </p:nvSpPr>
           <p:spPr>
-            <a:xfrm rot="0">
+            <a:xfrm>
               <a:off x="0" y="-142875"/>
               <a:ext cx="3820161" cy="1523444"/>
             </a:xfrm>
@@ -10165,7 +10198,7 @@
             </a:prstGeom>
           </p:spPr>
           <p:txBody>
-            <a:bodyPr anchor="t" rtlCol="false" tIns="0" lIns="0" bIns="0" rIns="0">
+            <a:bodyPr lIns="0" tIns="0" rIns="0" bIns="0" rtlCol="0" anchor="t">
               <a:spAutoFit/>
             </a:bodyPr>
             <a:lstStyle/>
@@ -10195,12 +10228,12 @@
         </p:sp>
         <p:sp>
           <p:nvSpPr>
-            <p:cNvPr name="TextBox 23" id="23"/>
-            <p:cNvSpPr txBox="true"/>
+            <p:cNvPr id="23" name="TextBox 23"/>
+            <p:cNvSpPr txBox="1"/>
             <p:nvPr/>
           </p:nvSpPr>
           <p:spPr>
-            <a:xfrm rot="0">
+            <a:xfrm>
               <a:off x="68219" y="-78472"/>
               <a:ext cx="3820161" cy="1523444"/>
             </a:xfrm>
@@ -10209,7 +10242,7 @@
             </a:prstGeom>
           </p:spPr>
           <p:txBody>
-            <a:bodyPr anchor="t" rtlCol="false" tIns="0" lIns="0" bIns="0" rIns="0">
+            <a:bodyPr lIns="0" tIns="0" rIns="0" bIns="0" rtlCol="0" anchor="t">
               <a:spAutoFit/>
             </a:bodyPr>
             <a:lstStyle/>
@@ -10239,12 +10272,12 @@
         </p:sp>
         <p:sp>
           <p:nvSpPr>
-            <p:cNvPr name="TextBox 24" id="24"/>
-            <p:cNvSpPr txBox="true"/>
+            <p:cNvPr id="24" name="TextBox 24"/>
+            <p:cNvSpPr txBox="1"/>
             <p:nvPr/>
           </p:nvSpPr>
           <p:spPr>
-            <a:xfrm rot="0">
+            <a:xfrm>
               <a:off x="33321" y="-106547"/>
               <a:ext cx="3820161" cy="1523444"/>
             </a:xfrm>
@@ -10253,7 +10286,7 @@
             </a:prstGeom>
           </p:spPr>
           <p:txBody>
-            <a:bodyPr anchor="t" rtlCol="false" tIns="0" lIns="0" bIns="0" rIns="0">
+            <a:bodyPr lIns="0" tIns="0" rIns="0" bIns="0" rtlCol="0" anchor="t">
               <a:spAutoFit/>
             </a:bodyPr>
             <a:lstStyle/>
@@ -10283,12 +10316,12 @@
         </p:sp>
         <p:sp>
           <p:nvSpPr>
-            <p:cNvPr name="TextBox 25" id="25"/>
-            <p:cNvSpPr txBox="true"/>
+            <p:cNvPr id="25" name="TextBox 25"/>
+            <p:cNvSpPr txBox="1"/>
             <p:nvPr/>
           </p:nvSpPr>
           <p:spPr>
-            <a:xfrm rot="0">
+            <a:xfrm>
               <a:off x="3340520" y="415474"/>
               <a:ext cx="1025923" cy="965094"/>
             </a:xfrm>
@@ -10297,7 +10330,7 @@
             </a:prstGeom>
           </p:spPr>
           <p:txBody>
-            <a:bodyPr anchor="t" rtlCol="false" tIns="0" lIns="0" bIns="0" rIns="0">
+            <a:bodyPr lIns="0" tIns="0" rIns="0" bIns="0" rtlCol="0" anchor="t">
               <a:spAutoFit/>
             </a:bodyPr>
             <a:lstStyle/>
